--- a/Docs/Midway Review/Midway_Review_Rashid.pptx
+++ b/Docs/Midway Review/Midway_Review_Rashid.pptx
@@ -4,13 +4,17 @@
   <p:sldMasterIdLst>
     <p:sldMasterId id="2147483648" r:id="rId1"/>
   </p:sldMasterIdLst>
+  <p:notesMasterIdLst>
+    <p:notesMasterId r:id="rId9"/>
+  </p:notesMasterIdLst>
   <p:sldIdLst>
     <p:sldId id="256" r:id="rId2"/>
     <p:sldId id="257" r:id="rId3"/>
     <p:sldId id="258" r:id="rId4"/>
     <p:sldId id="259" r:id="rId5"/>
-    <p:sldId id="260" r:id="rId6"/>
-    <p:sldId id="261" r:id="rId7"/>
+    <p:sldId id="262" r:id="rId6"/>
+    <p:sldId id="260" r:id="rId7"/>
+    <p:sldId id="261" r:id="rId8"/>
   </p:sldIdLst>
   <p:sldSz cx="9144000" cy="6858000" type="screen4x3"/>
   <p:notesSz cx="6858000" cy="9144000"/>
@@ -129,7 +133,754 @@
 </file>
 
 <file path=ppt/diagrams/colors1.xml><?xml version="1.0" encoding="utf-8"?>
-<dgm:colorsDef xmlns:dgm="http://schemas.openxmlformats.org/drawingml/2006/diagram" xmlns:a="http://schemas.openxmlformats.org/drawingml/2006/main" uniqueId="urn:microsoft.com/office/officeart/2005/8/colors/colorful2">
+<dgm:colorsDef xmlns:dgm="http://schemas.openxmlformats.org/drawingml/2006/diagram" xmlns:a="http://schemas.openxmlformats.org/drawingml/2006/main" uniqueId="urn:microsoft.com/office/officeart/2005/8/colors/accent2_2">
+  <dgm:title val=""/>
+  <dgm:desc val=""/>
+  <dgm:catLst>
+    <dgm:cat type="accent2" pri="11200"/>
+  </dgm:catLst>
+  <dgm:styleLbl name="node0">
+    <dgm:fillClrLst meth="repeat">
+      <a:schemeClr val="accent2"/>
+    </dgm:fillClrLst>
+    <dgm:linClrLst meth="repeat">
+      <a:schemeClr val="lt1"/>
+    </dgm:linClrLst>
+    <dgm:effectClrLst/>
+    <dgm:txLinClrLst/>
+    <dgm:txFillClrLst/>
+    <dgm:txEffectClrLst/>
+  </dgm:styleLbl>
+  <dgm:styleLbl name="node1">
+    <dgm:fillClrLst meth="repeat">
+      <a:schemeClr val="accent2"/>
+    </dgm:fillClrLst>
+    <dgm:linClrLst meth="repeat">
+      <a:schemeClr val="lt1"/>
+    </dgm:linClrLst>
+    <dgm:effectClrLst/>
+    <dgm:txLinClrLst/>
+    <dgm:txFillClrLst/>
+    <dgm:txEffectClrLst/>
+  </dgm:styleLbl>
+  <dgm:styleLbl name="alignNode1">
+    <dgm:fillClrLst meth="repeat">
+      <a:schemeClr val="accent2"/>
+    </dgm:fillClrLst>
+    <dgm:linClrLst meth="repeat">
+      <a:schemeClr val="accent2"/>
+    </dgm:linClrLst>
+    <dgm:effectClrLst/>
+    <dgm:txLinClrLst/>
+    <dgm:txFillClrLst/>
+    <dgm:txEffectClrLst/>
+  </dgm:styleLbl>
+  <dgm:styleLbl name="lnNode1">
+    <dgm:fillClrLst meth="repeat">
+      <a:schemeClr val="accent2"/>
+    </dgm:fillClrLst>
+    <dgm:linClrLst meth="repeat">
+      <a:schemeClr val="lt1"/>
+    </dgm:linClrLst>
+    <dgm:effectClrLst/>
+    <dgm:txLinClrLst/>
+    <dgm:txFillClrLst/>
+    <dgm:txEffectClrLst/>
+  </dgm:styleLbl>
+  <dgm:styleLbl name="vennNode1">
+    <dgm:fillClrLst meth="repeat">
+      <a:schemeClr val="accent2">
+        <a:alpha val="50000"/>
+      </a:schemeClr>
+    </dgm:fillClrLst>
+    <dgm:linClrLst meth="repeat">
+      <a:schemeClr val="lt1"/>
+    </dgm:linClrLst>
+    <dgm:effectClrLst/>
+    <dgm:txLinClrLst/>
+    <dgm:txFillClrLst/>
+    <dgm:txEffectClrLst/>
+  </dgm:styleLbl>
+  <dgm:styleLbl name="node2">
+    <dgm:fillClrLst meth="repeat">
+      <a:schemeClr val="accent2"/>
+    </dgm:fillClrLst>
+    <dgm:linClrLst meth="repeat">
+      <a:schemeClr val="lt1"/>
+    </dgm:linClrLst>
+    <dgm:effectClrLst/>
+    <dgm:txLinClrLst/>
+    <dgm:txFillClrLst/>
+    <dgm:txEffectClrLst/>
+  </dgm:styleLbl>
+  <dgm:styleLbl name="node3">
+    <dgm:fillClrLst meth="repeat">
+      <a:schemeClr val="accent2"/>
+    </dgm:fillClrLst>
+    <dgm:linClrLst meth="repeat">
+      <a:schemeClr val="lt1"/>
+    </dgm:linClrLst>
+    <dgm:effectClrLst/>
+    <dgm:txLinClrLst/>
+    <dgm:txFillClrLst/>
+    <dgm:txEffectClrLst/>
+  </dgm:styleLbl>
+  <dgm:styleLbl name="node4">
+    <dgm:fillClrLst meth="repeat">
+      <a:schemeClr val="accent2"/>
+    </dgm:fillClrLst>
+    <dgm:linClrLst meth="repeat">
+      <a:schemeClr val="lt1"/>
+    </dgm:linClrLst>
+    <dgm:effectClrLst/>
+    <dgm:txLinClrLst/>
+    <dgm:txFillClrLst/>
+    <dgm:txEffectClrLst/>
+  </dgm:styleLbl>
+  <dgm:styleLbl name="fgImgPlace1">
+    <dgm:fillClrLst meth="repeat">
+      <a:schemeClr val="accent2">
+        <a:tint val="50000"/>
+      </a:schemeClr>
+    </dgm:fillClrLst>
+    <dgm:linClrLst meth="repeat">
+      <a:schemeClr val="lt1"/>
+    </dgm:linClrLst>
+    <dgm:effectClrLst/>
+    <dgm:txLinClrLst/>
+    <dgm:txFillClrLst meth="repeat">
+      <a:schemeClr val="lt1"/>
+    </dgm:txFillClrLst>
+    <dgm:txEffectClrLst/>
+  </dgm:styleLbl>
+  <dgm:styleLbl name="alignImgPlace1">
+    <dgm:fillClrLst meth="repeat">
+      <a:schemeClr val="accent2">
+        <a:tint val="50000"/>
+      </a:schemeClr>
+    </dgm:fillClrLst>
+    <dgm:linClrLst meth="repeat">
+      <a:schemeClr val="lt1"/>
+    </dgm:linClrLst>
+    <dgm:effectClrLst/>
+    <dgm:txLinClrLst/>
+    <dgm:txFillClrLst meth="repeat">
+      <a:schemeClr val="lt1"/>
+    </dgm:txFillClrLst>
+    <dgm:txEffectClrLst/>
+  </dgm:styleLbl>
+  <dgm:styleLbl name="bgImgPlace1">
+    <dgm:fillClrLst meth="repeat">
+      <a:schemeClr val="accent2">
+        <a:tint val="50000"/>
+      </a:schemeClr>
+    </dgm:fillClrLst>
+    <dgm:linClrLst meth="repeat">
+      <a:schemeClr val="lt1"/>
+    </dgm:linClrLst>
+    <dgm:effectClrLst/>
+    <dgm:txLinClrLst/>
+    <dgm:txFillClrLst meth="repeat">
+      <a:schemeClr val="lt1"/>
+    </dgm:txFillClrLst>
+    <dgm:txEffectClrLst/>
+  </dgm:styleLbl>
+  <dgm:styleLbl name="sibTrans2D1">
+    <dgm:fillClrLst meth="repeat">
+      <a:schemeClr val="accent2">
+        <a:tint val="60000"/>
+      </a:schemeClr>
+    </dgm:fillClrLst>
+    <dgm:linClrLst meth="repeat">
+      <a:schemeClr val="accent2">
+        <a:tint val="60000"/>
+      </a:schemeClr>
+    </dgm:linClrLst>
+    <dgm:effectClrLst/>
+    <dgm:txLinClrLst/>
+    <dgm:txFillClrLst/>
+    <dgm:txEffectClrLst/>
+  </dgm:styleLbl>
+  <dgm:styleLbl name="fgSibTrans2D1">
+    <dgm:fillClrLst meth="repeat">
+      <a:schemeClr val="accent2">
+        <a:tint val="60000"/>
+      </a:schemeClr>
+    </dgm:fillClrLst>
+    <dgm:linClrLst meth="repeat">
+      <a:schemeClr val="accent2">
+        <a:tint val="60000"/>
+      </a:schemeClr>
+    </dgm:linClrLst>
+    <dgm:effectClrLst/>
+    <dgm:txLinClrLst/>
+    <dgm:txFillClrLst/>
+    <dgm:txEffectClrLst/>
+  </dgm:styleLbl>
+  <dgm:styleLbl name="bgSibTrans2D1">
+    <dgm:fillClrLst meth="repeat">
+      <a:schemeClr val="accent2">
+        <a:tint val="60000"/>
+      </a:schemeClr>
+    </dgm:fillClrLst>
+    <dgm:linClrLst meth="repeat">
+      <a:schemeClr val="accent2">
+        <a:tint val="60000"/>
+      </a:schemeClr>
+    </dgm:linClrLst>
+    <dgm:effectClrLst/>
+    <dgm:txLinClrLst/>
+    <dgm:txFillClrLst/>
+    <dgm:txEffectClrLst/>
+  </dgm:styleLbl>
+  <dgm:styleLbl name="sibTrans1D1">
+    <dgm:fillClrLst meth="repeat">
+      <a:schemeClr val="accent2"/>
+    </dgm:fillClrLst>
+    <dgm:linClrLst meth="repeat">
+      <a:schemeClr val="accent2"/>
+    </dgm:linClrLst>
+    <dgm:effectClrLst/>
+    <dgm:txLinClrLst/>
+    <dgm:txFillClrLst meth="repeat">
+      <a:schemeClr val="tx1"/>
+    </dgm:txFillClrLst>
+    <dgm:txEffectClrLst/>
+  </dgm:styleLbl>
+  <dgm:styleLbl name="callout">
+    <dgm:fillClrLst meth="repeat">
+      <a:schemeClr val="accent2"/>
+    </dgm:fillClrLst>
+    <dgm:linClrLst meth="repeat">
+      <a:schemeClr val="accent2">
+        <a:tint val="50000"/>
+      </a:schemeClr>
+    </dgm:linClrLst>
+    <dgm:effectClrLst/>
+    <dgm:txLinClrLst/>
+    <dgm:txFillClrLst meth="repeat">
+      <a:schemeClr val="tx1"/>
+    </dgm:txFillClrLst>
+    <dgm:txEffectClrLst/>
+  </dgm:styleLbl>
+  <dgm:styleLbl name="asst0">
+    <dgm:fillClrLst meth="repeat">
+      <a:schemeClr val="accent2"/>
+    </dgm:fillClrLst>
+    <dgm:linClrLst meth="repeat">
+      <a:schemeClr val="lt1"/>
+    </dgm:linClrLst>
+    <dgm:effectClrLst/>
+    <dgm:txLinClrLst/>
+    <dgm:txFillClrLst/>
+    <dgm:txEffectClrLst/>
+  </dgm:styleLbl>
+  <dgm:styleLbl name="asst1">
+    <dgm:fillClrLst meth="repeat">
+      <a:schemeClr val="accent2"/>
+    </dgm:fillClrLst>
+    <dgm:linClrLst meth="repeat">
+      <a:schemeClr val="lt1"/>
+    </dgm:linClrLst>
+    <dgm:effectClrLst/>
+    <dgm:txLinClrLst/>
+    <dgm:txFillClrLst/>
+    <dgm:txEffectClrLst/>
+  </dgm:styleLbl>
+  <dgm:styleLbl name="asst2">
+    <dgm:fillClrLst meth="repeat">
+      <a:schemeClr val="accent2"/>
+    </dgm:fillClrLst>
+    <dgm:linClrLst meth="repeat">
+      <a:schemeClr val="lt1"/>
+    </dgm:linClrLst>
+    <dgm:effectClrLst/>
+    <dgm:txLinClrLst/>
+    <dgm:txFillClrLst/>
+    <dgm:txEffectClrLst/>
+  </dgm:styleLbl>
+  <dgm:styleLbl name="asst3">
+    <dgm:fillClrLst meth="repeat">
+      <a:schemeClr val="accent2"/>
+    </dgm:fillClrLst>
+    <dgm:linClrLst meth="repeat">
+      <a:schemeClr val="lt1"/>
+    </dgm:linClrLst>
+    <dgm:effectClrLst/>
+    <dgm:txLinClrLst/>
+    <dgm:txFillClrLst/>
+    <dgm:txEffectClrLst/>
+  </dgm:styleLbl>
+  <dgm:styleLbl name="asst4">
+    <dgm:fillClrLst meth="repeat">
+      <a:schemeClr val="accent2"/>
+    </dgm:fillClrLst>
+    <dgm:linClrLst meth="repeat">
+      <a:schemeClr val="lt1"/>
+    </dgm:linClrLst>
+    <dgm:effectClrLst/>
+    <dgm:txLinClrLst/>
+    <dgm:txFillClrLst/>
+    <dgm:txEffectClrLst/>
+  </dgm:styleLbl>
+  <dgm:styleLbl name="parChTrans2D1">
+    <dgm:fillClrLst meth="repeat">
+      <a:schemeClr val="accent2">
+        <a:tint val="60000"/>
+      </a:schemeClr>
+    </dgm:fillClrLst>
+    <dgm:linClrLst meth="repeat">
+      <a:schemeClr val="accent2">
+        <a:tint val="60000"/>
+      </a:schemeClr>
+    </dgm:linClrLst>
+    <dgm:effectClrLst/>
+    <dgm:txLinClrLst/>
+    <dgm:txFillClrLst meth="repeat">
+      <a:schemeClr val="lt1"/>
+    </dgm:txFillClrLst>
+    <dgm:txEffectClrLst/>
+  </dgm:styleLbl>
+  <dgm:styleLbl name="parChTrans2D2">
+    <dgm:fillClrLst meth="repeat">
+      <a:schemeClr val="accent2"/>
+    </dgm:fillClrLst>
+    <dgm:linClrLst meth="repeat">
+      <a:schemeClr val="accent2"/>
+    </dgm:linClrLst>
+    <dgm:effectClrLst/>
+    <dgm:txLinClrLst/>
+    <dgm:txFillClrLst meth="repeat">
+      <a:schemeClr val="lt1"/>
+    </dgm:txFillClrLst>
+    <dgm:txEffectClrLst/>
+  </dgm:styleLbl>
+  <dgm:styleLbl name="parChTrans2D3">
+    <dgm:fillClrLst meth="repeat">
+      <a:schemeClr val="accent2"/>
+    </dgm:fillClrLst>
+    <dgm:linClrLst meth="repeat">
+      <a:schemeClr val="accent2"/>
+    </dgm:linClrLst>
+    <dgm:effectClrLst/>
+    <dgm:txLinClrLst/>
+    <dgm:txFillClrLst meth="repeat">
+      <a:schemeClr val="lt1"/>
+    </dgm:txFillClrLst>
+    <dgm:txEffectClrLst/>
+  </dgm:styleLbl>
+  <dgm:styleLbl name="parChTrans2D4">
+    <dgm:fillClrLst meth="repeat">
+      <a:schemeClr val="accent2"/>
+    </dgm:fillClrLst>
+    <dgm:linClrLst meth="repeat">
+      <a:schemeClr val="accent2"/>
+    </dgm:linClrLst>
+    <dgm:effectClrLst/>
+    <dgm:txLinClrLst/>
+    <dgm:txFillClrLst meth="repeat">
+      <a:schemeClr val="lt1"/>
+    </dgm:txFillClrLst>
+    <dgm:txEffectClrLst/>
+  </dgm:styleLbl>
+  <dgm:styleLbl name="parChTrans1D1">
+    <dgm:fillClrLst meth="repeat">
+      <a:schemeClr val="accent2"/>
+    </dgm:fillClrLst>
+    <dgm:linClrLst meth="repeat">
+      <a:schemeClr val="accent2">
+        <a:shade val="60000"/>
+      </a:schemeClr>
+    </dgm:linClrLst>
+    <dgm:effectClrLst/>
+    <dgm:txLinClrLst/>
+    <dgm:txFillClrLst meth="repeat">
+      <a:schemeClr val="tx1"/>
+    </dgm:txFillClrLst>
+    <dgm:txEffectClrLst/>
+  </dgm:styleLbl>
+  <dgm:styleLbl name="parChTrans1D2">
+    <dgm:fillClrLst meth="repeat">
+      <a:schemeClr val="accent2"/>
+    </dgm:fillClrLst>
+    <dgm:linClrLst meth="repeat">
+      <a:schemeClr val="accent2">
+        <a:shade val="60000"/>
+      </a:schemeClr>
+    </dgm:linClrLst>
+    <dgm:effectClrLst/>
+    <dgm:txLinClrLst/>
+    <dgm:txFillClrLst meth="repeat">
+      <a:schemeClr val="tx1"/>
+    </dgm:txFillClrLst>
+    <dgm:txEffectClrLst/>
+  </dgm:styleLbl>
+  <dgm:styleLbl name="parChTrans1D3">
+    <dgm:fillClrLst meth="repeat">
+      <a:schemeClr val="accent2"/>
+    </dgm:fillClrLst>
+    <dgm:linClrLst meth="repeat">
+      <a:schemeClr val="accent2">
+        <a:shade val="80000"/>
+      </a:schemeClr>
+    </dgm:linClrLst>
+    <dgm:effectClrLst/>
+    <dgm:txLinClrLst/>
+    <dgm:txFillClrLst meth="repeat">
+      <a:schemeClr val="tx1"/>
+    </dgm:txFillClrLst>
+    <dgm:txEffectClrLst/>
+  </dgm:styleLbl>
+  <dgm:styleLbl name="parChTrans1D4">
+    <dgm:fillClrLst meth="repeat">
+      <a:schemeClr val="accent2"/>
+    </dgm:fillClrLst>
+    <dgm:linClrLst meth="repeat">
+      <a:schemeClr val="accent2">
+        <a:shade val="80000"/>
+      </a:schemeClr>
+    </dgm:linClrLst>
+    <dgm:effectClrLst/>
+    <dgm:txLinClrLst/>
+    <dgm:txFillClrLst meth="repeat">
+      <a:schemeClr val="tx1"/>
+    </dgm:txFillClrLst>
+    <dgm:txEffectClrLst/>
+  </dgm:styleLbl>
+  <dgm:styleLbl name="fgAcc1">
+    <dgm:fillClrLst meth="repeat">
+      <a:schemeClr val="lt1">
+        <a:alpha val="90000"/>
+      </a:schemeClr>
+    </dgm:fillClrLst>
+    <dgm:linClrLst meth="repeat">
+      <a:schemeClr val="accent2"/>
+    </dgm:linClrLst>
+    <dgm:effectClrLst/>
+    <dgm:txLinClrLst/>
+    <dgm:txFillClrLst meth="repeat">
+      <a:schemeClr val="dk1"/>
+    </dgm:txFillClrLst>
+    <dgm:txEffectClrLst/>
+  </dgm:styleLbl>
+  <dgm:styleLbl name="conFgAcc1">
+    <dgm:fillClrLst meth="repeat">
+      <a:schemeClr val="lt1">
+        <a:alpha val="90000"/>
+      </a:schemeClr>
+    </dgm:fillClrLst>
+    <dgm:linClrLst meth="repeat">
+      <a:schemeClr val="accent2"/>
+    </dgm:linClrLst>
+    <dgm:effectClrLst/>
+    <dgm:txLinClrLst/>
+    <dgm:txFillClrLst meth="repeat">
+      <a:schemeClr val="dk1"/>
+    </dgm:txFillClrLst>
+    <dgm:txEffectClrLst/>
+  </dgm:styleLbl>
+  <dgm:styleLbl name="alignAcc1">
+    <dgm:fillClrLst meth="repeat">
+      <a:schemeClr val="lt1">
+        <a:alpha val="90000"/>
+      </a:schemeClr>
+    </dgm:fillClrLst>
+    <dgm:linClrLst meth="repeat">
+      <a:schemeClr val="accent2"/>
+    </dgm:linClrLst>
+    <dgm:effectClrLst/>
+    <dgm:txLinClrLst/>
+    <dgm:txFillClrLst meth="repeat">
+      <a:schemeClr val="dk1"/>
+    </dgm:txFillClrLst>
+    <dgm:txEffectClrLst/>
+  </dgm:styleLbl>
+  <dgm:styleLbl name="trAlignAcc1">
+    <dgm:fillClrLst meth="repeat">
+      <a:schemeClr val="lt1">
+        <a:alpha val="40000"/>
+      </a:schemeClr>
+    </dgm:fillClrLst>
+    <dgm:linClrLst meth="repeat">
+      <a:schemeClr val="accent2"/>
+    </dgm:linClrLst>
+    <dgm:effectClrLst/>
+    <dgm:txLinClrLst/>
+    <dgm:txFillClrLst meth="repeat">
+      <a:schemeClr val="dk1"/>
+    </dgm:txFillClrLst>
+    <dgm:txEffectClrLst/>
+  </dgm:styleLbl>
+  <dgm:styleLbl name="bgAcc1">
+    <dgm:fillClrLst meth="repeat">
+      <a:schemeClr val="lt1">
+        <a:alpha val="90000"/>
+      </a:schemeClr>
+    </dgm:fillClrLst>
+    <dgm:linClrLst meth="repeat">
+      <a:schemeClr val="accent2"/>
+    </dgm:linClrLst>
+    <dgm:effectClrLst/>
+    <dgm:txLinClrLst/>
+    <dgm:txFillClrLst meth="repeat">
+      <a:schemeClr val="dk1"/>
+    </dgm:txFillClrLst>
+    <dgm:txEffectClrLst/>
+  </dgm:styleLbl>
+  <dgm:styleLbl name="solidFgAcc1">
+    <dgm:fillClrLst meth="repeat">
+      <a:schemeClr val="lt1"/>
+    </dgm:fillClrLst>
+    <dgm:linClrLst meth="repeat">
+      <a:schemeClr val="accent2"/>
+    </dgm:linClrLst>
+    <dgm:effectClrLst/>
+    <dgm:txLinClrLst/>
+    <dgm:txFillClrLst meth="repeat">
+      <a:schemeClr val="dk1"/>
+    </dgm:txFillClrLst>
+    <dgm:txEffectClrLst/>
+  </dgm:styleLbl>
+  <dgm:styleLbl name="solidAlignAcc1">
+    <dgm:fillClrLst meth="repeat">
+      <a:schemeClr val="lt1"/>
+    </dgm:fillClrLst>
+    <dgm:linClrLst meth="repeat">
+      <a:schemeClr val="accent2"/>
+    </dgm:linClrLst>
+    <dgm:effectClrLst/>
+    <dgm:txLinClrLst/>
+    <dgm:txFillClrLst meth="repeat">
+      <a:schemeClr val="dk1"/>
+    </dgm:txFillClrLst>
+    <dgm:txEffectClrLst/>
+  </dgm:styleLbl>
+  <dgm:styleLbl name="solidBgAcc1">
+    <dgm:fillClrLst meth="repeat">
+      <a:schemeClr val="lt1"/>
+    </dgm:fillClrLst>
+    <dgm:linClrLst meth="repeat">
+      <a:schemeClr val="accent2"/>
+    </dgm:linClrLst>
+    <dgm:effectClrLst/>
+    <dgm:txLinClrLst/>
+    <dgm:txFillClrLst meth="repeat">
+      <a:schemeClr val="dk1"/>
+    </dgm:txFillClrLst>
+    <dgm:txEffectClrLst/>
+  </dgm:styleLbl>
+  <dgm:styleLbl name="fgAccFollowNode1">
+    <dgm:fillClrLst meth="repeat">
+      <a:schemeClr val="accent2">
+        <a:alpha val="90000"/>
+        <a:tint val="40000"/>
+      </a:schemeClr>
+    </dgm:fillClrLst>
+    <dgm:linClrLst meth="repeat">
+      <a:schemeClr val="accent2">
+        <a:alpha val="90000"/>
+        <a:tint val="40000"/>
+      </a:schemeClr>
+    </dgm:linClrLst>
+    <dgm:effectClrLst/>
+    <dgm:txLinClrLst/>
+    <dgm:txFillClrLst meth="repeat">
+      <a:schemeClr val="dk1"/>
+    </dgm:txFillClrLst>
+    <dgm:txEffectClrLst/>
+  </dgm:styleLbl>
+  <dgm:styleLbl name="alignAccFollowNode1">
+    <dgm:fillClrLst meth="repeat">
+      <a:schemeClr val="accent2">
+        <a:alpha val="90000"/>
+        <a:tint val="40000"/>
+      </a:schemeClr>
+    </dgm:fillClrLst>
+    <dgm:linClrLst meth="repeat">
+      <a:schemeClr val="accent2">
+        <a:alpha val="90000"/>
+        <a:tint val="40000"/>
+      </a:schemeClr>
+    </dgm:linClrLst>
+    <dgm:effectClrLst/>
+    <dgm:txLinClrLst/>
+    <dgm:txFillClrLst meth="repeat">
+      <a:schemeClr val="dk1"/>
+    </dgm:txFillClrLst>
+    <dgm:txEffectClrLst/>
+  </dgm:styleLbl>
+  <dgm:styleLbl name="bgAccFollowNode1">
+    <dgm:fillClrLst meth="repeat">
+      <a:schemeClr val="accent2">
+        <a:alpha val="90000"/>
+        <a:tint val="40000"/>
+      </a:schemeClr>
+    </dgm:fillClrLst>
+    <dgm:linClrLst meth="repeat">
+      <a:schemeClr val="accent2">
+        <a:alpha val="90000"/>
+        <a:tint val="40000"/>
+      </a:schemeClr>
+    </dgm:linClrLst>
+    <dgm:effectClrLst/>
+    <dgm:txLinClrLst/>
+    <dgm:txFillClrLst meth="repeat">
+      <a:schemeClr val="dk1"/>
+    </dgm:txFillClrLst>
+    <dgm:txEffectClrLst/>
+  </dgm:styleLbl>
+  <dgm:styleLbl name="fgAcc0">
+    <dgm:fillClrLst meth="repeat">
+      <a:schemeClr val="lt1">
+        <a:alpha val="90000"/>
+      </a:schemeClr>
+    </dgm:fillClrLst>
+    <dgm:linClrLst meth="repeat">
+      <a:schemeClr val="accent2"/>
+    </dgm:linClrLst>
+    <dgm:effectClrLst/>
+    <dgm:txLinClrLst/>
+    <dgm:txFillClrLst meth="repeat">
+      <a:schemeClr val="dk1"/>
+    </dgm:txFillClrLst>
+    <dgm:txEffectClrLst/>
+  </dgm:styleLbl>
+  <dgm:styleLbl name="fgAcc2">
+    <dgm:fillClrLst meth="repeat">
+      <a:schemeClr val="lt1">
+        <a:alpha val="90000"/>
+      </a:schemeClr>
+    </dgm:fillClrLst>
+    <dgm:linClrLst meth="repeat">
+      <a:schemeClr val="accent2"/>
+    </dgm:linClrLst>
+    <dgm:effectClrLst/>
+    <dgm:txLinClrLst/>
+    <dgm:txFillClrLst meth="repeat">
+      <a:schemeClr val="dk1"/>
+    </dgm:txFillClrLst>
+    <dgm:txEffectClrLst/>
+  </dgm:styleLbl>
+  <dgm:styleLbl name="fgAcc3">
+    <dgm:fillClrLst meth="repeat">
+      <a:schemeClr val="lt1">
+        <a:alpha val="90000"/>
+      </a:schemeClr>
+    </dgm:fillClrLst>
+    <dgm:linClrLst meth="repeat">
+      <a:schemeClr val="accent2"/>
+    </dgm:linClrLst>
+    <dgm:effectClrLst/>
+    <dgm:txLinClrLst/>
+    <dgm:txFillClrLst meth="repeat">
+      <a:schemeClr val="dk1"/>
+    </dgm:txFillClrLst>
+    <dgm:txEffectClrLst/>
+  </dgm:styleLbl>
+  <dgm:styleLbl name="fgAcc4">
+    <dgm:fillClrLst meth="repeat">
+      <a:schemeClr val="lt1">
+        <a:alpha val="90000"/>
+      </a:schemeClr>
+    </dgm:fillClrLst>
+    <dgm:linClrLst meth="repeat">
+      <a:schemeClr val="accent2"/>
+    </dgm:linClrLst>
+    <dgm:effectClrLst/>
+    <dgm:txLinClrLst/>
+    <dgm:txFillClrLst meth="repeat">
+      <a:schemeClr val="dk1"/>
+    </dgm:txFillClrLst>
+    <dgm:txEffectClrLst/>
+  </dgm:styleLbl>
+  <dgm:styleLbl name="bgShp">
+    <dgm:fillClrLst meth="repeat">
+      <a:schemeClr val="accent2">
+        <a:tint val="40000"/>
+      </a:schemeClr>
+    </dgm:fillClrLst>
+    <dgm:linClrLst meth="repeat">
+      <a:schemeClr val="accent2"/>
+    </dgm:linClrLst>
+    <dgm:effectClrLst/>
+    <dgm:txLinClrLst/>
+    <dgm:txFillClrLst meth="repeat">
+      <a:schemeClr val="dk1"/>
+    </dgm:txFillClrLst>
+    <dgm:txEffectClrLst/>
+  </dgm:styleLbl>
+  <dgm:styleLbl name="dkBgShp">
+    <dgm:fillClrLst meth="repeat">
+      <a:schemeClr val="accent2">
+        <a:shade val="80000"/>
+      </a:schemeClr>
+    </dgm:fillClrLst>
+    <dgm:linClrLst meth="repeat">
+      <a:schemeClr val="accent2"/>
+    </dgm:linClrLst>
+    <dgm:effectClrLst/>
+    <dgm:txLinClrLst/>
+    <dgm:txFillClrLst meth="repeat">
+      <a:schemeClr val="lt1"/>
+    </dgm:txFillClrLst>
+    <dgm:txEffectClrLst/>
+  </dgm:styleLbl>
+  <dgm:styleLbl name="trBgShp">
+    <dgm:fillClrLst meth="repeat">
+      <a:schemeClr val="accent2">
+        <a:tint val="50000"/>
+        <a:alpha val="40000"/>
+      </a:schemeClr>
+    </dgm:fillClrLst>
+    <dgm:linClrLst meth="repeat">
+      <a:schemeClr val="accent2"/>
+    </dgm:linClrLst>
+    <dgm:effectClrLst/>
+    <dgm:txLinClrLst/>
+    <dgm:txFillClrLst meth="repeat">
+      <a:schemeClr val="lt1"/>
+    </dgm:txFillClrLst>
+    <dgm:txEffectClrLst/>
+  </dgm:styleLbl>
+  <dgm:styleLbl name="fgShp">
+    <dgm:fillClrLst meth="repeat">
+      <a:schemeClr val="accent2">
+        <a:tint val="60000"/>
+      </a:schemeClr>
+    </dgm:fillClrLst>
+    <dgm:linClrLst meth="repeat">
+      <a:schemeClr val="lt1"/>
+    </dgm:linClrLst>
+    <dgm:effectClrLst/>
+    <dgm:txLinClrLst/>
+    <dgm:txFillClrLst meth="repeat">
+      <a:schemeClr val="dk1"/>
+    </dgm:txFillClrLst>
+    <dgm:txEffectClrLst/>
+  </dgm:styleLbl>
+  <dgm:styleLbl name="revTx">
+    <dgm:fillClrLst meth="repeat">
+      <a:schemeClr val="lt1">
+        <a:alpha val="0"/>
+      </a:schemeClr>
+    </dgm:fillClrLst>
+    <dgm:linClrLst meth="repeat">
+      <a:schemeClr val="dk1">
+        <a:alpha val="0"/>
+      </a:schemeClr>
+    </dgm:linClrLst>
+    <dgm:effectClrLst/>
+    <dgm:txLinClrLst/>
+    <dgm:txFillClrLst meth="repeat">
+      <a:schemeClr val="tx1"/>
+    </dgm:txFillClrLst>
+    <dgm:txEffectClrLst/>
+  </dgm:styleLbl>
+</dgm:colorsDef>
+</file>
+
+<file path=ppt/diagrams/colors2.xml><?xml version="1.0" encoding="utf-8"?>
+<dgm:colorsDef xmlns:dgm="http://schemas.openxmlformats.org/drawingml/2006/diagram" xmlns:a="http://schemas.openxmlformats.org/drawingml/2006/main" uniqueId="urn:microsoft.com/office/officeart/2018/5/colors/Iconchunking_neutralbg_colorful2">
   <dgm:title val=""/>
   <dgm:desc val=""/>
   <dgm:catLst>
@@ -153,7 +904,9 @@
       <a:schemeClr val="accent3"/>
     </dgm:fillClrLst>
     <dgm:linClrLst meth="repeat">
-      <a:schemeClr val="lt1"/>
+      <a:schemeClr val="lt1">
+        <a:alpha val="0"/>
+      </a:schemeClr>
     </dgm:linClrLst>
     <dgm:effectClrLst/>
     <dgm:txLinClrLst/>
@@ -826,790 +1579,6 @@
   </dgm:styleLbl>
   <dgm:styleLbl name="bgShp">
     <dgm:fillClrLst meth="repeat">
-      <a:schemeClr val="accent2">
-        <a:tint val="40000"/>
-      </a:schemeClr>
-    </dgm:fillClrLst>
-    <dgm:linClrLst meth="repeat">
-      <a:schemeClr val="dk1"/>
-    </dgm:linClrLst>
-    <dgm:effectClrLst/>
-    <dgm:txLinClrLst/>
-    <dgm:txFillClrLst meth="repeat">
-      <a:schemeClr val="dk1"/>
-    </dgm:txFillClrLst>
-    <dgm:txEffectClrLst/>
-  </dgm:styleLbl>
-  <dgm:styleLbl name="dkBgShp">
-    <dgm:fillClrLst meth="repeat">
-      <a:schemeClr val="accent2">
-        <a:shade val="90000"/>
-      </a:schemeClr>
-    </dgm:fillClrLst>
-    <dgm:linClrLst meth="repeat">
-      <a:schemeClr val="dk1"/>
-    </dgm:linClrLst>
-    <dgm:effectClrLst/>
-    <dgm:txLinClrLst/>
-    <dgm:txFillClrLst meth="repeat">
-      <a:schemeClr val="lt1"/>
-    </dgm:txFillClrLst>
-    <dgm:txEffectClrLst/>
-  </dgm:styleLbl>
-  <dgm:styleLbl name="trBgShp">
-    <dgm:fillClrLst meth="repeat">
-      <a:schemeClr val="accent2">
-        <a:tint val="50000"/>
-        <a:alpha val="40000"/>
-      </a:schemeClr>
-    </dgm:fillClrLst>
-    <dgm:linClrLst meth="repeat">
-      <a:schemeClr val="accent2"/>
-    </dgm:linClrLst>
-    <dgm:effectClrLst/>
-    <dgm:txLinClrLst/>
-    <dgm:txFillClrLst meth="repeat">
-      <a:schemeClr val="lt1"/>
-    </dgm:txFillClrLst>
-    <dgm:txEffectClrLst/>
-  </dgm:styleLbl>
-  <dgm:styleLbl name="fgShp">
-    <dgm:fillClrLst meth="repeat">
-      <a:schemeClr val="accent2">
-        <a:tint val="40000"/>
-      </a:schemeClr>
-    </dgm:fillClrLst>
-    <dgm:linClrLst meth="repeat">
-      <a:schemeClr val="lt1"/>
-    </dgm:linClrLst>
-    <dgm:effectClrLst/>
-    <dgm:txLinClrLst/>
-    <dgm:txFillClrLst meth="repeat">
-      <a:schemeClr val="dk1"/>
-    </dgm:txFillClrLst>
-    <dgm:txEffectClrLst/>
-  </dgm:styleLbl>
-  <dgm:styleLbl name="revTx">
-    <dgm:fillClrLst meth="repeat">
-      <a:schemeClr val="lt1">
-        <a:alpha val="0"/>
-      </a:schemeClr>
-    </dgm:fillClrLst>
-    <dgm:linClrLst meth="repeat">
-      <a:schemeClr val="dk1">
-        <a:alpha val="0"/>
-      </a:schemeClr>
-    </dgm:linClrLst>
-    <dgm:effectClrLst/>
-    <dgm:txLinClrLst/>
-    <dgm:txFillClrLst meth="repeat">
-      <a:schemeClr val="tx1"/>
-    </dgm:txFillClrLst>
-    <dgm:txEffectClrLst/>
-  </dgm:styleLbl>
-</dgm:colorsDef>
-</file>
-
-<file path=ppt/diagrams/colors2.xml><?xml version="1.0" encoding="utf-8"?>
-<dgm:colorsDef xmlns:dgm="http://schemas.openxmlformats.org/drawingml/2006/diagram" xmlns:a="http://schemas.openxmlformats.org/drawingml/2006/main" uniqueId="urn:microsoft.com/office/officeart/2018/5/colors/Iconchunking_neutralbg_colorful2">
-  <dgm:title val=""/>
-  <dgm:desc val=""/>
-  <dgm:catLst>
-    <dgm:cat type="colorful" pri="10200"/>
-  </dgm:catLst>
-  <dgm:styleLbl name="node0">
-    <dgm:fillClrLst meth="repeat">
-      <a:schemeClr val="accent1"/>
-    </dgm:fillClrLst>
-    <dgm:linClrLst meth="repeat">
-      <a:schemeClr val="lt1"/>
-    </dgm:linClrLst>
-    <dgm:effectClrLst/>
-    <dgm:txLinClrLst/>
-    <dgm:txFillClrLst/>
-    <dgm:txEffectClrLst/>
-  </dgm:styleLbl>
-  <dgm:styleLbl name="node1">
-    <dgm:fillClrLst>
-      <a:schemeClr val="accent2"/>
-      <a:schemeClr val="accent3"/>
-    </dgm:fillClrLst>
-    <dgm:linClrLst meth="repeat">
-      <a:schemeClr val="lt1">
-        <a:alpha val="0"/>
-      </a:schemeClr>
-    </dgm:linClrLst>
-    <dgm:effectClrLst/>
-    <dgm:txLinClrLst/>
-    <dgm:txFillClrLst/>
-    <dgm:txEffectClrLst/>
-  </dgm:styleLbl>
-  <dgm:styleLbl name="alignNode1">
-    <dgm:fillClrLst>
-      <a:schemeClr val="accent2"/>
-      <a:schemeClr val="accent3"/>
-    </dgm:fillClrLst>
-    <dgm:linClrLst>
-      <a:schemeClr val="accent2"/>
-      <a:schemeClr val="accent3"/>
-    </dgm:linClrLst>
-    <dgm:effectClrLst/>
-    <dgm:txLinClrLst/>
-    <dgm:txFillClrLst/>
-    <dgm:txEffectClrLst/>
-  </dgm:styleLbl>
-  <dgm:styleLbl name="lnNode1">
-    <dgm:fillClrLst>
-      <a:schemeClr val="accent2"/>
-      <a:schemeClr val="accent3"/>
-    </dgm:fillClrLst>
-    <dgm:linClrLst meth="repeat">
-      <a:schemeClr val="lt1"/>
-    </dgm:linClrLst>
-    <dgm:effectClrLst/>
-    <dgm:txLinClrLst/>
-    <dgm:txFillClrLst/>
-    <dgm:txEffectClrLst/>
-  </dgm:styleLbl>
-  <dgm:styleLbl name="vennNode1">
-    <dgm:fillClrLst>
-      <a:schemeClr val="accent2">
-        <a:alpha val="50000"/>
-      </a:schemeClr>
-      <a:schemeClr val="accent3">
-        <a:alpha val="50000"/>
-      </a:schemeClr>
-    </dgm:fillClrLst>
-    <dgm:linClrLst meth="repeat">
-      <a:schemeClr val="lt1"/>
-    </dgm:linClrLst>
-    <dgm:effectClrLst/>
-    <dgm:txLinClrLst/>
-    <dgm:txFillClrLst/>
-    <dgm:txEffectClrLst/>
-  </dgm:styleLbl>
-  <dgm:styleLbl name="node2">
-    <dgm:fillClrLst>
-      <a:schemeClr val="accent3"/>
-    </dgm:fillClrLst>
-    <dgm:linClrLst meth="repeat">
-      <a:schemeClr val="lt1"/>
-    </dgm:linClrLst>
-    <dgm:effectClrLst/>
-    <dgm:txLinClrLst/>
-    <dgm:txFillClrLst/>
-    <dgm:txEffectClrLst/>
-  </dgm:styleLbl>
-  <dgm:styleLbl name="node3">
-    <dgm:fillClrLst>
-      <a:schemeClr val="accent4"/>
-    </dgm:fillClrLst>
-    <dgm:linClrLst meth="repeat">
-      <a:schemeClr val="lt1"/>
-    </dgm:linClrLst>
-    <dgm:effectClrLst/>
-    <dgm:txLinClrLst/>
-    <dgm:txFillClrLst/>
-    <dgm:txEffectClrLst/>
-  </dgm:styleLbl>
-  <dgm:styleLbl name="node4">
-    <dgm:fillClrLst>
-      <a:schemeClr val="accent5"/>
-    </dgm:fillClrLst>
-    <dgm:linClrLst meth="repeat">
-      <a:schemeClr val="lt1"/>
-    </dgm:linClrLst>
-    <dgm:effectClrLst/>
-    <dgm:txLinClrLst/>
-    <dgm:txFillClrLst/>
-    <dgm:txEffectClrLst/>
-  </dgm:styleLbl>
-  <dgm:styleLbl name="fgImgPlace1">
-    <dgm:fillClrLst>
-      <a:schemeClr val="accent2">
-        <a:tint val="50000"/>
-      </a:schemeClr>
-      <a:schemeClr val="accent3">
-        <a:tint val="50000"/>
-      </a:schemeClr>
-    </dgm:fillClrLst>
-    <dgm:linClrLst meth="repeat">
-      <a:schemeClr val="lt1"/>
-    </dgm:linClrLst>
-    <dgm:effectClrLst/>
-    <dgm:txLinClrLst/>
-    <dgm:txFillClrLst meth="repeat">
-      <a:schemeClr val="lt1"/>
-    </dgm:txFillClrLst>
-    <dgm:txEffectClrLst/>
-  </dgm:styleLbl>
-  <dgm:styleLbl name="alignImgPlace1">
-    <dgm:fillClrLst>
-      <a:schemeClr val="accent2">
-        <a:tint val="50000"/>
-      </a:schemeClr>
-      <a:schemeClr val="accent3">
-        <a:tint val="20000"/>
-      </a:schemeClr>
-    </dgm:fillClrLst>
-    <dgm:linClrLst meth="repeat">
-      <a:schemeClr val="lt1"/>
-    </dgm:linClrLst>
-    <dgm:effectClrLst/>
-    <dgm:txLinClrLst/>
-    <dgm:txFillClrLst meth="repeat">
-      <a:schemeClr val="lt1"/>
-    </dgm:txFillClrLst>
-    <dgm:txEffectClrLst/>
-  </dgm:styleLbl>
-  <dgm:styleLbl name="bgImgPlace1">
-    <dgm:fillClrLst>
-      <a:schemeClr val="accent2">
-        <a:tint val="50000"/>
-      </a:schemeClr>
-      <a:schemeClr val="accent3">
-        <a:tint val="20000"/>
-      </a:schemeClr>
-    </dgm:fillClrLst>
-    <dgm:linClrLst meth="repeat">
-      <a:schemeClr val="lt1"/>
-    </dgm:linClrLst>
-    <dgm:effectClrLst/>
-    <dgm:txLinClrLst/>
-    <dgm:txFillClrLst meth="repeat">
-      <a:schemeClr val="lt1"/>
-    </dgm:txFillClrLst>
-    <dgm:txEffectClrLst/>
-  </dgm:styleLbl>
-  <dgm:styleLbl name="sibTrans2D1">
-    <dgm:fillClrLst>
-      <a:schemeClr val="accent2"/>
-      <a:schemeClr val="accent3"/>
-    </dgm:fillClrLst>
-    <dgm:linClrLst meth="repeat">
-      <a:schemeClr val="lt1"/>
-    </dgm:linClrLst>
-    <dgm:effectClrLst/>
-    <dgm:txLinClrLst/>
-    <dgm:txFillClrLst/>
-    <dgm:txEffectClrLst/>
-  </dgm:styleLbl>
-  <dgm:styleLbl name="fgSibTrans2D1">
-    <dgm:fillClrLst>
-      <a:schemeClr val="accent2"/>
-      <a:schemeClr val="accent3"/>
-    </dgm:fillClrLst>
-    <dgm:linClrLst meth="repeat">
-      <a:schemeClr val="lt1"/>
-    </dgm:linClrLst>
-    <dgm:effectClrLst/>
-    <dgm:txLinClrLst/>
-    <dgm:txFillClrLst meth="repeat">
-      <a:schemeClr val="lt1"/>
-    </dgm:txFillClrLst>
-    <dgm:txEffectClrLst/>
-  </dgm:styleLbl>
-  <dgm:styleLbl name="bgSibTrans2D1">
-    <dgm:fillClrLst>
-      <a:schemeClr val="accent2"/>
-      <a:schemeClr val="accent3"/>
-    </dgm:fillClrLst>
-    <dgm:linClrLst meth="repeat">
-      <a:schemeClr val="lt1"/>
-    </dgm:linClrLst>
-    <dgm:effectClrLst/>
-    <dgm:txLinClrLst/>
-    <dgm:txFillClrLst meth="repeat">
-      <a:schemeClr val="lt1"/>
-    </dgm:txFillClrLst>
-    <dgm:txEffectClrLst/>
-  </dgm:styleLbl>
-  <dgm:styleLbl name="sibTrans1D1">
-    <dgm:fillClrLst/>
-    <dgm:linClrLst>
-      <a:schemeClr val="accent2"/>
-      <a:schemeClr val="accent3"/>
-    </dgm:linClrLst>
-    <dgm:effectClrLst/>
-    <dgm:txLinClrLst/>
-    <dgm:txFillClrLst meth="repeat">
-      <a:schemeClr val="tx1"/>
-    </dgm:txFillClrLst>
-    <dgm:txEffectClrLst/>
-  </dgm:styleLbl>
-  <dgm:styleLbl name="callout">
-    <dgm:fillClrLst meth="repeat">
-      <a:schemeClr val="accent2"/>
-    </dgm:fillClrLst>
-    <dgm:linClrLst meth="repeat">
-      <a:schemeClr val="accent2">
-        <a:tint val="50000"/>
-      </a:schemeClr>
-    </dgm:linClrLst>
-    <dgm:effectClrLst/>
-    <dgm:txLinClrLst/>
-    <dgm:txFillClrLst meth="repeat">
-      <a:schemeClr val="tx1"/>
-    </dgm:txFillClrLst>
-    <dgm:txEffectClrLst/>
-  </dgm:styleLbl>
-  <dgm:styleLbl name="asst0">
-    <dgm:fillClrLst meth="repeat">
-      <a:schemeClr val="accent2"/>
-    </dgm:fillClrLst>
-    <dgm:linClrLst meth="repeat">
-      <a:schemeClr val="lt1">
-        <a:shade val="80000"/>
-      </a:schemeClr>
-    </dgm:linClrLst>
-    <dgm:effectClrLst/>
-    <dgm:txLinClrLst/>
-    <dgm:txFillClrLst/>
-    <dgm:txEffectClrLst/>
-  </dgm:styleLbl>
-  <dgm:styleLbl name="asst1">
-    <dgm:fillClrLst meth="repeat">
-      <a:schemeClr val="accent3"/>
-    </dgm:fillClrLst>
-    <dgm:linClrLst meth="repeat">
-      <a:schemeClr val="lt1">
-        <a:shade val="80000"/>
-      </a:schemeClr>
-    </dgm:linClrLst>
-    <dgm:effectClrLst/>
-    <dgm:txLinClrLst/>
-    <dgm:txFillClrLst/>
-    <dgm:txEffectClrLst/>
-  </dgm:styleLbl>
-  <dgm:styleLbl name="asst2">
-    <dgm:fillClrLst>
-      <a:schemeClr val="accent4"/>
-    </dgm:fillClrLst>
-    <dgm:linClrLst meth="repeat">
-      <a:schemeClr val="lt1"/>
-    </dgm:linClrLst>
-    <dgm:effectClrLst/>
-    <dgm:txLinClrLst/>
-    <dgm:txFillClrLst/>
-    <dgm:txEffectClrLst/>
-  </dgm:styleLbl>
-  <dgm:styleLbl name="asst3">
-    <dgm:fillClrLst>
-      <a:schemeClr val="accent5"/>
-    </dgm:fillClrLst>
-    <dgm:linClrLst meth="repeat">
-      <a:schemeClr val="lt1"/>
-    </dgm:linClrLst>
-    <dgm:effectClrLst/>
-    <dgm:txLinClrLst/>
-    <dgm:txFillClrLst/>
-    <dgm:txEffectClrLst/>
-  </dgm:styleLbl>
-  <dgm:styleLbl name="asst4">
-    <dgm:fillClrLst>
-      <a:schemeClr val="accent6"/>
-    </dgm:fillClrLst>
-    <dgm:linClrLst meth="repeat">
-      <a:schemeClr val="lt1"/>
-    </dgm:linClrLst>
-    <dgm:effectClrLst/>
-    <dgm:txLinClrLst/>
-    <dgm:txFillClrLst/>
-    <dgm:txEffectClrLst/>
-  </dgm:styleLbl>
-  <dgm:styleLbl name="parChTrans2D1">
-    <dgm:fillClrLst meth="repeat">
-      <a:schemeClr val="accent2"/>
-    </dgm:fillClrLst>
-    <dgm:linClrLst meth="repeat">
-      <a:schemeClr val="lt1"/>
-    </dgm:linClrLst>
-    <dgm:effectClrLst/>
-    <dgm:txLinClrLst/>
-    <dgm:txFillClrLst meth="repeat">
-      <a:schemeClr val="lt1"/>
-    </dgm:txFillClrLst>
-    <dgm:txEffectClrLst/>
-  </dgm:styleLbl>
-  <dgm:styleLbl name="parChTrans2D2">
-    <dgm:fillClrLst meth="repeat">
-      <a:schemeClr val="accent3"/>
-    </dgm:fillClrLst>
-    <dgm:linClrLst meth="repeat">
-      <a:schemeClr val="lt1"/>
-    </dgm:linClrLst>
-    <dgm:effectClrLst/>
-    <dgm:txLinClrLst/>
-    <dgm:txFillClrLst/>
-    <dgm:txEffectClrLst/>
-  </dgm:styleLbl>
-  <dgm:styleLbl name="parChTrans2D3">
-    <dgm:fillClrLst meth="repeat">
-      <a:schemeClr val="accent4"/>
-    </dgm:fillClrLst>
-    <dgm:linClrLst meth="repeat">
-      <a:schemeClr val="lt1"/>
-    </dgm:linClrLst>
-    <dgm:effectClrLst/>
-    <dgm:txLinClrLst/>
-    <dgm:txFillClrLst/>
-    <dgm:txEffectClrLst/>
-  </dgm:styleLbl>
-  <dgm:styleLbl name="parChTrans2D4">
-    <dgm:fillClrLst meth="repeat">
-      <a:schemeClr val="accent5"/>
-    </dgm:fillClrLst>
-    <dgm:linClrLst meth="repeat">
-      <a:schemeClr val="lt1"/>
-    </dgm:linClrLst>
-    <dgm:effectClrLst/>
-    <dgm:txLinClrLst/>
-    <dgm:txFillClrLst meth="repeat">
-      <a:schemeClr val="lt1"/>
-    </dgm:txFillClrLst>
-    <dgm:txEffectClrLst/>
-  </dgm:styleLbl>
-  <dgm:styleLbl name="parChTrans1D1">
-    <dgm:fillClrLst meth="repeat">
-      <a:schemeClr val="accent2"/>
-    </dgm:fillClrLst>
-    <dgm:linClrLst meth="repeat">
-      <a:schemeClr val="accent2"/>
-    </dgm:linClrLst>
-    <dgm:effectClrLst/>
-    <dgm:txLinClrLst/>
-    <dgm:txFillClrLst meth="repeat">
-      <a:schemeClr val="tx1"/>
-    </dgm:txFillClrLst>
-    <dgm:txEffectClrLst/>
-  </dgm:styleLbl>
-  <dgm:styleLbl name="parChTrans1D2">
-    <dgm:fillClrLst meth="repeat">
-      <a:schemeClr val="accent2">
-        <a:tint val="90000"/>
-      </a:schemeClr>
-    </dgm:fillClrLst>
-    <dgm:linClrLst meth="repeat">
-      <a:schemeClr val="accent3"/>
-    </dgm:linClrLst>
-    <dgm:effectClrLst/>
-    <dgm:txLinClrLst/>
-    <dgm:txFillClrLst meth="repeat">
-      <a:schemeClr val="tx1"/>
-    </dgm:txFillClrLst>
-    <dgm:txEffectClrLst/>
-  </dgm:styleLbl>
-  <dgm:styleLbl name="parChTrans1D3">
-    <dgm:fillClrLst meth="repeat">
-      <a:schemeClr val="accent2">
-        <a:tint val="70000"/>
-      </a:schemeClr>
-    </dgm:fillClrLst>
-    <dgm:linClrLst meth="repeat">
-      <a:schemeClr val="accent4"/>
-    </dgm:linClrLst>
-    <dgm:effectClrLst/>
-    <dgm:txLinClrLst/>
-    <dgm:txFillClrLst meth="repeat">
-      <a:schemeClr val="tx1"/>
-    </dgm:txFillClrLst>
-    <dgm:txEffectClrLst/>
-  </dgm:styleLbl>
-  <dgm:styleLbl name="parChTrans1D4">
-    <dgm:fillClrLst meth="repeat">
-      <a:schemeClr val="accent2">
-        <a:tint val="50000"/>
-      </a:schemeClr>
-    </dgm:fillClrLst>
-    <dgm:linClrLst meth="repeat">
-      <a:schemeClr val="accent5"/>
-    </dgm:linClrLst>
-    <dgm:effectClrLst/>
-    <dgm:txLinClrLst/>
-    <dgm:txFillClrLst meth="repeat">
-      <a:schemeClr val="tx1"/>
-    </dgm:txFillClrLst>
-    <dgm:txEffectClrLst/>
-  </dgm:styleLbl>
-  <dgm:styleLbl name="fgAcc1">
-    <dgm:fillClrLst meth="repeat">
-      <a:schemeClr val="lt1">
-        <a:alpha val="90000"/>
-      </a:schemeClr>
-    </dgm:fillClrLst>
-    <dgm:linClrLst>
-      <a:schemeClr val="accent2"/>
-      <a:schemeClr val="accent3"/>
-    </dgm:linClrLst>
-    <dgm:effectClrLst/>
-    <dgm:txLinClrLst/>
-    <dgm:txFillClrLst meth="repeat">
-      <a:schemeClr val="dk1"/>
-    </dgm:txFillClrLst>
-    <dgm:txEffectClrLst/>
-  </dgm:styleLbl>
-  <dgm:styleLbl name="conFgAcc1">
-    <dgm:fillClrLst meth="repeat">
-      <a:schemeClr val="lt1">
-        <a:alpha val="90000"/>
-      </a:schemeClr>
-    </dgm:fillClrLst>
-    <dgm:linClrLst>
-      <a:schemeClr val="accent2"/>
-      <a:schemeClr val="accent3"/>
-    </dgm:linClrLst>
-    <dgm:effectClrLst/>
-    <dgm:txLinClrLst/>
-    <dgm:txFillClrLst meth="repeat">
-      <a:schemeClr val="dk1"/>
-    </dgm:txFillClrLst>
-    <dgm:txEffectClrLst/>
-  </dgm:styleLbl>
-  <dgm:styleLbl name="alignAcc1">
-    <dgm:fillClrLst meth="repeat">
-      <a:schemeClr val="lt1">
-        <a:alpha val="90000"/>
-      </a:schemeClr>
-    </dgm:fillClrLst>
-    <dgm:linClrLst>
-      <a:schemeClr val="accent2"/>
-      <a:schemeClr val="accent3"/>
-    </dgm:linClrLst>
-    <dgm:effectClrLst/>
-    <dgm:txLinClrLst/>
-    <dgm:txFillClrLst meth="repeat">
-      <a:schemeClr val="dk1"/>
-    </dgm:txFillClrLst>
-    <dgm:txEffectClrLst/>
-  </dgm:styleLbl>
-  <dgm:styleLbl name="trAlignAcc1">
-    <dgm:fillClrLst meth="repeat">
-      <a:schemeClr val="lt1">
-        <a:alpha val="40000"/>
-      </a:schemeClr>
-    </dgm:fillClrLst>
-    <dgm:linClrLst meth="repeat">
-      <a:schemeClr val="accent2"/>
-    </dgm:linClrLst>
-    <dgm:effectClrLst/>
-    <dgm:txLinClrLst/>
-    <dgm:txFillClrLst meth="repeat">
-      <a:schemeClr val="dk1"/>
-    </dgm:txFillClrLst>
-    <dgm:txEffectClrLst/>
-  </dgm:styleLbl>
-  <dgm:styleLbl name="bgAcc1">
-    <dgm:fillClrLst meth="repeat">
-      <a:schemeClr val="lt1">
-        <a:alpha val="90000"/>
-      </a:schemeClr>
-    </dgm:fillClrLst>
-    <dgm:linClrLst>
-      <a:schemeClr val="accent2"/>
-      <a:schemeClr val="accent3"/>
-    </dgm:linClrLst>
-    <dgm:effectClrLst/>
-    <dgm:txLinClrLst/>
-    <dgm:txFillClrLst meth="repeat">
-      <a:schemeClr val="dk1"/>
-    </dgm:txFillClrLst>
-    <dgm:txEffectClrLst/>
-  </dgm:styleLbl>
-  <dgm:styleLbl name="solidFgAcc1">
-    <dgm:fillClrLst meth="repeat">
-      <a:schemeClr val="lt1"/>
-    </dgm:fillClrLst>
-    <dgm:linClrLst>
-      <a:schemeClr val="accent2"/>
-      <a:schemeClr val="accent3"/>
-    </dgm:linClrLst>
-    <dgm:effectClrLst/>
-    <dgm:txLinClrLst/>
-    <dgm:txFillClrLst meth="repeat">
-      <a:schemeClr val="dk1"/>
-    </dgm:txFillClrLst>
-    <dgm:txEffectClrLst/>
-  </dgm:styleLbl>
-  <dgm:styleLbl name="solidAlignAcc1">
-    <dgm:fillClrLst meth="repeat">
-      <a:schemeClr val="lt1"/>
-    </dgm:fillClrLst>
-    <dgm:linClrLst>
-      <a:schemeClr val="accent2"/>
-      <a:schemeClr val="accent3"/>
-    </dgm:linClrLst>
-    <dgm:effectClrLst/>
-    <dgm:txLinClrLst/>
-    <dgm:txFillClrLst meth="repeat">
-      <a:schemeClr val="dk1"/>
-    </dgm:txFillClrLst>
-    <dgm:txEffectClrLst/>
-  </dgm:styleLbl>
-  <dgm:styleLbl name="solidBgAcc1">
-    <dgm:fillClrLst meth="repeat">
-      <a:schemeClr val="lt1"/>
-    </dgm:fillClrLst>
-    <dgm:linClrLst>
-      <a:schemeClr val="accent2"/>
-      <a:schemeClr val="accent3"/>
-    </dgm:linClrLst>
-    <dgm:effectClrLst/>
-    <dgm:txLinClrLst/>
-    <dgm:txFillClrLst meth="repeat">
-      <a:schemeClr val="dk1"/>
-    </dgm:txFillClrLst>
-    <dgm:txEffectClrLst/>
-  </dgm:styleLbl>
-  <dgm:styleLbl name="fgAccFollowNode1">
-    <dgm:fillClrLst>
-      <a:schemeClr val="accent2">
-        <a:tint val="40000"/>
-        <a:alpha val="90000"/>
-      </a:schemeClr>
-      <a:schemeClr val="accent3">
-        <a:tint val="40000"/>
-        <a:alpha val="90000"/>
-      </a:schemeClr>
-    </dgm:fillClrLst>
-    <dgm:linClrLst>
-      <a:schemeClr val="accent2">
-        <a:tint val="40000"/>
-        <a:alpha val="90000"/>
-      </a:schemeClr>
-      <a:schemeClr val="accent3">
-        <a:tint val="40000"/>
-        <a:alpha val="90000"/>
-      </a:schemeClr>
-    </dgm:linClrLst>
-    <dgm:effectClrLst/>
-    <dgm:txLinClrLst/>
-    <dgm:txFillClrLst meth="repeat">
-      <a:schemeClr val="dk1"/>
-    </dgm:txFillClrLst>
-    <dgm:txEffectClrLst/>
-  </dgm:styleLbl>
-  <dgm:styleLbl name="alignAccFollowNode1">
-    <dgm:fillClrLst>
-      <a:schemeClr val="accent2">
-        <a:tint val="40000"/>
-        <a:alpha val="90000"/>
-      </a:schemeClr>
-      <a:schemeClr val="accent3">
-        <a:tint val="40000"/>
-        <a:alpha val="90000"/>
-      </a:schemeClr>
-    </dgm:fillClrLst>
-    <dgm:linClrLst>
-      <a:schemeClr val="accent2">
-        <a:tint val="40000"/>
-        <a:alpha val="90000"/>
-      </a:schemeClr>
-      <a:schemeClr val="accent3">
-        <a:tint val="40000"/>
-        <a:alpha val="90000"/>
-      </a:schemeClr>
-    </dgm:linClrLst>
-    <dgm:effectClrLst/>
-    <dgm:txLinClrLst/>
-    <dgm:txFillClrLst meth="repeat">
-      <a:schemeClr val="dk1"/>
-    </dgm:txFillClrLst>
-    <dgm:txEffectClrLst/>
-  </dgm:styleLbl>
-  <dgm:styleLbl name="bgAccFollowNode1">
-    <dgm:fillClrLst>
-      <a:schemeClr val="accent2">
-        <a:tint val="40000"/>
-        <a:alpha val="90000"/>
-      </a:schemeClr>
-      <a:schemeClr val="accent3">
-        <a:tint val="40000"/>
-        <a:alpha val="90000"/>
-      </a:schemeClr>
-    </dgm:fillClrLst>
-    <dgm:linClrLst>
-      <a:schemeClr val="accent2">
-        <a:tint val="40000"/>
-        <a:alpha val="90000"/>
-      </a:schemeClr>
-      <a:schemeClr val="accent3">
-        <a:tint val="40000"/>
-        <a:alpha val="90000"/>
-      </a:schemeClr>
-    </dgm:linClrLst>
-    <dgm:effectClrLst/>
-    <dgm:txLinClrLst/>
-    <dgm:txFillClrLst meth="repeat">
-      <a:schemeClr val="dk1"/>
-    </dgm:txFillClrLst>
-    <dgm:txEffectClrLst/>
-  </dgm:styleLbl>
-  <dgm:styleLbl name="fgAcc0">
-    <dgm:fillClrLst meth="repeat">
-      <a:schemeClr val="lt1">
-        <a:alpha val="90000"/>
-      </a:schemeClr>
-    </dgm:fillClrLst>
-    <dgm:linClrLst>
-      <a:schemeClr val="accent1"/>
-    </dgm:linClrLst>
-    <dgm:effectClrLst/>
-    <dgm:txLinClrLst/>
-    <dgm:txFillClrLst meth="repeat">
-      <a:schemeClr val="dk1"/>
-    </dgm:txFillClrLst>
-    <dgm:txEffectClrLst/>
-  </dgm:styleLbl>
-  <dgm:styleLbl name="fgAcc2">
-    <dgm:fillClrLst meth="repeat">
-      <a:schemeClr val="lt1">
-        <a:alpha val="90000"/>
-      </a:schemeClr>
-    </dgm:fillClrLst>
-    <dgm:linClrLst>
-      <a:schemeClr val="accent3"/>
-    </dgm:linClrLst>
-    <dgm:effectClrLst/>
-    <dgm:txLinClrLst/>
-    <dgm:txFillClrLst meth="repeat">
-      <a:schemeClr val="dk1"/>
-    </dgm:txFillClrLst>
-    <dgm:txEffectClrLst/>
-  </dgm:styleLbl>
-  <dgm:styleLbl name="fgAcc3">
-    <dgm:fillClrLst meth="repeat">
-      <a:schemeClr val="lt1">
-        <a:alpha val="90000"/>
-      </a:schemeClr>
-    </dgm:fillClrLst>
-    <dgm:linClrLst>
-      <a:schemeClr val="accent4"/>
-    </dgm:linClrLst>
-    <dgm:effectClrLst/>
-    <dgm:txLinClrLst/>
-    <dgm:txFillClrLst meth="repeat">
-      <a:schemeClr val="dk1"/>
-    </dgm:txFillClrLst>
-    <dgm:txEffectClrLst/>
-  </dgm:styleLbl>
-  <dgm:styleLbl name="fgAcc4">
-    <dgm:fillClrLst meth="repeat">
-      <a:schemeClr val="lt1">
-        <a:alpha val="90000"/>
-      </a:schemeClr>
-    </dgm:fillClrLst>
-    <dgm:linClrLst>
-      <a:schemeClr val="accent5"/>
-    </dgm:linClrLst>
-    <dgm:effectClrLst/>
-    <dgm:txLinClrLst/>
-    <dgm:txFillClrLst meth="repeat">
-      <a:schemeClr val="dk1"/>
-    </dgm:txFillClrLst>
-    <dgm:txEffectClrLst/>
-  </dgm:styleLbl>
-  <dgm:styleLbl name="bgShp">
-    <dgm:fillClrLst meth="repeat">
       <a:schemeClr val="bg1">
         <a:lumMod val="95000"/>
       </a:schemeClr>
@@ -3229,7 +3198,7 @@
 <dgm:dataModel xmlns:dgm="http://schemas.openxmlformats.org/drawingml/2006/diagram" xmlns:a="http://schemas.openxmlformats.org/drawingml/2006/main">
   <dgm:ptLst>
     <dgm:pt modelId="{D6815FE0-2B56-47BE-928E-C89E13D2573A}" type="doc">
-      <dgm:prSet loTypeId="urn:microsoft.com/office/officeart/2005/8/layout/hList1" loCatId="list" qsTypeId="urn:microsoft.com/office/officeart/2005/8/quickstyle/simple1" qsCatId="simple" csTypeId="urn:microsoft.com/office/officeart/2005/8/colors/colorful2" csCatId="colorful" phldr="1"/>
+      <dgm:prSet loTypeId="urn:microsoft.com/office/officeart/2005/8/layout/hList1" loCatId="list" qsTypeId="urn:microsoft.com/office/officeart/2005/8/quickstyle/simple4" qsCatId="simple" csTypeId="urn:microsoft.com/office/officeart/2005/8/colors/accent2_2" csCatId="accent2" phldr="1"/>
       <dgm:spPr/>
       <dgm:t>
         <a:bodyPr/>
@@ -3287,16 +3256,8 @@
         <a:lstStyle/>
         <a:p>
           <a:r>
-            <a:rPr lang="en-US" dirty="0"/>
-            <a:t>I have created an “Offline-Online” architecture to make sure the system is scalable. Processing 18,000 images is computationally heavy so I have separated the “</a:t>
-          </a:r>
-          <a:r>
-            <a:rPr lang="en-US" dirty="0" err="1"/>
-            <a:t>maths</a:t>
-          </a:r>
-          <a:r>
-            <a:rPr lang="en-US" dirty="0"/>
-            <a:t>” from the “interface”.</a:t>
+            <a:rPr lang="en-US"/>
+            <a:t>I have created an “Offline-Online” architecture to make sure the system is scalable. Processing 18,000 images is computationally heavy so I have separated the “maths” from the “interface”.</a:t>
           </a:r>
         </a:p>
       </dgm:t>
@@ -3335,7 +3296,7 @@
           </a:pPr>
           <a:r>
             <a:rPr lang="en-US" b="1"/>
-            <a:t>Phase A: The Offline Engine (Backend)</a:t>
+            <a:t>The Offline Engine (Backend)</a:t>
           </a:r>
           <a:endParaRPr lang="en-US"/>
         </a:p>
@@ -3415,16 +3376,8 @@
         <a:lstStyle/>
         <a:p>
           <a:r>
-            <a:rPr lang="en-US" dirty="0"/>
-            <a:t>It outputs a lightweight set of vector coordinates (.</a:t>
-          </a:r>
-          <a:r>
-            <a:rPr lang="en-US" dirty="0" err="1"/>
-            <a:t>npy</a:t>
-          </a:r>
-          <a:r>
-            <a:rPr lang="en-US" dirty="0"/>
-            <a:t> files) rather than processing images in real-time.</a:t>
+            <a:rPr lang="en-US"/>
+            <a:t>It outputs a lightweight set of vector coordinates (.npy files) rather than processing images in real-time.</a:t>
           </a:r>
         </a:p>
       </dgm:t>
@@ -3463,7 +3416,7 @@
           </a:pPr>
           <a:r>
             <a:rPr lang="en-US" b="1"/>
-            <a:t>Phase B: The Online Visualisation (Frontend)</a:t>
+            <a:t>The Online Visualisation (Frontend)</a:t>
           </a:r>
           <a:endParaRPr lang="en-US"/>
         </a:p>
@@ -3499,8 +3452,16 @@
         <a:lstStyle/>
         <a:p>
           <a:r>
-            <a:rPr lang="en-US"/>
-            <a:t>I am using Dash and Plotly to build the user interface.</a:t>
+            <a:rPr lang="en-US" dirty="0"/>
+            <a:t>I am using Dash and </a:t>
+          </a:r>
+          <a:r>
+            <a:rPr lang="en-US" dirty="0" err="1"/>
+            <a:t>Plotly</a:t>
+          </a:r>
+          <a:r>
+            <a:rPr lang="en-US" dirty="0"/>
+            <a:t> to build the user interface.</a:t>
           </a:r>
         </a:p>
       </dgm:t>
@@ -3535,12 +3496,16 @@
         <a:lstStyle/>
         <a:p>
           <a:r>
-            <a:rPr lang="en-GB"/>
+            <a:rPr lang="en-GB" dirty="0"/>
             <a:t>A lot of the h</a:t>
           </a:r>
           <a:r>
-            <a:rPr lang="en-US"/>
-            <a:t>eavy lifting is done offline, the dashboard remains responsive and fast, allowing for smooth user interaction on standard hardware.</a:t>
+            <a:rPr lang="en-US" dirty="0" err="1"/>
+            <a:t>eavy</a:t>
+          </a:r>
+          <a:r>
+            <a:rPr lang="en-US" dirty="0"/>
+            <a:t> lifting is done offline, the dashboard remains responsive and fast, allowing for smooth user interaction on standard hardware.</a:t>
           </a:r>
         </a:p>
       </dgm:t>
@@ -3567,7 +3532,235 @@
         </a:p>
       </dgm:t>
     </dgm:pt>
-    <dgm:pt modelId="{9E4B9CA3-C9AA-4257-85ED-9B118E0B54A6}" type="pres">
+    <dgm:pt modelId="{3E26CA25-5CD9-40DD-868C-866B2E606A25}">
+      <dgm:prSet/>
+      <dgm:spPr/>
+      <dgm:t>
+        <a:bodyPr/>
+        <a:lstStyle/>
+        <a:p>
+          <a:r>
+            <a:rPr lang="en-GB" b="1" dirty="0"/>
+            <a:t>Unsupervised &amp; Multimodal </a:t>
+          </a:r>
+        </a:p>
+      </dgm:t>
+    </dgm:pt>
+    <dgm:pt modelId="{60128B15-9205-4AF7-A471-644DC9113792}" type="parTrans" cxnId="{355A18C5-281F-4FA4-97E6-989C7DD12294}">
+      <dgm:prSet/>
+      <dgm:spPr/>
+      <dgm:t>
+        <a:bodyPr/>
+        <a:lstStyle/>
+        <a:p>
+          <a:endParaRPr lang="en-GB"/>
+        </a:p>
+      </dgm:t>
+    </dgm:pt>
+    <dgm:pt modelId="{CD3C5889-203E-458F-81FA-6AECC40CF4E6}" type="sibTrans" cxnId="{355A18C5-281F-4FA4-97E6-989C7DD12294}">
+      <dgm:prSet/>
+      <dgm:spPr/>
+      <dgm:t>
+        <a:bodyPr/>
+        <a:lstStyle/>
+        <a:p>
+          <a:endParaRPr lang="en-GB"/>
+        </a:p>
+      </dgm:t>
+    </dgm:pt>
+    <dgm:pt modelId="{6DFF8CC7-20F3-417E-ACA1-0EB46C28BE35}">
+      <dgm:prSet/>
+      <dgm:spPr/>
+      <dgm:t>
+        <a:bodyPr/>
+        <a:lstStyle/>
+        <a:p>
+          <a:endParaRPr lang="en-GB" dirty="0"/>
+        </a:p>
+      </dgm:t>
+    </dgm:pt>
+    <dgm:pt modelId="{E8460B07-CB2F-4E01-BF03-5FBF5B566833}" type="parTrans" cxnId="{2F23F81A-B987-40A1-90AA-63FDDBBD029E}">
+      <dgm:prSet/>
+      <dgm:spPr/>
+      <dgm:t>
+        <a:bodyPr/>
+        <a:lstStyle/>
+        <a:p>
+          <a:endParaRPr lang="en-GB"/>
+        </a:p>
+      </dgm:t>
+    </dgm:pt>
+    <dgm:pt modelId="{C16355CA-94EC-4657-8463-44A7CBFD3489}" type="sibTrans" cxnId="{2F23F81A-B987-40A1-90AA-63FDDBBD029E}">
+      <dgm:prSet/>
+      <dgm:spPr/>
+      <dgm:t>
+        <a:bodyPr/>
+        <a:lstStyle/>
+        <a:p>
+          <a:endParaRPr lang="en-GB"/>
+        </a:p>
+      </dgm:t>
+    </dgm:pt>
+    <dgm:pt modelId="{DD53EBCA-E068-4B7C-9C38-21FBFE85F165}">
+      <dgm:prSet/>
+      <dgm:spPr/>
+      <dgm:t>
+        <a:bodyPr/>
+        <a:lstStyle/>
+        <a:p>
+          <a:r>
+            <a:rPr lang="en-GB" b="1" dirty="0"/>
+            <a:t>CLIP: </a:t>
+          </a:r>
+          <a:r>
+            <a:rPr lang="en-GB" dirty="0"/>
+            <a:t>- Uses </a:t>
+          </a:r>
+          <a:r>
+            <a:rPr lang="en-GB" dirty="0" err="1"/>
+            <a:t>ViT</a:t>
+          </a:r>
+          <a:r>
+            <a:rPr lang="en-GB" dirty="0"/>
+            <a:t>-B/32 to extract 512-dimensional semantic vectors - Understands image content without pre-trained labels - Example: Distinguishes 'rescue boat' from 'fishing boat’ </a:t>
+          </a:r>
+        </a:p>
+      </dgm:t>
+    </dgm:pt>
+    <dgm:pt modelId="{B89022A1-BADA-497D-930F-FDEE74191060}" type="parTrans" cxnId="{103541DB-9002-4EC9-9E6F-B20BA4517F19}">
+      <dgm:prSet/>
+      <dgm:spPr/>
+      <dgm:t>
+        <a:bodyPr/>
+        <a:lstStyle/>
+        <a:p>
+          <a:endParaRPr lang="en-GB"/>
+        </a:p>
+      </dgm:t>
+    </dgm:pt>
+    <dgm:pt modelId="{FE7D8FEF-5FAF-47CD-9D12-5E20EC526A11}" type="sibTrans" cxnId="{103541DB-9002-4EC9-9E6F-B20BA4517F19}">
+      <dgm:prSet/>
+      <dgm:spPr/>
+      <dgm:t>
+        <a:bodyPr/>
+        <a:lstStyle/>
+        <a:p>
+          <a:endParaRPr lang="en-GB"/>
+        </a:p>
+      </dgm:t>
+    </dgm:pt>
+    <dgm:pt modelId="{4D32D4A3-7129-4332-933A-A7DEFC11C2DE}">
+      <dgm:prSet/>
+      <dgm:spPr/>
+      <dgm:t>
+        <a:bodyPr/>
+        <a:lstStyle/>
+        <a:p>
+          <a:endParaRPr lang="en-GB" b="1" dirty="0"/>
+        </a:p>
+      </dgm:t>
+    </dgm:pt>
+    <dgm:pt modelId="{E83D1EC2-96D6-494F-B27A-918727F485B2}" type="parTrans" cxnId="{492A09DB-B2B0-4674-8312-56B7DC2039FB}">
+      <dgm:prSet/>
+      <dgm:spPr/>
+      <dgm:t>
+        <a:bodyPr/>
+        <a:lstStyle/>
+        <a:p>
+          <a:endParaRPr lang="en-GB"/>
+        </a:p>
+      </dgm:t>
+    </dgm:pt>
+    <dgm:pt modelId="{F280E23A-3A58-498F-8B0B-527A589D6008}" type="sibTrans" cxnId="{492A09DB-B2B0-4674-8312-56B7DC2039FB}">
+      <dgm:prSet/>
+      <dgm:spPr/>
+      <dgm:t>
+        <a:bodyPr/>
+        <a:lstStyle/>
+        <a:p>
+          <a:endParaRPr lang="en-GB"/>
+        </a:p>
+      </dgm:t>
+    </dgm:pt>
+    <dgm:pt modelId="{EF17271B-3FE0-4D35-BB10-5138D962E7B9}">
+      <dgm:prSet/>
+      <dgm:spPr/>
+      <dgm:t>
+        <a:bodyPr/>
+        <a:lstStyle/>
+        <a:p>
+          <a:r>
+            <a:rPr lang="en-GB" b="1" dirty="0"/>
+            <a:t>UMAP: </a:t>
+          </a:r>
+          <a:r>
+            <a:rPr lang="en-GB" dirty="0"/>
+            <a:t>- Projects high-dimensional data into 2D space - Preserves global structure for natural clustering - Shows how disaster events relate to each other</a:t>
+          </a:r>
+        </a:p>
+      </dgm:t>
+    </dgm:pt>
+    <dgm:pt modelId="{7B54B89C-5643-4796-B831-74A18D77DA4B}" type="parTrans" cxnId="{597BBE61-634E-464D-8F20-A51C8F025D6F}">
+      <dgm:prSet/>
+      <dgm:spPr/>
+      <dgm:t>
+        <a:bodyPr/>
+        <a:lstStyle/>
+        <a:p>
+          <a:endParaRPr lang="en-GB"/>
+        </a:p>
+      </dgm:t>
+    </dgm:pt>
+    <dgm:pt modelId="{D4AAEFC4-A0E3-44A7-A413-76EFA04CF96A}" type="sibTrans" cxnId="{597BBE61-634E-464D-8F20-A51C8F025D6F}">
+      <dgm:prSet/>
+      <dgm:spPr/>
+      <dgm:t>
+        <a:bodyPr/>
+        <a:lstStyle/>
+        <a:p>
+          <a:endParaRPr lang="en-GB"/>
+        </a:p>
+      </dgm:t>
+    </dgm:pt>
+    <dgm:pt modelId="{64F339CE-0FF8-45EA-9279-B328285A2AC8}">
+      <dgm:prSet/>
+      <dgm:spPr/>
+      <dgm:t>
+        <a:bodyPr/>
+        <a:lstStyle/>
+        <a:p>
+          <a:endParaRPr lang="en-US" dirty="0"/>
+        </a:p>
+      </dgm:t>
+    </dgm:pt>
+    <dgm:pt modelId="{E682ACAE-C5BE-499B-9235-B0FDC316BC14}" type="parTrans" cxnId="{B7A521B6-8CBB-4C72-9B36-D50E2D9E427D}">
+      <dgm:prSet/>
+      <dgm:spPr/>
+    </dgm:pt>
+    <dgm:pt modelId="{AF86292A-DDD3-43EF-8A1F-71320BABB33C}" type="sibTrans" cxnId="{B7A521B6-8CBB-4C72-9B36-D50E2D9E427D}">
+      <dgm:prSet/>
+      <dgm:spPr/>
+    </dgm:pt>
+    <dgm:pt modelId="{91930714-A70A-48DF-9A3C-30E0AA754DD3}">
+      <dgm:prSet/>
+      <dgm:spPr/>
+      <dgm:t>
+        <a:bodyPr/>
+        <a:lstStyle/>
+        <a:p>
+          <a:endParaRPr lang="en-US" dirty="0"/>
+        </a:p>
+      </dgm:t>
+    </dgm:pt>
+    <dgm:pt modelId="{60A2749E-BE91-4EA2-B7D7-30A39D16D8A0}" type="parTrans" cxnId="{B1D1DBC0-C66B-4D35-A22C-63DD76BFF940}">
+      <dgm:prSet/>
+      <dgm:spPr/>
+    </dgm:pt>
+    <dgm:pt modelId="{FAD971DD-9ABB-415D-9E3A-DAA377E9241B}" type="sibTrans" cxnId="{B1D1DBC0-C66B-4D35-A22C-63DD76BFF940}">
+      <dgm:prSet/>
+      <dgm:spPr/>
+    </dgm:pt>
+    <dgm:pt modelId="{2A499F7F-7023-41A6-AB5D-E271430675AB}" type="pres">
       <dgm:prSet presAssocID="{D6815FE0-2B56-47BE-928E-C89E13D2573A}" presName="Name0" presStyleCnt="0">
         <dgm:presLayoutVars>
           <dgm:dir/>
@@ -3577,12 +3770,12 @@
       </dgm:prSet>
       <dgm:spPr/>
     </dgm:pt>
-    <dgm:pt modelId="{4A72733C-420D-4AAE-9545-1AE82D9C35B8}" type="pres">
+    <dgm:pt modelId="{8D93CFB9-FA5B-4224-86AC-41CA42E3B7D3}" type="pres">
       <dgm:prSet presAssocID="{DD289425-1158-4663-A4D9-13BC7578F810}" presName="composite" presStyleCnt="0"/>
       <dgm:spPr/>
     </dgm:pt>
-    <dgm:pt modelId="{2E9DC656-56EB-4358-8C92-EAD9C4AD92A5}" type="pres">
-      <dgm:prSet presAssocID="{DD289425-1158-4663-A4D9-13BC7578F810}" presName="parTx" presStyleLbl="alignNode1" presStyleIdx="0" presStyleCnt="3">
+    <dgm:pt modelId="{FBC2EC90-EB92-48F0-94B5-DE096012F297}" type="pres">
+      <dgm:prSet presAssocID="{DD289425-1158-4663-A4D9-13BC7578F810}" presName="parTx" presStyleLbl="alignNode1" presStyleIdx="0" presStyleCnt="4">
         <dgm:presLayoutVars>
           <dgm:chMax val="0"/>
           <dgm:chPref val="0"/>
@@ -3591,24 +3784,24 @@
       </dgm:prSet>
       <dgm:spPr/>
     </dgm:pt>
-    <dgm:pt modelId="{A17C36CA-36B0-4BEC-82E5-677834E2AB37}" type="pres">
-      <dgm:prSet presAssocID="{DD289425-1158-4663-A4D9-13BC7578F810}" presName="desTx" presStyleLbl="alignAccFollowNode1" presStyleIdx="0" presStyleCnt="3">
+    <dgm:pt modelId="{88D68642-6A5A-4DDD-82C5-59D6067362FC}" type="pres">
+      <dgm:prSet presAssocID="{DD289425-1158-4663-A4D9-13BC7578F810}" presName="desTx" presStyleLbl="alignAccFollowNode1" presStyleIdx="0" presStyleCnt="4">
         <dgm:presLayoutVars>
           <dgm:bulletEnabled val="1"/>
         </dgm:presLayoutVars>
       </dgm:prSet>
       <dgm:spPr/>
     </dgm:pt>
-    <dgm:pt modelId="{34B8FFAE-9B65-4B70-BE01-69B6EC0E8FD1}" type="pres">
+    <dgm:pt modelId="{FC09F258-48D4-4E33-9D0E-203B2B62F646}" type="pres">
       <dgm:prSet presAssocID="{BDA1EA66-470F-4B21-BE48-F6AAB388B6DB}" presName="space" presStyleCnt="0"/>
       <dgm:spPr/>
     </dgm:pt>
-    <dgm:pt modelId="{528805A9-557A-434F-896E-9D49979119DF}" type="pres">
+    <dgm:pt modelId="{E12A4682-3A85-473A-BD21-840B6583C15F}" type="pres">
       <dgm:prSet presAssocID="{98E7FCCC-EBC7-4237-BBA1-2A0F76CCC3AF}" presName="composite" presStyleCnt="0"/>
       <dgm:spPr/>
     </dgm:pt>
-    <dgm:pt modelId="{A58476C1-430F-45DF-8BC9-4B59B6884B2E}" type="pres">
-      <dgm:prSet presAssocID="{98E7FCCC-EBC7-4237-BBA1-2A0F76CCC3AF}" presName="parTx" presStyleLbl="alignNode1" presStyleIdx="1" presStyleCnt="3">
+    <dgm:pt modelId="{80E4757A-4E29-4FC5-A445-2D3B4B81162E}" type="pres">
+      <dgm:prSet presAssocID="{98E7FCCC-EBC7-4237-BBA1-2A0F76CCC3AF}" presName="parTx" presStyleLbl="alignNode1" presStyleIdx="1" presStyleCnt="4">
         <dgm:presLayoutVars>
           <dgm:chMax val="0"/>
           <dgm:chPref val="0"/>
@@ -3617,24 +3810,24 @@
       </dgm:prSet>
       <dgm:spPr/>
     </dgm:pt>
-    <dgm:pt modelId="{F667A468-633A-4395-84DD-0C959CFDF2C4}" type="pres">
-      <dgm:prSet presAssocID="{98E7FCCC-EBC7-4237-BBA1-2A0F76CCC3AF}" presName="desTx" presStyleLbl="alignAccFollowNode1" presStyleIdx="1" presStyleCnt="3">
+    <dgm:pt modelId="{C6343B1C-71D9-487E-A001-C15FF722EBDA}" type="pres">
+      <dgm:prSet presAssocID="{98E7FCCC-EBC7-4237-BBA1-2A0F76CCC3AF}" presName="desTx" presStyleLbl="alignAccFollowNode1" presStyleIdx="1" presStyleCnt="4">
         <dgm:presLayoutVars>
           <dgm:bulletEnabled val="1"/>
         </dgm:presLayoutVars>
       </dgm:prSet>
       <dgm:spPr/>
     </dgm:pt>
-    <dgm:pt modelId="{81AD433F-BE20-4B07-827E-D2D87AE224DD}" type="pres">
+    <dgm:pt modelId="{8D0DA629-B787-4761-9759-32E7BCF55E6A}" type="pres">
       <dgm:prSet presAssocID="{00B46698-CB55-41B7-8C62-7DEAC89B72F1}" presName="space" presStyleCnt="0"/>
       <dgm:spPr/>
     </dgm:pt>
-    <dgm:pt modelId="{AA278D42-1A2C-43D0-8E95-725FE93DE9D5}" type="pres">
+    <dgm:pt modelId="{9D6183E9-6174-4D06-89E6-AAD3608B40F4}" type="pres">
       <dgm:prSet presAssocID="{C79BA9C5-8EF6-4B58-BCA1-050253515108}" presName="composite" presStyleCnt="0"/>
       <dgm:spPr/>
     </dgm:pt>
-    <dgm:pt modelId="{343F43F1-27C9-4ACA-9AA6-BED00EACF0E3}" type="pres">
-      <dgm:prSet presAssocID="{C79BA9C5-8EF6-4B58-BCA1-050253515108}" presName="parTx" presStyleLbl="alignNode1" presStyleIdx="2" presStyleCnt="3">
+    <dgm:pt modelId="{137B72E4-77CA-4A6D-9CBF-81F774813F2D}" type="pres">
+      <dgm:prSet presAssocID="{C79BA9C5-8EF6-4B58-BCA1-050253515108}" presName="parTx" presStyleLbl="alignNode1" presStyleIdx="2" presStyleCnt="4">
         <dgm:presLayoutVars>
           <dgm:chMax val="0"/>
           <dgm:chPref val="0"/>
@@ -3643,8 +3836,34 @@
       </dgm:prSet>
       <dgm:spPr/>
     </dgm:pt>
-    <dgm:pt modelId="{D3EA047B-3025-496C-8CEA-EA993508DAA7}" type="pres">
-      <dgm:prSet presAssocID="{C79BA9C5-8EF6-4B58-BCA1-050253515108}" presName="desTx" presStyleLbl="alignAccFollowNode1" presStyleIdx="2" presStyleCnt="3">
+    <dgm:pt modelId="{A2576744-2271-4C63-A64E-09900380D0FD}" type="pres">
+      <dgm:prSet presAssocID="{C79BA9C5-8EF6-4B58-BCA1-050253515108}" presName="desTx" presStyleLbl="alignAccFollowNode1" presStyleIdx="2" presStyleCnt="4">
+        <dgm:presLayoutVars>
+          <dgm:bulletEnabled val="1"/>
+        </dgm:presLayoutVars>
+      </dgm:prSet>
+      <dgm:spPr/>
+    </dgm:pt>
+    <dgm:pt modelId="{1D4FB5CE-7BF7-437B-9064-861A58D1844B}" type="pres">
+      <dgm:prSet presAssocID="{263D3FB0-B8FC-4B25-AD2A-77810B2CC85E}" presName="space" presStyleCnt="0"/>
+      <dgm:spPr/>
+    </dgm:pt>
+    <dgm:pt modelId="{EA159C35-8054-4C63-B758-E05D44FCF573}" type="pres">
+      <dgm:prSet presAssocID="{3E26CA25-5CD9-40DD-868C-866B2E606A25}" presName="composite" presStyleCnt="0"/>
+      <dgm:spPr/>
+    </dgm:pt>
+    <dgm:pt modelId="{08D4987A-5E90-44D1-83A4-8BFF8CA4E80A}" type="pres">
+      <dgm:prSet presAssocID="{3E26CA25-5CD9-40DD-868C-866B2E606A25}" presName="parTx" presStyleLbl="alignNode1" presStyleIdx="3" presStyleCnt="4">
+        <dgm:presLayoutVars>
+          <dgm:chMax val="0"/>
+          <dgm:chPref val="0"/>
+          <dgm:bulletEnabled val="1"/>
+        </dgm:presLayoutVars>
+      </dgm:prSet>
+      <dgm:spPr/>
+    </dgm:pt>
+    <dgm:pt modelId="{35774047-59F3-442C-850D-ECE9FE19BDE8}" type="pres">
+      <dgm:prSet presAssocID="{3E26CA25-5CD9-40DD-868C-866B2E606A25}" presName="desTx" presStyleLbl="alignAccFollowNode1" presStyleIdx="3" presStyleCnt="4">
         <dgm:presLayoutVars>
           <dgm:bulletEnabled val="1"/>
         </dgm:presLayoutVars>
@@ -3653,40 +3872,58 @@
     </dgm:pt>
   </dgm:ptLst>
   <dgm:cxnLst>
-    <dgm:cxn modelId="{EBE73725-B610-4182-9EFD-6A8FEC839532}" type="presOf" srcId="{D6815FE0-2B56-47BE-928E-C89E13D2573A}" destId="{9E4B9CA3-C9AA-4257-85ED-9B118E0B54A6}" srcOrd="0" destOrd="0" presId="urn:microsoft.com/office/officeart/2005/8/layout/hList1"/>
-    <dgm:cxn modelId="{8416732C-6FE7-428B-B5AC-67ED5E9A2600}" type="presOf" srcId="{BED52ADD-553B-4B54-9A87-2505B40E16B9}" destId="{F667A468-633A-4395-84DD-0C959CFDF2C4}" srcOrd="0" destOrd="0" presId="urn:microsoft.com/office/officeart/2005/8/layout/hList1"/>
-    <dgm:cxn modelId="{43C89736-7EAA-4FBE-B284-83EBB0A18D69}" type="presOf" srcId="{19D19966-722A-4C0A-8C6B-A9E2A8814957}" destId="{F667A468-633A-4395-84DD-0C959CFDF2C4}" srcOrd="0" destOrd="1" presId="urn:microsoft.com/office/officeart/2005/8/layout/hList1"/>
+    <dgm:cxn modelId="{5CBBB210-4F99-4A6B-A93F-1F48E4FC4823}" type="presOf" srcId="{64F339CE-0FF8-45EA-9279-B328285A2AC8}" destId="{A2576744-2271-4C63-A64E-09900380D0FD}" srcOrd="0" destOrd="1" presId="urn:microsoft.com/office/officeart/2005/8/layout/hList1"/>
+    <dgm:cxn modelId="{2F23F81A-B987-40A1-90AA-63FDDBBD029E}" srcId="{3E26CA25-5CD9-40DD-868C-866B2E606A25}" destId="{6DFF8CC7-20F3-417E-ACA1-0EB46C28BE35}" srcOrd="0" destOrd="0" parTransId="{E8460B07-CB2F-4E01-BF03-5FBF5B566833}" sibTransId="{C16355CA-94EC-4657-8463-44A7CBFD3489}"/>
+    <dgm:cxn modelId="{588D032F-B7E9-4405-99C6-1EA876808AEF}" type="presOf" srcId="{98E7FCCC-EBC7-4237-BBA1-2A0F76CCC3AF}" destId="{80E4757A-4E29-4FC5-A445-2D3B4B81162E}" srcOrd="0" destOrd="0" presId="urn:microsoft.com/office/officeart/2005/8/layout/hList1"/>
+    <dgm:cxn modelId="{4DEFED31-ED77-417F-8E5E-B74C15F19138}" type="presOf" srcId="{91930714-A70A-48DF-9A3C-30E0AA754DD3}" destId="{C6343B1C-71D9-487E-A001-C15FF722EBDA}" srcOrd="0" destOrd="1" presId="urn:microsoft.com/office/officeart/2005/8/layout/hList1"/>
     <dgm:cxn modelId="{AAFDB438-7A76-4AE8-84EC-46527A977B73}" srcId="{98E7FCCC-EBC7-4237-BBA1-2A0F76CCC3AF}" destId="{BED52ADD-553B-4B54-9A87-2505B40E16B9}" srcOrd="0" destOrd="0" parTransId="{D478AF3A-A4EB-42A0-8D19-A674557EF40C}" sibTransId="{7D09D1FE-CB75-46CA-A373-C711A756BADF}"/>
-    <dgm:cxn modelId="{02DD1639-CA7C-47B3-9463-9EDFEE8A2192}" type="presOf" srcId="{54379A65-8194-4D08-A20B-E8B8E3EB3D9D}" destId="{A17C36CA-36B0-4BEC-82E5-677834E2AB37}" srcOrd="0" destOrd="0" presId="urn:microsoft.com/office/officeart/2005/8/layout/hList1"/>
-    <dgm:cxn modelId="{71109C5D-C4D0-4ECF-A4C6-98E1E016BFE1}" type="presOf" srcId="{C79BA9C5-8EF6-4B58-BCA1-050253515108}" destId="{343F43F1-27C9-4ACA-9AA6-BED00EACF0E3}" srcOrd="0" destOrd="0" presId="urn:microsoft.com/office/officeart/2005/8/layout/hList1"/>
-    <dgm:cxn modelId="{7E50AC70-D53B-4E34-B4B3-DA34EA345746}" type="presOf" srcId="{98E7FCCC-EBC7-4237-BBA1-2A0F76CCC3AF}" destId="{A58476C1-430F-45DF-8BC9-4B59B6884B2E}" srcOrd="0" destOrd="0" presId="urn:microsoft.com/office/officeart/2005/8/layout/hList1"/>
-    <dgm:cxn modelId="{C0030E8A-B1D1-40EC-8933-BE389259317C}" type="presOf" srcId="{87EEE5DC-1EED-4313-A5D5-75FD9B0AD5E8}" destId="{D3EA047B-3025-496C-8CEA-EA993508DAA7}" srcOrd="0" destOrd="1" presId="urn:microsoft.com/office/officeart/2005/8/layout/hList1"/>
+    <dgm:cxn modelId="{02A77540-B661-4300-87C8-D13E2B120B6A}" type="presOf" srcId="{C79BA9C5-8EF6-4B58-BCA1-050253515108}" destId="{137B72E4-77CA-4A6D-9CBF-81F774813F2D}" srcOrd="0" destOrd="0" presId="urn:microsoft.com/office/officeart/2005/8/layout/hList1"/>
+    <dgm:cxn modelId="{708A995C-B389-4AA7-9976-E75B45CC86AE}" type="presOf" srcId="{19D19966-722A-4C0A-8C6B-A9E2A8814957}" destId="{C6343B1C-71D9-487E-A001-C15FF722EBDA}" srcOrd="0" destOrd="2" presId="urn:microsoft.com/office/officeart/2005/8/layout/hList1"/>
+    <dgm:cxn modelId="{597BBE61-634E-464D-8F20-A51C8F025D6F}" srcId="{3E26CA25-5CD9-40DD-868C-866B2E606A25}" destId="{EF17271B-3FE0-4D35-BB10-5138D962E7B9}" srcOrd="3" destOrd="0" parTransId="{7B54B89C-5643-4796-B831-74A18D77DA4B}" sibTransId="{D4AAEFC4-A0E3-44A7-A413-76EFA04CF96A}"/>
+    <dgm:cxn modelId="{E0937B44-260F-4EA6-88A1-B8DF228CC9C5}" type="presOf" srcId="{4D32D4A3-7129-4332-933A-A7DEFC11C2DE}" destId="{35774047-59F3-442C-850D-ECE9FE19BDE8}" srcOrd="0" destOrd="2" presId="urn:microsoft.com/office/officeart/2005/8/layout/hList1"/>
+    <dgm:cxn modelId="{AB9CA46F-2B84-483B-A593-652BB709A694}" type="presOf" srcId="{DD289425-1158-4663-A4D9-13BC7578F810}" destId="{FBC2EC90-EB92-48F0-94B5-DE096012F297}" srcOrd="0" destOrd="0" presId="urn:microsoft.com/office/officeart/2005/8/layout/hList1"/>
+    <dgm:cxn modelId="{080D2350-49AA-4E0A-8CE9-3C445D666A05}" type="presOf" srcId="{6DFF8CC7-20F3-417E-ACA1-0EB46C28BE35}" destId="{35774047-59F3-442C-850D-ECE9FE19BDE8}" srcOrd="0" destOrd="0" presId="urn:microsoft.com/office/officeart/2005/8/layout/hList1"/>
+    <dgm:cxn modelId="{F2A65172-A7A8-47BC-9E6F-069B36E520AC}" type="presOf" srcId="{74D904A1-1DA3-4058-BD8A-712E01A3636A}" destId="{A2576744-2271-4C63-A64E-09900380D0FD}" srcOrd="0" destOrd="0" presId="urn:microsoft.com/office/officeart/2005/8/layout/hList1"/>
+    <dgm:cxn modelId="{B1072E57-079A-4840-B84C-706A3F385E57}" type="presOf" srcId="{DD53EBCA-E068-4B7C-9C38-21FBFE85F165}" destId="{35774047-59F3-442C-850D-ECE9FE19BDE8}" srcOrd="0" destOrd="1" presId="urn:microsoft.com/office/officeart/2005/8/layout/hList1"/>
+    <dgm:cxn modelId="{2373588E-6FBD-4627-B61D-9C5FE5DC2D68}" type="presOf" srcId="{BED52ADD-553B-4B54-9A87-2505B40E16B9}" destId="{C6343B1C-71D9-487E-A001-C15FF722EBDA}" srcOrd="0" destOrd="0" presId="urn:microsoft.com/office/officeart/2005/8/layout/hList1"/>
     <dgm:cxn modelId="{2E50D693-E3A7-45EA-A405-D59FDC01F038}" srcId="{D6815FE0-2B56-47BE-928E-C89E13D2573A}" destId="{C79BA9C5-8EF6-4B58-BCA1-050253515108}" srcOrd="2" destOrd="0" parTransId="{7EC7085B-CFBB-4422-890B-D0CC4B040D6D}" sibTransId="{263D3FB0-B8FC-4B25-AD2A-77810B2CC85E}"/>
+    <dgm:cxn modelId="{34B0ED97-8F01-4CEC-97AF-B56EA6B78882}" type="presOf" srcId="{D6815FE0-2B56-47BE-928E-C89E13D2573A}" destId="{2A499F7F-7023-41A6-AB5D-E271430675AB}" srcOrd="0" destOrd="0" presId="urn:microsoft.com/office/officeart/2005/8/layout/hList1"/>
+    <dgm:cxn modelId="{340BA59D-D9B3-44F2-81D6-545DF27580A9}" type="presOf" srcId="{3E26CA25-5CD9-40DD-868C-866B2E606A25}" destId="{08D4987A-5E90-44D1-83A4-8BFF8CA4E80A}" srcOrd="0" destOrd="0" presId="urn:microsoft.com/office/officeart/2005/8/layout/hList1"/>
     <dgm:cxn modelId="{6B567EB0-F85C-4C83-B9D0-D3A359FC2A81}" srcId="{DD289425-1158-4663-A4D9-13BC7578F810}" destId="{54379A65-8194-4D08-A20B-E8B8E3EB3D9D}" srcOrd="0" destOrd="0" parTransId="{14D58431-2B79-4351-9AA7-C3DFB9F481CE}" sibTransId="{0E00C01F-40A8-4323-A2A7-8C06EB48A496}"/>
-    <dgm:cxn modelId="{2EEA1FB8-7539-40D2-8BDD-D9DAA7321E69}" srcId="{C79BA9C5-8EF6-4B58-BCA1-050253515108}" destId="{87EEE5DC-1EED-4313-A5D5-75FD9B0AD5E8}" srcOrd="1" destOrd="0" parTransId="{3FDCBD18-99C1-4312-A90A-540D88871EC9}" sibTransId="{53249E29-831D-4E7F-A05E-5E24597D87C5}"/>
-    <dgm:cxn modelId="{A08E7ED1-A6A5-41C4-9500-AA700DD0EB27}" type="presOf" srcId="{DD289425-1158-4663-A4D9-13BC7578F810}" destId="{2E9DC656-56EB-4358-8C92-EAD9C4AD92A5}" srcOrd="0" destOrd="0" presId="urn:microsoft.com/office/officeart/2005/8/layout/hList1"/>
-    <dgm:cxn modelId="{84B730DA-1F1D-4683-A112-93BDBCF2D936}" type="presOf" srcId="{74D904A1-1DA3-4058-BD8A-712E01A3636A}" destId="{D3EA047B-3025-496C-8CEA-EA993508DAA7}" srcOrd="0" destOrd="0" presId="urn:microsoft.com/office/officeart/2005/8/layout/hList1"/>
+    <dgm:cxn modelId="{B7A521B6-8CBB-4C72-9B36-D50E2D9E427D}" srcId="{C79BA9C5-8EF6-4B58-BCA1-050253515108}" destId="{64F339CE-0FF8-45EA-9279-B328285A2AC8}" srcOrd="1" destOrd="0" parTransId="{E682ACAE-C5BE-499B-9235-B0FDC316BC14}" sibTransId="{AF86292A-DDD3-43EF-8A1F-71320BABB33C}"/>
+    <dgm:cxn modelId="{2EEA1FB8-7539-40D2-8BDD-D9DAA7321E69}" srcId="{C79BA9C5-8EF6-4B58-BCA1-050253515108}" destId="{87EEE5DC-1EED-4313-A5D5-75FD9B0AD5E8}" srcOrd="2" destOrd="0" parTransId="{3FDCBD18-99C1-4312-A90A-540D88871EC9}" sibTransId="{53249E29-831D-4E7F-A05E-5E24597D87C5}"/>
+    <dgm:cxn modelId="{B1D1DBC0-C66B-4D35-A22C-63DD76BFF940}" srcId="{98E7FCCC-EBC7-4237-BBA1-2A0F76CCC3AF}" destId="{91930714-A70A-48DF-9A3C-30E0AA754DD3}" srcOrd="1" destOrd="0" parTransId="{60A2749E-BE91-4EA2-B7D7-30A39D16D8A0}" sibTransId="{FAD971DD-9ABB-415D-9E3A-DAA377E9241B}"/>
+    <dgm:cxn modelId="{598745C2-F401-4B86-9968-ACEF64E0595A}" type="presOf" srcId="{87EEE5DC-1EED-4313-A5D5-75FD9B0AD5E8}" destId="{A2576744-2271-4C63-A64E-09900380D0FD}" srcOrd="0" destOrd="2" presId="urn:microsoft.com/office/officeart/2005/8/layout/hList1"/>
+    <dgm:cxn modelId="{355A18C5-281F-4FA4-97E6-989C7DD12294}" srcId="{D6815FE0-2B56-47BE-928E-C89E13D2573A}" destId="{3E26CA25-5CD9-40DD-868C-866B2E606A25}" srcOrd="3" destOrd="0" parTransId="{60128B15-9205-4AF7-A471-644DC9113792}" sibTransId="{CD3C5889-203E-458F-81FA-6AECC40CF4E6}"/>
+    <dgm:cxn modelId="{640FC2D2-F6D5-4638-9519-A3BBE0E241B4}" type="presOf" srcId="{EF17271B-3FE0-4D35-BB10-5138D962E7B9}" destId="{35774047-59F3-442C-850D-ECE9FE19BDE8}" srcOrd="0" destOrd="3" presId="urn:microsoft.com/office/officeart/2005/8/layout/hList1"/>
     <dgm:cxn modelId="{122851DA-B085-46E2-B38E-DF5367001DB1}" srcId="{C79BA9C5-8EF6-4B58-BCA1-050253515108}" destId="{74D904A1-1DA3-4058-BD8A-712E01A3636A}" srcOrd="0" destOrd="0" parTransId="{700B4266-0C64-4396-A3D5-D858F04B1467}" sibTransId="{A8508307-0AEC-4653-93A8-D4019864D20D}"/>
+    <dgm:cxn modelId="{492A09DB-B2B0-4674-8312-56B7DC2039FB}" srcId="{3E26CA25-5CD9-40DD-868C-866B2E606A25}" destId="{4D32D4A3-7129-4332-933A-A7DEFC11C2DE}" srcOrd="2" destOrd="0" parTransId="{E83D1EC2-96D6-494F-B27A-918727F485B2}" sibTransId="{F280E23A-3A58-498F-8B0B-527A589D6008}"/>
+    <dgm:cxn modelId="{103541DB-9002-4EC9-9E6F-B20BA4517F19}" srcId="{3E26CA25-5CD9-40DD-868C-866B2E606A25}" destId="{DD53EBCA-E068-4B7C-9C38-21FBFE85F165}" srcOrd="1" destOrd="0" parTransId="{B89022A1-BADA-497D-930F-FDEE74191060}" sibTransId="{FE7D8FEF-5FAF-47CD-9D12-5E20EC526A11}"/>
     <dgm:cxn modelId="{010350E2-9035-4692-BB48-7630AB24D16F}" srcId="{D6815FE0-2B56-47BE-928E-C89E13D2573A}" destId="{98E7FCCC-EBC7-4237-BBA1-2A0F76CCC3AF}" srcOrd="1" destOrd="0" parTransId="{9868C9CE-5A5E-41D1-A93E-6385000B6C45}" sibTransId="{00B46698-CB55-41B7-8C62-7DEAC89B72F1}"/>
-    <dgm:cxn modelId="{6B77F0ED-FC61-4B0C-800D-C4EFB2BD313F}" srcId="{98E7FCCC-EBC7-4237-BBA1-2A0F76CCC3AF}" destId="{19D19966-722A-4C0A-8C6B-A9E2A8814957}" srcOrd="1" destOrd="0" parTransId="{63D36D03-74B4-444D-A074-DFF725CF4E1A}" sibTransId="{F47E5A32-81DF-4FA1-BC9F-CBA0A0B91E0E}"/>
+    <dgm:cxn modelId="{6B77F0ED-FC61-4B0C-800D-C4EFB2BD313F}" srcId="{98E7FCCC-EBC7-4237-BBA1-2A0F76CCC3AF}" destId="{19D19966-722A-4C0A-8C6B-A9E2A8814957}" srcOrd="2" destOrd="0" parTransId="{63D36D03-74B4-444D-A074-DFF725CF4E1A}" sibTransId="{F47E5A32-81DF-4FA1-BC9F-CBA0A0B91E0E}"/>
     <dgm:cxn modelId="{644CECF7-006A-456B-B653-A55288D50E26}" srcId="{D6815FE0-2B56-47BE-928E-C89E13D2573A}" destId="{DD289425-1158-4663-A4D9-13BC7578F810}" srcOrd="0" destOrd="0" parTransId="{B5F5B40F-5E65-4D7A-AFA6-7D7C356D936E}" sibTransId="{BDA1EA66-470F-4B21-BE48-F6AAB388B6DB}"/>
-    <dgm:cxn modelId="{E2FB46E6-DF8E-4EA4-9E86-B1E745CBD836}" type="presParOf" srcId="{9E4B9CA3-C9AA-4257-85ED-9B118E0B54A6}" destId="{4A72733C-420D-4AAE-9545-1AE82D9C35B8}" srcOrd="0" destOrd="0" presId="urn:microsoft.com/office/officeart/2005/8/layout/hList1"/>
-    <dgm:cxn modelId="{584F955B-4493-4C2B-9931-C64C463B1BD7}" type="presParOf" srcId="{4A72733C-420D-4AAE-9545-1AE82D9C35B8}" destId="{2E9DC656-56EB-4358-8C92-EAD9C4AD92A5}" srcOrd="0" destOrd="0" presId="urn:microsoft.com/office/officeart/2005/8/layout/hList1"/>
-    <dgm:cxn modelId="{4658BD3C-608E-4A73-B05F-6BB88578EAF6}" type="presParOf" srcId="{4A72733C-420D-4AAE-9545-1AE82D9C35B8}" destId="{A17C36CA-36B0-4BEC-82E5-677834E2AB37}" srcOrd="1" destOrd="0" presId="urn:microsoft.com/office/officeart/2005/8/layout/hList1"/>
-    <dgm:cxn modelId="{2E0B3EDA-B96D-4D40-B4B0-35C46385D5A0}" type="presParOf" srcId="{9E4B9CA3-C9AA-4257-85ED-9B118E0B54A6}" destId="{34B8FFAE-9B65-4B70-BE01-69B6EC0E8FD1}" srcOrd="1" destOrd="0" presId="urn:microsoft.com/office/officeart/2005/8/layout/hList1"/>
-    <dgm:cxn modelId="{303EA2A0-F857-4D5C-9FFE-4C3572882DE4}" type="presParOf" srcId="{9E4B9CA3-C9AA-4257-85ED-9B118E0B54A6}" destId="{528805A9-557A-434F-896E-9D49979119DF}" srcOrd="2" destOrd="0" presId="urn:microsoft.com/office/officeart/2005/8/layout/hList1"/>
-    <dgm:cxn modelId="{9FA5240D-BA2E-4171-8541-F087946F96D7}" type="presParOf" srcId="{528805A9-557A-434F-896E-9D49979119DF}" destId="{A58476C1-430F-45DF-8BC9-4B59B6884B2E}" srcOrd="0" destOrd="0" presId="urn:microsoft.com/office/officeart/2005/8/layout/hList1"/>
-    <dgm:cxn modelId="{621A0BBA-7A70-4DEF-B817-7B5126CA9DF7}" type="presParOf" srcId="{528805A9-557A-434F-896E-9D49979119DF}" destId="{F667A468-633A-4395-84DD-0C959CFDF2C4}" srcOrd="1" destOrd="0" presId="urn:microsoft.com/office/officeart/2005/8/layout/hList1"/>
-    <dgm:cxn modelId="{D54BFB37-043C-4C36-91FD-7068672A7AB9}" type="presParOf" srcId="{9E4B9CA3-C9AA-4257-85ED-9B118E0B54A6}" destId="{81AD433F-BE20-4B07-827E-D2D87AE224DD}" srcOrd="3" destOrd="0" presId="urn:microsoft.com/office/officeart/2005/8/layout/hList1"/>
-    <dgm:cxn modelId="{1E8E499B-8288-407B-8B1F-B3693371337C}" type="presParOf" srcId="{9E4B9CA3-C9AA-4257-85ED-9B118E0B54A6}" destId="{AA278D42-1A2C-43D0-8E95-725FE93DE9D5}" srcOrd="4" destOrd="0" presId="urn:microsoft.com/office/officeart/2005/8/layout/hList1"/>
-    <dgm:cxn modelId="{FEFC9ED0-7FD3-4E02-A8FE-B5DCE163F701}" type="presParOf" srcId="{AA278D42-1A2C-43D0-8E95-725FE93DE9D5}" destId="{343F43F1-27C9-4ACA-9AA6-BED00EACF0E3}" srcOrd="0" destOrd="0" presId="urn:microsoft.com/office/officeart/2005/8/layout/hList1"/>
-    <dgm:cxn modelId="{17C67CA1-5116-4922-9F89-710739135984}" type="presParOf" srcId="{AA278D42-1A2C-43D0-8E95-725FE93DE9D5}" destId="{D3EA047B-3025-496C-8CEA-EA993508DAA7}" srcOrd="1" destOrd="0" presId="urn:microsoft.com/office/officeart/2005/8/layout/hList1"/>
+    <dgm:cxn modelId="{08EF6DFD-838D-4B77-8E9E-2875C1D0E4F6}" type="presOf" srcId="{54379A65-8194-4D08-A20B-E8B8E3EB3D9D}" destId="{88D68642-6A5A-4DDD-82C5-59D6067362FC}" srcOrd="0" destOrd="0" presId="urn:microsoft.com/office/officeart/2005/8/layout/hList1"/>
+    <dgm:cxn modelId="{509DDB68-B7D5-4170-9D29-AD62E3DC4D55}" type="presParOf" srcId="{2A499F7F-7023-41A6-AB5D-E271430675AB}" destId="{8D93CFB9-FA5B-4224-86AC-41CA42E3B7D3}" srcOrd="0" destOrd="0" presId="urn:microsoft.com/office/officeart/2005/8/layout/hList1"/>
+    <dgm:cxn modelId="{ABD388F8-8882-4CB6-A558-329B40155D00}" type="presParOf" srcId="{8D93CFB9-FA5B-4224-86AC-41CA42E3B7D3}" destId="{FBC2EC90-EB92-48F0-94B5-DE096012F297}" srcOrd="0" destOrd="0" presId="urn:microsoft.com/office/officeart/2005/8/layout/hList1"/>
+    <dgm:cxn modelId="{2A5BA9D2-78BA-4572-BCA6-E7DA0D196214}" type="presParOf" srcId="{8D93CFB9-FA5B-4224-86AC-41CA42E3B7D3}" destId="{88D68642-6A5A-4DDD-82C5-59D6067362FC}" srcOrd="1" destOrd="0" presId="urn:microsoft.com/office/officeart/2005/8/layout/hList1"/>
+    <dgm:cxn modelId="{087B048E-DBAA-43FF-B7B4-454BD4E7C6AE}" type="presParOf" srcId="{2A499F7F-7023-41A6-AB5D-E271430675AB}" destId="{FC09F258-48D4-4E33-9D0E-203B2B62F646}" srcOrd="1" destOrd="0" presId="urn:microsoft.com/office/officeart/2005/8/layout/hList1"/>
+    <dgm:cxn modelId="{12DE255A-55A8-4818-B16C-AB09A814CB77}" type="presParOf" srcId="{2A499F7F-7023-41A6-AB5D-E271430675AB}" destId="{E12A4682-3A85-473A-BD21-840B6583C15F}" srcOrd="2" destOrd="0" presId="urn:microsoft.com/office/officeart/2005/8/layout/hList1"/>
+    <dgm:cxn modelId="{AD4E2578-7A71-4E64-ACC4-594C86B30A76}" type="presParOf" srcId="{E12A4682-3A85-473A-BD21-840B6583C15F}" destId="{80E4757A-4E29-4FC5-A445-2D3B4B81162E}" srcOrd="0" destOrd="0" presId="urn:microsoft.com/office/officeart/2005/8/layout/hList1"/>
+    <dgm:cxn modelId="{AAF1D8CD-B8FA-4A9D-BB7F-46E45F1AAE7F}" type="presParOf" srcId="{E12A4682-3A85-473A-BD21-840B6583C15F}" destId="{C6343B1C-71D9-487E-A001-C15FF722EBDA}" srcOrd="1" destOrd="0" presId="urn:microsoft.com/office/officeart/2005/8/layout/hList1"/>
+    <dgm:cxn modelId="{4D8F73A4-7A5A-4E0F-9A2A-955FF9B9D605}" type="presParOf" srcId="{2A499F7F-7023-41A6-AB5D-E271430675AB}" destId="{8D0DA629-B787-4761-9759-32E7BCF55E6A}" srcOrd="3" destOrd="0" presId="urn:microsoft.com/office/officeart/2005/8/layout/hList1"/>
+    <dgm:cxn modelId="{8B946690-9E45-4749-8C43-3135747765B0}" type="presParOf" srcId="{2A499F7F-7023-41A6-AB5D-E271430675AB}" destId="{9D6183E9-6174-4D06-89E6-AAD3608B40F4}" srcOrd="4" destOrd="0" presId="urn:microsoft.com/office/officeart/2005/8/layout/hList1"/>
+    <dgm:cxn modelId="{65E8DC40-2B02-44FB-8513-378FFB738518}" type="presParOf" srcId="{9D6183E9-6174-4D06-89E6-AAD3608B40F4}" destId="{137B72E4-77CA-4A6D-9CBF-81F774813F2D}" srcOrd="0" destOrd="0" presId="urn:microsoft.com/office/officeart/2005/8/layout/hList1"/>
+    <dgm:cxn modelId="{1F236568-358A-4601-9B1D-5D0052B0B4CF}" type="presParOf" srcId="{9D6183E9-6174-4D06-89E6-AAD3608B40F4}" destId="{A2576744-2271-4C63-A64E-09900380D0FD}" srcOrd="1" destOrd="0" presId="urn:microsoft.com/office/officeart/2005/8/layout/hList1"/>
+    <dgm:cxn modelId="{98B29E44-7DB9-40FC-97BF-F49D4B43F01A}" type="presParOf" srcId="{2A499F7F-7023-41A6-AB5D-E271430675AB}" destId="{1D4FB5CE-7BF7-437B-9064-861A58D1844B}" srcOrd="5" destOrd="0" presId="urn:microsoft.com/office/officeart/2005/8/layout/hList1"/>
+    <dgm:cxn modelId="{6E8AE401-8BFA-4913-BF49-9E21A08D053A}" type="presParOf" srcId="{2A499F7F-7023-41A6-AB5D-E271430675AB}" destId="{EA159C35-8054-4C63-B758-E05D44FCF573}" srcOrd="6" destOrd="0" presId="urn:microsoft.com/office/officeart/2005/8/layout/hList1"/>
+    <dgm:cxn modelId="{F7EC8208-7A4F-4CD7-96EA-CE322876B951}" type="presParOf" srcId="{EA159C35-8054-4C63-B758-E05D44FCF573}" destId="{08D4987A-5E90-44D1-83A4-8BFF8CA4E80A}" srcOrd="0" destOrd="0" presId="urn:microsoft.com/office/officeart/2005/8/layout/hList1"/>
+    <dgm:cxn modelId="{4C8EB985-D733-4568-83BE-F806B4991584}" type="presParOf" srcId="{EA159C35-8054-4C63-B758-E05D44FCF573}" destId="{35774047-59F3-442C-850D-ECE9FE19BDE8}" srcOrd="1" destOrd="0" presId="urn:microsoft.com/office/officeart/2005/8/layout/hList1"/>
   </dgm:cxnLst>
   <dgm:bg/>
   <dgm:whole/>
   <dgm:extLst>
     <a:ext uri="http://schemas.microsoft.com/office/drawing/2008/diagram">
-      <dsp:dataModelExt xmlns:dsp="http://schemas.microsoft.com/office/drawing/2008/diagram" relId="rId6" minVer="http://schemas.openxmlformats.org/drawingml/2006/diagram"/>
+      <dsp:dataModelExt xmlns:dsp="http://schemas.microsoft.com/office/drawing/2008/diagram" relId="rId8" minVer="http://schemas.openxmlformats.org/drawingml/2006/diagram"/>
     </a:ext>
   </dgm:extLst>
 </dgm:dataModel>
@@ -4302,7 +4539,7 @@
   <dgm:whole/>
   <dgm:extLst>
     <a:ext uri="http://schemas.microsoft.com/office/drawing/2008/diagram">
-      <dsp:dataModelExt xmlns:dsp="http://schemas.microsoft.com/office/drawing/2008/diagram" relId="rId8" minVer="http://schemas.openxmlformats.org/drawingml/2006/diagram"/>
+      <dsp:dataModelExt xmlns:dsp="http://schemas.microsoft.com/office/drawing/2008/diagram" relId="rId9" minVer="http://schemas.openxmlformats.org/drawingml/2006/diagram"/>
     </a:ext>
   </dgm:extLst>
 </dgm:dataModel>
@@ -4753,7 +4990,7 @@
   <dgm:whole/>
   <dgm:extLst>
     <a:ext uri="http://schemas.microsoft.com/office/drawing/2008/diagram">
-      <dsp:dataModelExt xmlns:dsp="http://schemas.microsoft.com/office/drawing/2008/diagram" relId="rId6" minVer="http://schemas.openxmlformats.org/drawingml/2006/diagram"/>
+      <dsp:dataModelExt xmlns:dsp="http://schemas.microsoft.com/office/drawing/2008/diagram" relId="rId7" minVer="http://schemas.openxmlformats.org/drawingml/2006/diagram"/>
     </a:ext>
   </dgm:extLst>
 </dgm:dataModel>
@@ -5433,7 +5670,7 @@
   <dgm:whole/>
   <dgm:extLst>
     <a:ext uri="http://schemas.microsoft.com/office/drawing/2008/diagram">
-      <dsp:dataModelExt xmlns:dsp="http://schemas.microsoft.com/office/drawing/2008/diagram" relId="rId8" minVer="http://schemas.openxmlformats.org/drawingml/2006/diagram"/>
+      <dsp:dataModelExt xmlns:dsp="http://schemas.microsoft.com/office/drawing/2008/diagram" relId="rId9" minVer="http://schemas.openxmlformats.org/drawingml/2006/diagram"/>
     </a:ext>
   </dgm:extLst>
 </dgm:dataModel>
@@ -5447,28 +5684,47 @@
       <dsp:cNvGrpSpPr/>
     </dsp:nvGrpSpPr>
     <dsp:grpSpPr/>
-    <dsp:sp modelId="{2E9DC656-56EB-4358-8C92-EAD9C4AD92A5}">
+    <dsp:sp modelId="{FBC2EC90-EB92-48F0-94B5-DE096012F297}">
       <dsp:nvSpPr>
         <dsp:cNvPr id="0" name=""/>
         <dsp:cNvSpPr/>
       </dsp:nvSpPr>
       <dsp:spPr>
         <a:xfrm>
-          <a:off x="2561" y="91431"/>
-          <a:ext cx="2497179" cy="901745"/>
+          <a:off x="2965" y="298922"/>
+          <a:ext cx="1782979" cy="437497"/>
         </a:xfrm>
         <a:prstGeom prst="rect">
           <a:avLst/>
         </a:prstGeom>
-        <a:solidFill>
-          <a:schemeClr val="accent2">
-            <a:hueOff val="0"/>
-            <a:satOff val="0"/>
-            <a:lumOff val="0"/>
-            <a:alphaOff val="0"/>
-          </a:schemeClr>
-        </a:solidFill>
-        <a:ln w="25400" cap="flat" cmpd="sng" algn="ctr">
+        <a:gradFill rotWithShape="0">
+          <a:gsLst>
+            <a:gs pos="0">
+              <a:schemeClr val="accent2">
+                <a:hueOff val="0"/>
+                <a:satOff val="0"/>
+                <a:lumOff val="0"/>
+                <a:alphaOff val="0"/>
+                <a:tint val="100000"/>
+                <a:shade val="100000"/>
+                <a:satMod val="130000"/>
+              </a:schemeClr>
+            </a:gs>
+            <a:gs pos="100000">
+              <a:schemeClr val="accent2">
+                <a:hueOff val="0"/>
+                <a:satOff val="0"/>
+                <a:lumOff val="0"/>
+                <a:alphaOff val="0"/>
+                <a:tint val="50000"/>
+                <a:shade val="100000"/>
+                <a:satMod val="350000"/>
+              </a:schemeClr>
+            </a:gs>
+          </a:gsLst>
+          <a:lin ang="16200000" scaled="0"/>
+        </a:gradFill>
+        <a:ln w="9525" cap="flat" cmpd="sng" algn="ctr">
           <a:solidFill>
             <a:schemeClr val="accent2">
               <a:hueOff val="0"/>
@@ -5479,16 +5735,22 @@
           </a:solidFill>
           <a:prstDash val="solid"/>
         </a:ln>
-        <a:effectLst/>
+        <a:effectLst>
+          <a:outerShdw blurRad="40000" dist="23000" dir="5400000" rotWithShape="0">
+            <a:srgbClr val="000000">
+              <a:alpha val="35000"/>
+            </a:srgbClr>
+          </a:outerShdw>
+        </a:effectLst>
       </dsp:spPr>
       <dsp:style>
-        <a:lnRef idx="2">
+        <a:lnRef idx="1">
           <a:scrgbClr r="0" g="0" b="0"/>
         </a:lnRef>
-        <a:fillRef idx="1">
+        <a:fillRef idx="3">
           <a:scrgbClr r="0" g="0" b="0"/>
         </a:fillRef>
-        <a:effectRef idx="0">
+        <a:effectRef idx="2">
           <a:scrgbClr r="0" g="0" b="0"/>
         </a:effectRef>
         <a:fontRef idx="minor">
@@ -5496,12 +5758,12 @@
         </a:fontRef>
       </dsp:style>
       <dsp:txBody>
-        <a:bodyPr spcFirstLastPara="0" vert="horz" wrap="square" lIns="128016" tIns="73152" rIns="128016" bIns="73152" numCol="1" spcCol="1270" anchor="ctr" anchorCtr="0">
+        <a:bodyPr spcFirstLastPara="0" vert="horz" wrap="square" lIns="85344" tIns="48768" rIns="85344" bIns="48768" numCol="1" spcCol="1270" anchor="ctr" anchorCtr="0">
           <a:noAutofit/>
         </a:bodyPr>
         <a:lstStyle/>
         <a:p>
-          <a:pPr marL="0" lvl="0" indent="0" algn="ctr" defTabSz="800100">
+          <a:pPr marL="0" lvl="0" indent="0" algn="ctr" defTabSz="533400">
             <a:lnSpc>
               <a:spcPct val="90000"/>
             </a:lnSpc>
@@ -5515,45 +5777,45 @@
             <a:defRPr b="1"/>
           </a:pPr>
           <a:r>
-            <a:rPr lang="en-US" sz="1800" b="1" kern="1200"/>
+            <a:rPr lang="en-US" sz="1200" b="1" kern="1200"/>
             <a:t>Engineering Strategy</a:t>
           </a:r>
-          <a:endParaRPr lang="en-US" sz="1800" kern="1200"/>
+          <a:endParaRPr lang="en-US" sz="1200" kern="1200"/>
         </a:p>
       </dsp:txBody>
       <dsp:txXfrm>
-        <a:off x="2561" y="91431"/>
-        <a:ext cx="2497179" cy="901745"/>
+        <a:off x="2965" y="298922"/>
+        <a:ext cx="1782979" cy="437497"/>
       </dsp:txXfrm>
     </dsp:sp>
-    <dsp:sp modelId="{A17C36CA-36B0-4BEC-82E5-677834E2AB37}">
+    <dsp:sp modelId="{88D68642-6A5A-4DDD-82C5-59D6067362FC}">
       <dsp:nvSpPr>
         <dsp:cNvPr id="0" name=""/>
         <dsp:cNvSpPr/>
       </dsp:nvSpPr>
       <dsp:spPr>
         <a:xfrm>
-          <a:off x="2561" y="993176"/>
-          <a:ext cx="2497179" cy="3108197"/>
+          <a:off x="2965" y="736420"/>
+          <a:ext cx="1782979" cy="3315994"/>
         </a:xfrm>
         <a:prstGeom prst="rect">
           <a:avLst/>
         </a:prstGeom>
         <a:solidFill>
           <a:schemeClr val="accent2">
+            <a:alpha val="90000"/>
             <a:tint val="40000"/>
-            <a:alpha val="90000"/>
             <a:hueOff val="0"/>
             <a:satOff val="0"/>
             <a:lumOff val="0"/>
             <a:alphaOff val="0"/>
           </a:schemeClr>
         </a:solidFill>
-        <a:ln w="25400" cap="flat" cmpd="sng" algn="ctr">
+        <a:ln w="9525" cap="flat" cmpd="sng" algn="ctr">
           <a:solidFill>
             <a:schemeClr val="accent2">
+              <a:alpha val="90000"/>
               <a:tint val="40000"/>
-              <a:alpha val="90000"/>
               <a:hueOff val="0"/>
               <a:satOff val="0"/>
               <a:lumOff val="0"/>
@@ -5565,7 +5827,7 @@
         <a:effectLst/>
       </dsp:spPr>
       <dsp:style>
-        <a:lnRef idx="2">
+        <a:lnRef idx="1">
           <a:scrgbClr r="0" g="0" b="0"/>
         </a:lnRef>
         <a:fillRef idx="1">
@@ -5577,12 +5839,12 @@
         <a:fontRef idx="minor"/>
       </dsp:style>
       <dsp:txBody>
-        <a:bodyPr spcFirstLastPara="0" vert="horz" wrap="square" lIns="96012" tIns="96012" rIns="128016" bIns="144018" numCol="1" spcCol="1270" anchor="t" anchorCtr="0">
+        <a:bodyPr spcFirstLastPara="0" vert="horz" wrap="square" lIns="64008" tIns="64008" rIns="85344" bIns="96012" numCol="1" spcCol="1270" anchor="t" anchorCtr="0">
           <a:noAutofit/>
         </a:bodyPr>
         <a:lstStyle/>
         <a:p>
-          <a:pPr marL="171450" lvl="1" indent="-171450" algn="l" defTabSz="800100">
+          <a:pPr marL="114300" lvl="1" indent="-114300" algn="l" defTabSz="533400">
             <a:lnSpc>
               <a:spcPct val="90000"/>
             </a:lnSpc>
@@ -5595,66 +5857,83 @@
             <a:buChar char="•"/>
           </a:pPr>
           <a:r>
-            <a:rPr lang="en-US" sz="1800" kern="1200" dirty="0"/>
-            <a:t>I have created an “Offline-Online” architecture to make sure the system is scalable. Processing 18,000 images is computationally heavy so I have separated the “</a:t>
-          </a:r>
-          <a:r>
-            <a:rPr lang="en-US" sz="1800" kern="1200" dirty="0" err="1"/>
-            <a:t>maths</a:t>
-          </a:r>
-          <a:r>
-            <a:rPr lang="en-US" sz="1800" kern="1200" dirty="0"/>
-            <a:t>” from the “interface”.</a:t>
+            <a:rPr lang="en-US" sz="1200" kern="1200"/>
+            <a:t>I have created an “Offline-Online” architecture to make sure the system is scalable. Processing 18,000 images is computationally heavy so I have separated the “maths” from the “interface”.</a:t>
           </a:r>
         </a:p>
       </dsp:txBody>
       <dsp:txXfrm>
-        <a:off x="2561" y="993176"/>
-        <a:ext cx="2497179" cy="3108197"/>
+        <a:off x="2965" y="736420"/>
+        <a:ext cx="1782979" cy="3315994"/>
       </dsp:txXfrm>
     </dsp:sp>
-    <dsp:sp modelId="{A58476C1-430F-45DF-8BC9-4B59B6884B2E}">
+    <dsp:sp modelId="{80E4757A-4E29-4FC5-A445-2D3B4B81162E}">
       <dsp:nvSpPr>
         <dsp:cNvPr id="0" name=""/>
         <dsp:cNvSpPr/>
       </dsp:nvSpPr>
       <dsp:spPr>
         <a:xfrm>
-          <a:off x="2849345" y="91431"/>
-          <a:ext cx="2497179" cy="901745"/>
+          <a:off x="2035561" y="298922"/>
+          <a:ext cx="1782979" cy="437497"/>
         </a:xfrm>
         <a:prstGeom prst="rect">
           <a:avLst/>
         </a:prstGeom>
-        <a:solidFill>
-          <a:schemeClr val="accent2">
-            <a:hueOff val="2340759"/>
-            <a:satOff val="-2919"/>
-            <a:lumOff val="686"/>
-            <a:alphaOff val="0"/>
-          </a:schemeClr>
-        </a:solidFill>
-        <a:ln w="25400" cap="flat" cmpd="sng" algn="ctr">
+        <a:gradFill rotWithShape="0">
+          <a:gsLst>
+            <a:gs pos="0">
+              <a:schemeClr val="accent2">
+                <a:hueOff val="0"/>
+                <a:satOff val="0"/>
+                <a:lumOff val="0"/>
+                <a:alphaOff val="0"/>
+                <a:tint val="100000"/>
+                <a:shade val="100000"/>
+                <a:satMod val="130000"/>
+              </a:schemeClr>
+            </a:gs>
+            <a:gs pos="100000">
+              <a:schemeClr val="accent2">
+                <a:hueOff val="0"/>
+                <a:satOff val="0"/>
+                <a:lumOff val="0"/>
+                <a:alphaOff val="0"/>
+                <a:tint val="50000"/>
+                <a:shade val="100000"/>
+                <a:satMod val="350000"/>
+              </a:schemeClr>
+            </a:gs>
+          </a:gsLst>
+          <a:lin ang="16200000" scaled="0"/>
+        </a:gradFill>
+        <a:ln w="9525" cap="flat" cmpd="sng" algn="ctr">
           <a:solidFill>
             <a:schemeClr val="accent2">
-              <a:hueOff val="2340759"/>
-              <a:satOff val="-2919"/>
-              <a:lumOff val="686"/>
+              <a:hueOff val="0"/>
+              <a:satOff val="0"/>
+              <a:lumOff val="0"/>
               <a:alphaOff val="0"/>
             </a:schemeClr>
           </a:solidFill>
           <a:prstDash val="solid"/>
         </a:ln>
-        <a:effectLst/>
+        <a:effectLst>
+          <a:outerShdw blurRad="40000" dist="23000" dir="5400000" rotWithShape="0">
+            <a:srgbClr val="000000">
+              <a:alpha val="35000"/>
+            </a:srgbClr>
+          </a:outerShdw>
+        </a:effectLst>
       </dsp:spPr>
       <dsp:style>
-        <a:lnRef idx="2">
+        <a:lnRef idx="1">
           <a:scrgbClr r="0" g="0" b="0"/>
         </a:lnRef>
-        <a:fillRef idx="1">
+        <a:fillRef idx="3">
           <a:scrgbClr r="0" g="0" b="0"/>
         </a:fillRef>
-        <a:effectRef idx="0">
+        <a:effectRef idx="2">
           <a:scrgbClr r="0" g="0" b="0"/>
         </a:effectRef>
         <a:fontRef idx="minor">
@@ -5662,12 +5941,12 @@
         </a:fontRef>
       </dsp:style>
       <dsp:txBody>
-        <a:bodyPr spcFirstLastPara="0" vert="horz" wrap="square" lIns="128016" tIns="73152" rIns="128016" bIns="73152" numCol="1" spcCol="1270" anchor="ctr" anchorCtr="0">
+        <a:bodyPr spcFirstLastPara="0" vert="horz" wrap="square" lIns="85344" tIns="48768" rIns="85344" bIns="48768" numCol="1" spcCol="1270" anchor="ctr" anchorCtr="0">
           <a:noAutofit/>
         </a:bodyPr>
         <a:lstStyle/>
         <a:p>
-          <a:pPr marL="0" lvl="0" indent="0" algn="ctr" defTabSz="800100">
+          <a:pPr marL="0" lvl="0" indent="0" algn="ctr" defTabSz="533400">
             <a:lnSpc>
               <a:spcPct val="90000"/>
             </a:lnSpc>
@@ -5681,48 +5960,48 @@
             <a:defRPr b="1"/>
           </a:pPr>
           <a:r>
-            <a:rPr lang="en-US" sz="1800" b="1" kern="1200"/>
-            <a:t>Phase A: The Offline Engine (Backend)</a:t>
+            <a:rPr lang="en-US" sz="1200" b="1" kern="1200"/>
+            <a:t>The Offline Engine (Backend)</a:t>
           </a:r>
-          <a:endParaRPr lang="en-US" sz="1800" kern="1200"/>
+          <a:endParaRPr lang="en-US" sz="1200" kern="1200"/>
         </a:p>
       </dsp:txBody>
       <dsp:txXfrm>
-        <a:off x="2849345" y="91431"/>
-        <a:ext cx="2497179" cy="901745"/>
+        <a:off x="2035561" y="298922"/>
+        <a:ext cx="1782979" cy="437497"/>
       </dsp:txXfrm>
     </dsp:sp>
-    <dsp:sp modelId="{F667A468-633A-4395-84DD-0C959CFDF2C4}">
+    <dsp:sp modelId="{C6343B1C-71D9-487E-A001-C15FF722EBDA}">
       <dsp:nvSpPr>
         <dsp:cNvPr id="0" name=""/>
         <dsp:cNvSpPr/>
       </dsp:nvSpPr>
       <dsp:spPr>
         <a:xfrm>
-          <a:off x="2849345" y="993176"/>
-          <a:ext cx="2497179" cy="3108197"/>
+          <a:off x="2035561" y="736420"/>
+          <a:ext cx="1782979" cy="3315994"/>
         </a:xfrm>
         <a:prstGeom prst="rect">
           <a:avLst/>
         </a:prstGeom>
         <a:solidFill>
           <a:schemeClr val="accent2">
+            <a:alpha val="90000"/>
             <a:tint val="40000"/>
-            <a:alpha val="90000"/>
-            <a:hueOff val="2512910"/>
-            <a:satOff val="-2189"/>
-            <a:lumOff val="-3"/>
+            <a:hueOff val="0"/>
+            <a:satOff val="0"/>
+            <a:lumOff val="0"/>
             <a:alphaOff val="0"/>
           </a:schemeClr>
         </a:solidFill>
-        <a:ln w="25400" cap="flat" cmpd="sng" algn="ctr">
+        <a:ln w="9525" cap="flat" cmpd="sng" algn="ctr">
           <a:solidFill>
             <a:schemeClr val="accent2">
+              <a:alpha val="90000"/>
               <a:tint val="40000"/>
-              <a:alpha val="90000"/>
-              <a:hueOff val="2512910"/>
-              <a:satOff val="-2189"/>
-              <a:lumOff val="-3"/>
+              <a:hueOff val="0"/>
+              <a:satOff val="0"/>
+              <a:lumOff val="0"/>
               <a:alphaOff val="0"/>
             </a:schemeClr>
           </a:solidFill>
@@ -5731,7 +6010,7 @@
         <a:effectLst/>
       </dsp:spPr>
       <dsp:style>
-        <a:lnRef idx="2">
+        <a:lnRef idx="1">
           <a:scrgbClr r="0" g="0" b="0"/>
         </a:lnRef>
         <a:fillRef idx="1">
@@ -5743,12 +6022,12 @@
         <a:fontRef idx="minor"/>
       </dsp:style>
       <dsp:txBody>
-        <a:bodyPr spcFirstLastPara="0" vert="horz" wrap="square" lIns="96012" tIns="96012" rIns="128016" bIns="144018" numCol="1" spcCol="1270" anchor="t" anchorCtr="0">
+        <a:bodyPr spcFirstLastPara="0" vert="horz" wrap="square" lIns="64008" tIns="64008" rIns="85344" bIns="96012" numCol="1" spcCol="1270" anchor="t" anchorCtr="0">
           <a:noAutofit/>
         </a:bodyPr>
         <a:lstStyle/>
         <a:p>
-          <a:pPr marL="171450" lvl="1" indent="-171450" algn="l" defTabSz="800100">
+          <a:pPr marL="114300" lvl="1" indent="-114300" algn="l" defTabSz="533400">
             <a:lnSpc>
               <a:spcPct val="90000"/>
             </a:lnSpc>
@@ -5761,20 +6040,35 @@
             <a:buChar char="•"/>
           </a:pPr>
           <a:r>
-            <a:rPr lang="en-US" sz="1800" kern="1200" dirty="0"/>
+            <a:rPr lang="en-US" sz="1200" kern="1200" dirty="0"/>
             <a:t>This pipeline ingests the raw </a:t>
           </a:r>
           <a:r>
-            <a:rPr lang="en-US" sz="1800" kern="1200" dirty="0" err="1"/>
+            <a:rPr lang="en-US" sz="1200" kern="1200" dirty="0" err="1"/>
             <a:t>CrisisMMD</a:t>
           </a:r>
           <a:r>
-            <a:rPr lang="en-US" sz="1800" kern="1200" dirty="0"/>
+            <a:rPr lang="en-US" sz="1200" kern="1200" dirty="0"/>
             <a:t> data, cleans it, and feeds it through the CLIP model.</a:t>
           </a:r>
         </a:p>
         <a:p>
-          <a:pPr marL="171450" lvl="1" indent="-171450" algn="l" defTabSz="800100">
+          <a:pPr marL="114300" lvl="1" indent="-114300" algn="l" defTabSz="533400">
+            <a:lnSpc>
+              <a:spcPct val="90000"/>
+            </a:lnSpc>
+            <a:spcBef>
+              <a:spcPct val="0"/>
+            </a:spcBef>
+            <a:spcAft>
+              <a:spcPct val="15000"/>
+            </a:spcAft>
+            <a:buChar char="•"/>
+          </a:pPr>
+          <a:endParaRPr lang="en-US" sz="1200" kern="1200" dirty="0"/>
+        </a:p>
+        <a:p>
+          <a:pPr marL="114300" lvl="1" indent="-114300" algn="l" defTabSz="533400">
             <a:lnSpc>
               <a:spcPct val="90000"/>
             </a:lnSpc>
@@ -5787,66 +6081,83 @@
             <a:buChar char="•"/>
           </a:pPr>
           <a:r>
-            <a:rPr lang="en-US" sz="1800" kern="1200" dirty="0"/>
-            <a:t>It outputs a lightweight set of vector coordinates (.</a:t>
-          </a:r>
-          <a:r>
-            <a:rPr lang="en-US" sz="1800" kern="1200" dirty="0" err="1"/>
-            <a:t>npy</a:t>
-          </a:r>
-          <a:r>
-            <a:rPr lang="en-US" sz="1800" kern="1200" dirty="0"/>
-            <a:t> files) rather than processing images in real-time.</a:t>
+            <a:rPr lang="en-US" sz="1200" kern="1200"/>
+            <a:t>It outputs a lightweight set of vector coordinates (.npy files) rather than processing images in real-time.</a:t>
           </a:r>
         </a:p>
       </dsp:txBody>
       <dsp:txXfrm>
-        <a:off x="2849345" y="993176"/>
-        <a:ext cx="2497179" cy="3108197"/>
+        <a:off x="2035561" y="736420"/>
+        <a:ext cx="1782979" cy="3315994"/>
       </dsp:txXfrm>
     </dsp:sp>
-    <dsp:sp modelId="{343F43F1-27C9-4ACA-9AA6-BED00EACF0E3}">
+    <dsp:sp modelId="{137B72E4-77CA-4A6D-9CBF-81F774813F2D}">
       <dsp:nvSpPr>
         <dsp:cNvPr id="0" name=""/>
         <dsp:cNvSpPr/>
       </dsp:nvSpPr>
       <dsp:spPr>
         <a:xfrm>
-          <a:off x="5696130" y="91431"/>
-          <a:ext cx="2497179" cy="901745"/>
+          <a:off x="4068158" y="298922"/>
+          <a:ext cx="1782979" cy="437497"/>
         </a:xfrm>
         <a:prstGeom prst="rect">
           <a:avLst/>
         </a:prstGeom>
-        <a:solidFill>
-          <a:schemeClr val="accent2">
-            <a:hueOff val="4681519"/>
-            <a:satOff val="-5839"/>
-            <a:lumOff val="1373"/>
-            <a:alphaOff val="0"/>
-          </a:schemeClr>
-        </a:solidFill>
-        <a:ln w="25400" cap="flat" cmpd="sng" algn="ctr">
+        <a:gradFill rotWithShape="0">
+          <a:gsLst>
+            <a:gs pos="0">
+              <a:schemeClr val="accent2">
+                <a:hueOff val="0"/>
+                <a:satOff val="0"/>
+                <a:lumOff val="0"/>
+                <a:alphaOff val="0"/>
+                <a:tint val="100000"/>
+                <a:shade val="100000"/>
+                <a:satMod val="130000"/>
+              </a:schemeClr>
+            </a:gs>
+            <a:gs pos="100000">
+              <a:schemeClr val="accent2">
+                <a:hueOff val="0"/>
+                <a:satOff val="0"/>
+                <a:lumOff val="0"/>
+                <a:alphaOff val="0"/>
+                <a:tint val="50000"/>
+                <a:shade val="100000"/>
+                <a:satMod val="350000"/>
+              </a:schemeClr>
+            </a:gs>
+          </a:gsLst>
+          <a:lin ang="16200000" scaled="0"/>
+        </a:gradFill>
+        <a:ln w="9525" cap="flat" cmpd="sng" algn="ctr">
           <a:solidFill>
             <a:schemeClr val="accent2">
-              <a:hueOff val="4681519"/>
-              <a:satOff val="-5839"/>
-              <a:lumOff val="1373"/>
+              <a:hueOff val="0"/>
+              <a:satOff val="0"/>
+              <a:lumOff val="0"/>
               <a:alphaOff val="0"/>
             </a:schemeClr>
           </a:solidFill>
           <a:prstDash val="solid"/>
         </a:ln>
-        <a:effectLst/>
+        <a:effectLst>
+          <a:outerShdw blurRad="40000" dist="23000" dir="5400000" rotWithShape="0">
+            <a:srgbClr val="000000">
+              <a:alpha val="35000"/>
+            </a:srgbClr>
+          </a:outerShdw>
+        </a:effectLst>
       </dsp:spPr>
       <dsp:style>
-        <a:lnRef idx="2">
+        <a:lnRef idx="1">
           <a:scrgbClr r="0" g="0" b="0"/>
         </a:lnRef>
-        <a:fillRef idx="1">
+        <a:fillRef idx="3">
           <a:scrgbClr r="0" g="0" b="0"/>
         </a:fillRef>
-        <a:effectRef idx="0">
+        <a:effectRef idx="2">
           <a:scrgbClr r="0" g="0" b="0"/>
         </a:effectRef>
         <a:fontRef idx="minor">
@@ -5854,12 +6165,12 @@
         </a:fontRef>
       </dsp:style>
       <dsp:txBody>
-        <a:bodyPr spcFirstLastPara="0" vert="horz" wrap="square" lIns="128016" tIns="73152" rIns="128016" bIns="73152" numCol="1" spcCol="1270" anchor="ctr" anchorCtr="0">
+        <a:bodyPr spcFirstLastPara="0" vert="horz" wrap="square" lIns="85344" tIns="48768" rIns="85344" bIns="48768" numCol="1" spcCol="1270" anchor="ctr" anchorCtr="0">
           <a:noAutofit/>
         </a:bodyPr>
         <a:lstStyle/>
         <a:p>
-          <a:pPr marL="0" lvl="0" indent="0" algn="ctr" defTabSz="800100">
+          <a:pPr marL="0" lvl="0" indent="0" algn="ctr" defTabSz="533400">
             <a:lnSpc>
               <a:spcPct val="90000"/>
             </a:lnSpc>
@@ -5873,48 +6184,48 @@
             <a:defRPr b="1"/>
           </a:pPr>
           <a:r>
-            <a:rPr lang="en-US" sz="1800" b="1" kern="1200"/>
-            <a:t>Phase B: The Online Visualisation (Frontend)</a:t>
+            <a:rPr lang="en-US" sz="1200" b="1" kern="1200"/>
+            <a:t>The Online Visualisation (Frontend)</a:t>
           </a:r>
-          <a:endParaRPr lang="en-US" sz="1800" kern="1200"/>
+          <a:endParaRPr lang="en-US" sz="1200" kern="1200"/>
         </a:p>
       </dsp:txBody>
       <dsp:txXfrm>
-        <a:off x="5696130" y="91431"/>
-        <a:ext cx="2497179" cy="901745"/>
+        <a:off x="4068158" y="298922"/>
+        <a:ext cx="1782979" cy="437497"/>
       </dsp:txXfrm>
     </dsp:sp>
-    <dsp:sp modelId="{D3EA047B-3025-496C-8CEA-EA993508DAA7}">
+    <dsp:sp modelId="{A2576744-2271-4C63-A64E-09900380D0FD}">
       <dsp:nvSpPr>
         <dsp:cNvPr id="0" name=""/>
         <dsp:cNvSpPr/>
       </dsp:nvSpPr>
       <dsp:spPr>
         <a:xfrm>
-          <a:off x="5696130" y="993176"/>
-          <a:ext cx="2497179" cy="3108197"/>
+          <a:off x="4068158" y="736420"/>
+          <a:ext cx="1782979" cy="3315994"/>
         </a:xfrm>
         <a:prstGeom prst="rect">
           <a:avLst/>
         </a:prstGeom>
         <a:solidFill>
           <a:schemeClr val="accent2">
+            <a:alpha val="90000"/>
             <a:tint val="40000"/>
-            <a:alpha val="90000"/>
-            <a:hueOff val="5025821"/>
-            <a:satOff val="-4378"/>
-            <a:lumOff val="-6"/>
+            <a:hueOff val="0"/>
+            <a:satOff val="0"/>
+            <a:lumOff val="0"/>
             <a:alphaOff val="0"/>
           </a:schemeClr>
         </a:solidFill>
-        <a:ln w="25400" cap="flat" cmpd="sng" algn="ctr">
+        <a:ln w="9525" cap="flat" cmpd="sng" algn="ctr">
           <a:solidFill>
             <a:schemeClr val="accent2">
+              <a:alpha val="90000"/>
               <a:tint val="40000"/>
-              <a:alpha val="90000"/>
-              <a:hueOff val="5025821"/>
-              <a:satOff val="-4378"/>
-              <a:lumOff val="-6"/>
+              <a:hueOff val="0"/>
+              <a:satOff val="0"/>
+              <a:lumOff val="0"/>
               <a:alphaOff val="0"/>
             </a:schemeClr>
           </a:solidFill>
@@ -5923,7 +6234,7 @@
         <a:effectLst/>
       </dsp:spPr>
       <dsp:style>
-        <a:lnRef idx="2">
+        <a:lnRef idx="1">
           <a:scrgbClr r="0" g="0" b="0"/>
         </a:lnRef>
         <a:fillRef idx="1">
@@ -5935,12 +6246,12 @@
         <a:fontRef idx="minor"/>
       </dsp:style>
       <dsp:txBody>
-        <a:bodyPr spcFirstLastPara="0" vert="horz" wrap="square" lIns="96012" tIns="96012" rIns="128016" bIns="144018" numCol="1" spcCol="1270" anchor="t" anchorCtr="0">
+        <a:bodyPr spcFirstLastPara="0" vert="horz" wrap="square" lIns="64008" tIns="64008" rIns="85344" bIns="96012" numCol="1" spcCol="1270" anchor="t" anchorCtr="0">
           <a:noAutofit/>
         </a:bodyPr>
         <a:lstStyle/>
         <a:p>
-          <a:pPr marL="171450" lvl="1" indent="-171450" algn="l" defTabSz="800100">
+          <a:pPr marL="114300" lvl="1" indent="-114300" algn="l" defTabSz="533400">
             <a:lnSpc>
               <a:spcPct val="90000"/>
             </a:lnSpc>
@@ -5953,12 +6264,35 @@
             <a:buChar char="•"/>
           </a:pPr>
           <a:r>
-            <a:rPr lang="en-US" sz="1800" kern="1200"/>
-            <a:t>I am using Dash and Plotly to build the user interface.</a:t>
+            <a:rPr lang="en-US" sz="1200" kern="1200" dirty="0"/>
+            <a:t>I am using Dash and </a:t>
+          </a:r>
+          <a:r>
+            <a:rPr lang="en-US" sz="1200" kern="1200" dirty="0" err="1"/>
+            <a:t>Plotly</a:t>
+          </a:r>
+          <a:r>
+            <a:rPr lang="en-US" sz="1200" kern="1200" dirty="0"/>
+            <a:t> to build the user interface.</a:t>
           </a:r>
         </a:p>
         <a:p>
-          <a:pPr marL="171450" lvl="1" indent="-171450" algn="l" defTabSz="800100">
+          <a:pPr marL="114300" lvl="1" indent="-114300" algn="l" defTabSz="533400">
+            <a:lnSpc>
+              <a:spcPct val="90000"/>
+            </a:lnSpc>
+            <a:spcBef>
+              <a:spcPct val="0"/>
+            </a:spcBef>
+            <a:spcAft>
+              <a:spcPct val="15000"/>
+            </a:spcAft>
+            <a:buChar char="•"/>
+          </a:pPr>
+          <a:endParaRPr lang="en-US" sz="1200" kern="1200" dirty="0"/>
+        </a:p>
+        <a:p>
+          <a:pPr marL="114300" lvl="1" indent="-114300" algn="l" defTabSz="533400">
             <a:lnSpc>
               <a:spcPct val="90000"/>
             </a:lnSpc>
@@ -5971,18 +6305,267 @@
             <a:buChar char="•"/>
           </a:pPr>
           <a:r>
-            <a:rPr lang="en-GB" sz="1800" kern="1200"/>
+            <a:rPr lang="en-GB" sz="1200" kern="1200" dirty="0"/>
             <a:t>A lot of the h</a:t>
           </a:r>
           <a:r>
-            <a:rPr lang="en-US" sz="1800" kern="1200"/>
-            <a:t>eavy lifting is done offline, the dashboard remains responsive and fast, allowing for smooth user interaction on standard hardware.</a:t>
+            <a:rPr lang="en-US" sz="1200" kern="1200" dirty="0" err="1"/>
+            <a:t>eavy</a:t>
+          </a:r>
+          <a:r>
+            <a:rPr lang="en-US" sz="1200" kern="1200" dirty="0"/>
+            <a:t> lifting is done offline, the dashboard remains responsive and fast, allowing for smooth user interaction on standard hardware.</a:t>
           </a:r>
         </a:p>
       </dsp:txBody>
       <dsp:txXfrm>
-        <a:off x="5696130" y="993176"/>
-        <a:ext cx="2497179" cy="3108197"/>
+        <a:off x="4068158" y="736420"/>
+        <a:ext cx="1782979" cy="3315994"/>
+      </dsp:txXfrm>
+    </dsp:sp>
+    <dsp:sp modelId="{08D4987A-5E90-44D1-83A4-8BFF8CA4E80A}">
+      <dsp:nvSpPr>
+        <dsp:cNvPr id="0" name=""/>
+        <dsp:cNvSpPr/>
+      </dsp:nvSpPr>
+      <dsp:spPr>
+        <a:xfrm>
+          <a:off x="6100755" y="298922"/>
+          <a:ext cx="1782979" cy="437497"/>
+        </a:xfrm>
+        <a:prstGeom prst="rect">
+          <a:avLst/>
+        </a:prstGeom>
+        <a:gradFill rotWithShape="0">
+          <a:gsLst>
+            <a:gs pos="0">
+              <a:schemeClr val="accent2">
+                <a:hueOff val="0"/>
+                <a:satOff val="0"/>
+                <a:lumOff val="0"/>
+                <a:alphaOff val="0"/>
+                <a:tint val="100000"/>
+                <a:shade val="100000"/>
+                <a:satMod val="130000"/>
+              </a:schemeClr>
+            </a:gs>
+            <a:gs pos="100000">
+              <a:schemeClr val="accent2">
+                <a:hueOff val="0"/>
+                <a:satOff val="0"/>
+                <a:lumOff val="0"/>
+                <a:alphaOff val="0"/>
+                <a:tint val="50000"/>
+                <a:shade val="100000"/>
+                <a:satMod val="350000"/>
+              </a:schemeClr>
+            </a:gs>
+          </a:gsLst>
+          <a:lin ang="16200000" scaled="0"/>
+        </a:gradFill>
+        <a:ln w="9525" cap="flat" cmpd="sng" algn="ctr">
+          <a:solidFill>
+            <a:schemeClr val="accent2">
+              <a:hueOff val="0"/>
+              <a:satOff val="0"/>
+              <a:lumOff val="0"/>
+              <a:alphaOff val="0"/>
+            </a:schemeClr>
+          </a:solidFill>
+          <a:prstDash val="solid"/>
+        </a:ln>
+        <a:effectLst>
+          <a:outerShdw blurRad="40000" dist="23000" dir="5400000" rotWithShape="0">
+            <a:srgbClr val="000000">
+              <a:alpha val="35000"/>
+            </a:srgbClr>
+          </a:outerShdw>
+        </a:effectLst>
+      </dsp:spPr>
+      <dsp:style>
+        <a:lnRef idx="1">
+          <a:scrgbClr r="0" g="0" b="0"/>
+        </a:lnRef>
+        <a:fillRef idx="3">
+          <a:scrgbClr r="0" g="0" b="0"/>
+        </a:fillRef>
+        <a:effectRef idx="2">
+          <a:scrgbClr r="0" g="0" b="0"/>
+        </a:effectRef>
+        <a:fontRef idx="minor">
+          <a:schemeClr val="lt1"/>
+        </a:fontRef>
+      </dsp:style>
+      <dsp:txBody>
+        <a:bodyPr spcFirstLastPara="0" vert="horz" wrap="square" lIns="85344" tIns="48768" rIns="85344" bIns="48768" numCol="1" spcCol="1270" anchor="ctr" anchorCtr="0">
+          <a:noAutofit/>
+        </a:bodyPr>
+        <a:lstStyle/>
+        <a:p>
+          <a:pPr marL="0" lvl="0" indent="0" algn="ctr" defTabSz="533400">
+            <a:lnSpc>
+              <a:spcPct val="90000"/>
+            </a:lnSpc>
+            <a:spcBef>
+              <a:spcPct val="0"/>
+            </a:spcBef>
+            <a:spcAft>
+              <a:spcPct val="35000"/>
+            </a:spcAft>
+            <a:buNone/>
+          </a:pPr>
+          <a:r>
+            <a:rPr lang="en-GB" sz="1200" b="1" kern="1200" dirty="0"/>
+            <a:t>Unsupervised &amp; Multimodal </a:t>
+          </a:r>
+        </a:p>
+      </dsp:txBody>
+      <dsp:txXfrm>
+        <a:off x="6100755" y="298922"/>
+        <a:ext cx="1782979" cy="437497"/>
+      </dsp:txXfrm>
+    </dsp:sp>
+    <dsp:sp modelId="{35774047-59F3-442C-850D-ECE9FE19BDE8}">
+      <dsp:nvSpPr>
+        <dsp:cNvPr id="0" name=""/>
+        <dsp:cNvSpPr/>
+      </dsp:nvSpPr>
+      <dsp:spPr>
+        <a:xfrm>
+          <a:off x="6100755" y="736420"/>
+          <a:ext cx="1782979" cy="3315994"/>
+        </a:xfrm>
+        <a:prstGeom prst="rect">
+          <a:avLst/>
+        </a:prstGeom>
+        <a:solidFill>
+          <a:schemeClr val="accent2">
+            <a:alpha val="90000"/>
+            <a:tint val="40000"/>
+            <a:hueOff val="0"/>
+            <a:satOff val="0"/>
+            <a:lumOff val="0"/>
+            <a:alphaOff val="0"/>
+          </a:schemeClr>
+        </a:solidFill>
+        <a:ln w="9525" cap="flat" cmpd="sng" algn="ctr">
+          <a:solidFill>
+            <a:schemeClr val="accent2">
+              <a:alpha val="90000"/>
+              <a:tint val="40000"/>
+              <a:hueOff val="0"/>
+              <a:satOff val="0"/>
+              <a:lumOff val="0"/>
+              <a:alphaOff val="0"/>
+            </a:schemeClr>
+          </a:solidFill>
+          <a:prstDash val="solid"/>
+        </a:ln>
+        <a:effectLst/>
+      </dsp:spPr>
+      <dsp:style>
+        <a:lnRef idx="1">
+          <a:scrgbClr r="0" g="0" b="0"/>
+        </a:lnRef>
+        <a:fillRef idx="1">
+          <a:scrgbClr r="0" g="0" b="0"/>
+        </a:fillRef>
+        <a:effectRef idx="0">
+          <a:scrgbClr r="0" g="0" b="0"/>
+        </a:effectRef>
+        <a:fontRef idx="minor"/>
+      </dsp:style>
+      <dsp:txBody>
+        <a:bodyPr spcFirstLastPara="0" vert="horz" wrap="square" lIns="64008" tIns="64008" rIns="85344" bIns="96012" numCol="1" spcCol="1270" anchor="t" anchorCtr="0">
+          <a:noAutofit/>
+        </a:bodyPr>
+        <a:lstStyle/>
+        <a:p>
+          <a:pPr marL="114300" lvl="1" indent="-114300" algn="l" defTabSz="533400">
+            <a:lnSpc>
+              <a:spcPct val="90000"/>
+            </a:lnSpc>
+            <a:spcBef>
+              <a:spcPct val="0"/>
+            </a:spcBef>
+            <a:spcAft>
+              <a:spcPct val="15000"/>
+            </a:spcAft>
+            <a:buChar char="•"/>
+          </a:pPr>
+          <a:endParaRPr lang="en-GB" sz="1200" kern="1200" dirty="0"/>
+        </a:p>
+        <a:p>
+          <a:pPr marL="114300" lvl="1" indent="-114300" algn="l" defTabSz="533400">
+            <a:lnSpc>
+              <a:spcPct val="90000"/>
+            </a:lnSpc>
+            <a:spcBef>
+              <a:spcPct val="0"/>
+            </a:spcBef>
+            <a:spcAft>
+              <a:spcPct val="15000"/>
+            </a:spcAft>
+            <a:buChar char="•"/>
+          </a:pPr>
+          <a:r>
+            <a:rPr lang="en-GB" sz="1200" b="1" kern="1200" dirty="0"/>
+            <a:t>CLIP: </a:t>
+          </a:r>
+          <a:r>
+            <a:rPr lang="en-GB" sz="1200" kern="1200" dirty="0"/>
+            <a:t>- Uses </a:t>
+          </a:r>
+          <a:r>
+            <a:rPr lang="en-GB" sz="1200" kern="1200" dirty="0" err="1"/>
+            <a:t>ViT</a:t>
+          </a:r>
+          <a:r>
+            <a:rPr lang="en-GB" sz="1200" kern="1200" dirty="0"/>
+            <a:t>-B/32 to extract 512-dimensional semantic vectors - Understands image content without pre-trained labels - Example: Distinguishes 'rescue boat' from 'fishing boat’ </a:t>
+          </a:r>
+        </a:p>
+        <a:p>
+          <a:pPr marL="114300" lvl="1" indent="-114300" algn="l" defTabSz="533400">
+            <a:lnSpc>
+              <a:spcPct val="90000"/>
+            </a:lnSpc>
+            <a:spcBef>
+              <a:spcPct val="0"/>
+            </a:spcBef>
+            <a:spcAft>
+              <a:spcPct val="15000"/>
+            </a:spcAft>
+            <a:buChar char="•"/>
+          </a:pPr>
+          <a:endParaRPr lang="en-GB" sz="1200" b="1" kern="1200" dirty="0"/>
+        </a:p>
+        <a:p>
+          <a:pPr marL="114300" lvl="1" indent="-114300" algn="l" defTabSz="533400">
+            <a:lnSpc>
+              <a:spcPct val="90000"/>
+            </a:lnSpc>
+            <a:spcBef>
+              <a:spcPct val="0"/>
+            </a:spcBef>
+            <a:spcAft>
+              <a:spcPct val="15000"/>
+            </a:spcAft>
+            <a:buChar char="•"/>
+          </a:pPr>
+          <a:r>
+            <a:rPr lang="en-GB" sz="1200" b="1" kern="1200" dirty="0"/>
+            <a:t>UMAP: </a:t>
+          </a:r>
+          <a:r>
+            <a:rPr lang="en-GB" sz="1200" kern="1200" dirty="0"/>
+            <a:t>- Projects high-dimensional data into 2D space - Preserves global structure for natural clustering - Shows how disaster events relate to each other</a:t>
+          </a:r>
+        </a:p>
+      </dsp:txBody>
+      <dsp:txXfrm>
+        <a:off x="6100755" y="736420"/>
+        <a:ext cx="1782979" cy="3315994"/>
       </dsp:txXfrm>
     </dsp:sp>
   </dsp:spTree>
@@ -8519,11 +9102,11 @@
 </file>
 
 <file path=ppt/diagrams/quickStyle1.xml><?xml version="1.0" encoding="utf-8"?>
-<dgm:styleDef xmlns:dgm="http://schemas.openxmlformats.org/drawingml/2006/diagram" xmlns:a="http://schemas.openxmlformats.org/drawingml/2006/main" uniqueId="urn:microsoft.com/office/officeart/2005/8/quickstyle/simple1">
+<dgm:styleDef xmlns:dgm="http://schemas.openxmlformats.org/drawingml/2006/diagram" xmlns:a="http://schemas.openxmlformats.org/drawingml/2006/main" uniqueId="urn:microsoft.com/office/officeart/2005/8/quickstyle/simple4">
   <dgm:title val=""/>
   <dgm:desc val=""/>
   <dgm:catLst>
-    <dgm:cat type="simple" pri="10100"/>
+    <dgm:cat type="simple" pri="10400"/>
   </dgm:catLst>
   <dgm:scene3d>
     <a:camera prst="orthographicFront"/>
@@ -8537,13 +9120,13 @@
     <dgm:sp3d/>
     <dgm:txPr/>
     <dgm:style>
-      <a:lnRef idx="2">
+      <a:lnRef idx="0">
         <a:scrgbClr r="0" g="0" b="0"/>
       </a:lnRef>
-      <a:fillRef idx="1">
+      <a:fillRef idx="3">
         <a:scrgbClr r="0" g="0" b="0"/>
       </a:fillRef>
-      <a:effectRef idx="0">
+      <a:effectRef idx="2">
         <a:scrgbClr r="0" g="0" b="0"/>
       </a:effectRef>
       <a:fontRef idx="minor">
@@ -8559,13 +9142,13 @@
     <dgm:sp3d/>
     <dgm:txPr/>
     <dgm:style>
-      <a:lnRef idx="2">
+      <a:lnRef idx="1">
         <a:scrgbClr r="0" g="0" b="0"/>
       </a:lnRef>
-      <a:fillRef idx="1">
+      <a:fillRef idx="3">
         <a:scrgbClr r="0" g="0" b="0"/>
       </a:fillRef>
-      <a:effectRef idx="0">
+      <a:effectRef idx="2">
         <a:scrgbClr r="0" g="0" b="0"/>
       </a:effectRef>
       <a:fontRef idx="minor">
@@ -8581,10 +9164,10 @@
     <dgm:sp3d/>
     <dgm:txPr/>
     <dgm:style>
-      <a:lnRef idx="2">
+      <a:lnRef idx="0">
         <a:scrgbClr r="0" g="0" b="0"/>
       </a:lnRef>
-      <a:fillRef idx="1">
+      <a:fillRef idx="3">
         <a:scrgbClr r="0" g="0" b="0"/>
       </a:fillRef>
       <a:effectRef idx="0">
@@ -8603,13 +9186,13 @@
     <dgm:sp3d/>
     <dgm:txPr/>
     <dgm:style>
-      <a:lnRef idx="2">
+      <a:lnRef idx="1">
         <a:scrgbClr r="0" g="0" b="0"/>
       </a:lnRef>
-      <a:fillRef idx="1">
+      <a:fillRef idx="3">
         <a:scrgbClr r="0" g="0" b="0"/>
       </a:fillRef>
-      <a:effectRef idx="0">
+      <a:effectRef idx="2">
         <a:scrgbClr r="0" g="0" b="0"/>
       </a:effectRef>
       <a:fontRef idx="minor">
@@ -8625,13 +9208,13 @@
     <dgm:sp3d/>
     <dgm:txPr/>
     <dgm:style>
-      <a:lnRef idx="2">
+      <a:lnRef idx="0">
         <a:scrgbClr r="0" g="0" b="0"/>
       </a:lnRef>
-      <a:fillRef idx="1">
+      <a:fillRef idx="3">
         <a:scrgbClr r="0" g="0" b="0"/>
       </a:fillRef>
-      <a:effectRef idx="0">
+      <a:effectRef idx="2">
         <a:scrgbClr r="0" g="0" b="0"/>
       </a:effectRef>
       <a:fontRef idx="minor">
@@ -8647,13 +9230,13 @@
     <dgm:sp3d/>
     <dgm:txPr/>
     <dgm:style>
-      <a:lnRef idx="2">
+      <a:lnRef idx="0">
         <a:scrgbClr r="0" g="0" b="0"/>
       </a:lnRef>
-      <a:fillRef idx="1">
+      <a:fillRef idx="3">
         <a:scrgbClr r="0" g="0" b="0"/>
       </a:fillRef>
-      <a:effectRef idx="0">
+      <a:effectRef idx="2">
         <a:scrgbClr r="0" g="0" b="0"/>
       </a:effectRef>
       <a:fontRef idx="minor">
@@ -8669,13 +9252,13 @@
     <dgm:sp3d/>
     <dgm:txPr/>
     <dgm:style>
-      <a:lnRef idx="2">
+      <a:lnRef idx="0">
         <a:scrgbClr r="0" g="0" b="0"/>
       </a:lnRef>
-      <a:fillRef idx="1">
+      <a:fillRef idx="3">
         <a:scrgbClr r="0" g="0" b="0"/>
       </a:fillRef>
-      <a:effectRef idx="0">
+      <a:effectRef idx="2">
         <a:scrgbClr r="0" g="0" b="0"/>
       </a:effectRef>
       <a:fontRef idx="minor">
@@ -8691,13 +9274,13 @@
     <dgm:sp3d/>
     <dgm:txPr/>
     <dgm:style>
-      <a:lnRef idx="2">
+      <a:lnRef idx="0">
         <a:scrgbClr r="0" g="0" b="0"/>
       </a:lnRef>
-      <a:fillRef idx="1">
+      <a:fillRef idx="3">
         <a:scrgbClr r="0" g="0" b="0"/>
       </a:fillRef>
-      <a:effectRef idx="0">
+      <a:effectRef idx="2">
         <a:scrgbClr r="0" g="0" b="0"/>
       </a:effectRef>
       <a:fontRef idx="minor">
@@ -8713,13 +9296,13 @@
     <dgm:sp3d/>
     <dgm:txPr/>
     <dgm:style>
-      <a:lnRef idx="2">
+      <a:lnRef idx="0">
         <a:scrgbClr r="0" g="0" b="0"/>
       </a:lnRef>
       <a:fillRef idx="1">
         <a:scrgbClr r="0" g="0" b="0"/>
       </a:fillRef>
-      <a:effectRef idx="0">
+      <a:effectRef idx="2">
         <a:scrgbClr r="0" g="0" b="0"/>
       </a:effectRef>
       <a:fontRef idx="minor"/>
@@ -8733,13 +9316,13 @@
     <dgm:sp3d/>
     <dgm:txPr/>
     <dgm:style>
-      <a:lnRef idx="2">
+      <a:lnRef idx="0">
         <a:scrgbClr r="0" g="0" b="0"/>
       </a:lnRef>
       <a:fillRef idx="1">
         <a:scrgbClr r="0" g="0" b="0"/>
       </a:fillRef>
-      <a:effectRef idx="0">
+      <a:effectRef idx="2">
         <a:scrgbClr r="0" g="0" b="0"/>
       </a:effectRef>
       <a:fontRef idx="minor"/>
@@ -8753,13 +9336,13 @@
     <dgm:sp3d/>
     <dgm:txPr/>
     <dgm:style>
-      <a:lnRef idx="2">
+      <a:lnRef idx="0">
         <a:scrgbClr r="0" g="0" b="0"/>
       </a:lnRef>
       <a:fillRef idx="1">
         <a:scrgbClr r="0" g="0" b="0"/>
       </a:fillRef>
-      <a:effectRef idx="0">
+      <a:effectRef idx="2">
         <a:scrgbClr r="0" g="0" b="0"/>
       </a:effectRef>
       <a:fontRef idx="minor"/>
@@ -8776,10 +9359,10 @@
       <a:lnRef idx="0">
         <a:scrgbClr r="0" g="0" b="0"/>
       </a:lnRef>
-      <a:fillRef idx="1">
+      <a:fillRef idx="3">
         <a:scrgbClr r="0" g="0" b="0"/>
       </a:fillRef>
-      <a:effectRef idx="0">
+      <a:effectRef idx="2">
         <a:scrgbClr r="0" g="0" b="0"/>
       </a:effectRef>
       <a:fontRef idx="minor">
@@ -8798,10 +9381,10 @@
       <a:lnRef idx="0">
         <a:scrgbClr r="0" g="0" b="0"/>
       </a:lnRef>
-      <a:fillRef idx="1">
+      <a:fillRef idx="3">
         <a:scrgbClr r="0" g="0" b="0"/>
       </a:fillRef>
-      <a:effectRef idx="0">
+      <a:effectRef idx="2">
         <a:scrgbClr r="0" g="0" b="0"/>
       </a:effectRef>
       <a:fontRef idx="minor">
@@ -8820,10 +9403,10 @@
       <a:lnRef idx="0">
         <a:scrgbClr r="0" g="0" b="0"/>
       </a:lnRef>
-      <a:fillRef idx="1">
+      <a:fillRef idx="3">
         <a:scrgbClr r="0" g="0" b="0"/>
       </a:fillRef>
-      <a:effectRef idx="0">
+      <a:effectRef idx="2">
         <a:scrgbClr r="0" g="0" b="0"/>
       </a:effectRef>
       <a:fontRef idx="minor">
@@ -8865,7 +9448,7 @@
       <a:fillRef idx="1">
         <a:scrgbClr r="0" g="0" b="0"/>
       </a:fillRef>
-      <a:effectRef idx="0">
+      <a:effectRef idx="1">
         <a:scrgbClr r="0" g="0" b="0"/>
       </a:effectRef>
       <a:fontRef idx="minor"/>
@@ -8879,13 +9462,13 @@
     <dgm:sp3d/>
     <dgm:txPr/>
     <dgm:style>
-      <a:lnRef idx="2">
+      <a:lnRef idx="0">
         <a:scrgbClr r="0" g="0" b="0"/>
       </a:lnRef>
-      <a:fillRef idx="1">
+      <a:fillRef idx="3">
         <a:scrgbClr r="0" g="0" b="0"/>
       </a:fillRef>
-      <a:effectRef idx="0">
+      <a:effectRef idx="2">
         <a:scrgbClr r="0" g="0" b="0"/>
       </a:effectRef>
       <a:fontRef idx="minor">
@@ -8901,13 +9484,13 @@
     <dgm:sp3d/>
     <dgm:txPr/>
     <dgm:style>
-      <a:lnRef idx="2">
+      <a:lnRef idx="0">
         <a:scrgbClr r="0" g="0" b="0"/>
       </a:lnRef>
-      <a:fillRef idx="1">
+      <a:fillRef idx="3">
         <a:scrgbClr r="0" g="0" b="0"/>
       </a:fillRef>
-      <a:effectRef idx="0">
+      <a:effectRef idx="2">
         <a:scrgbClr r="0" g="0" b="0"/>
       </a:effectRef>
       <a:fontRef idx="minor">
@@ -8923,13 +9506,13 @@
     <dgm:sp3d/>
     <dgm:txPr/>
     <dgm:style>
-      <a:lnRef idx="2">
+      <a:lnRef idx="0">
         <a:scrgbClr r="0" g="0" b="0"/>
       </a:lnRef>
-      <a:fillRef idx="1">
+      <a:fillRef idx="3">
         <a:scrgbClr r="0" g="0" b="0"/>
       </a:fillRef>
-      <a:effectRef idx="0">
+      <a:effectRef idx="2">
         <a:scrgbClr r="0" g="0" b="0"/>
       </a:effectRef>
       <a:fontRef idx="minor">
@@ -8945,13 +9528,13 @@
     <dgm:sp3d/>
     <dgm:txPr/>
     <dgm:style>
-      <a:lnRef idx="2">
+      <a:lnRef idx="0">
         <a:scrgbClr r="0" g="0" b="0"/>
       </a:lnRef>
-      <a:fillRef idx="1">
+      <a:fillRef idx="3">
         <a:scrgbClr r="0" g="0" b="0"/>
       </a:fillRef>
-      <a:effectRef idx="0">
+      <a:effectRef idx="2">
         <a:scrgbClr r="0" g="0" b="0"/>
       </a:effectRef>
       <a:fontRef idx="minor">
@@ -8967,13 +9550,13 @@
     <dgm:sp3d/>
     <dgm:txPr/>
     <dgm:style>
-      <a:lnRef idx="2">
+      <a:lnRef idx="0">
         <a:scrgbClr r="0" g="0" b="0"/>
       </a:lnRef>
-      <a:fillRef idx="1">
+      <a:fillRef idx="3">
         <a:scrgbClr r="0" g="0" b="0"/>
       </a:fillRef>
-      <a:effectRef idx="0">
+      <a:effectRef idx="2">
         <a:scrgbClr r="0" g="0" b="0"/>
       </a:effectRef>
       <a:fontRef idx="minor">
@@ -8989,13 +9572,13 @@
     <dgm:sp3d/>
     <dgm:txPr/>
     <dgm:style>
-      <a:lnRef idx="2">
+      <a:lnRef idx="0">
         <a:scrgbClr r="0" g="0" b="0"/>
       </a:lnRef>
-      <a:fillRef idx="1">
+      <a:fillRef idx="3">
         <a:scrgbClr r="0" g="0" b="0"/>
       </a:fillRef>
-      <a:effectRef idx="0">
+      <a:effectRef idx="2">
         <a:scrgbClr r="0" g="0" b="0"/>
       </a:effectRef>
       <a:fontRef idx="minor">
@@ -9011,13 +9594,13 @@
     <dgm:sp3d/>
     <dgm:txPr/>
     <dgm:style>
-      <a:lnRef idx="2">
+      <a:lnRef idx="0">
         <a:scrgbClr r="0" g="0" b="0"/>
       </a:lnRef>
-      <a:fillRef idx="1">
+      <a:fillRef idx="3">
         <a:scrgbClr r="0" g="0" b="0"/>
       </a:fillRef>
-      <a:effectRef idx="0">
+      <a:effectRef idx="2">
         <a:scrgbClr r="0" g="0" b="0"/>
       </a:effectRef>
       <a:fontRef idx="minor">
@@ -9033,13 +9616,13 @@
     <dgm:sp3d/>
     <dgm:txPr/>
     <dgm:style>
-      <a:lnRef idx="2">
+      <a:lnRef idx="1">
         <a:scrgbClr r="0" g="0" b="0"/>
       </a:lnRef>
-      <a:fillRef idx="1">
+      <a:fillRef idx="3">
         <a:scrgbClr r="0" g="0" b="0"/>
       </a:fillRef>
-      <a:effectRef idx="0">
+      <a:effectRef idx="2">
         <a:scrgbClr r="0" g="0" b="0"/>
       </a:effectRef>
       <a:fontRef idx="minor">
@@ -9055,13 +9638,13 @@
     <dgm:sp3d/>
     <dgm:txPr/>
     <dgm:style>
-      <a:lnRef idx="2">
+      <a:lnRef idx="1">
         <a:scrgbClr r="0" g="0" b="0"/>
       </a:lnRef>
-      <a:fillRef idx="1">
+      <a:fillRef idx="3">
         <a:scrgbClr r="0" g="0" b="0"/>
       </a:fillRef>
-      <a:effectRef idx="0">
+      <a:effectRef idx="2">
         <a:scrgbClr r="0" g="0" b="0"/>
       </a:effectRef>
       <a:fontRef idx="minor">
@@ -9077,7 +9660,7 @@
     <dgm:sp3d/>
     <dgm:txPr/>
     <dgm:style>
-      <a:lnRef idx="2">
+      <a:lnRef idx="1">
         <a:scrgbClr r="0" g="0" b="0"/>
       </a:lnRef>
       <a:fillRef idx="0">
@@ -9097,7 +9680,7 @@
     <dgm:sp3d/>
     <dgm:txPr/>
     <dgm:style>
-      <a:lnRef idx="2">
+      <a:lnRef idx="1">
         <a:scrgbClr r="0" g="0" b="0"/>
       </a:lnRef>
       <a:fillRef idx="0">
@@ -9117,7 +9700,7 @@
     <dgm:sp3d/>
     <dgm:txPr/>
     <dgm:style>
-      <a:lnRef idx="2">
+      <a:lnRef idx="1">
         <a:scrgbClr r="0" g="0" b="0"/>
       </a:lnRef>
       <a:fillRef idx="0">
@@ -9137,7 +9720,7 @@
     <dgm:sp3d/>
     <dgm:txPr/>
     <dgm:style>
-      <a:lnRef idx="2">
+      <a:lnRef idx="1">
         <a:scrgbClr r="0" g="0" b="0"/>
       </a:lnRef>
       <a:fillRef idx="0">
@@ -9157,7 +9740,7 @@
     <dgm:sp3d/>
     <dgm:txPr/>
     <dgm:style>
-      <a:lnRef idx="2">
+      <a:lnRef idx="1">
         <a:scrgbClr r="0" g="0" b="0"/>
       </a:lnRef>
       <a:fillRef idx="1">
@@ -9177,7 +9760,7 @@
     <dgm:sp3d/>
     <dgm:txPr/>
     <dgm:style>
-      <a:lnRef idx="2">
+      <a:lnRef idx="1">
         <a:scrgbClr r="0" g="0" b="0"/>
       </a:lnRef>
       <a:fillRef idx="1">
@@ -9197,7 +9780,7 @@
     <dgm:sp3d/>
     <dgm:txPr/>
     <dgm:style>
-      <a:lnRef idx="2">
+      <a:lnRef idx="1">
         <a:scrgbClr r="0" g="0" b="0"/>
       </a:lnRef>
       <a:fillRef idx="1">
@@ -9237,7 +9820,7 @@
     <dgm:sp3d/>
     <dgm:txPr/>
     <dgm:style>
-      <a:lnRef idx="2">
+      <a:lnRef idx="1">
         <a:scrgbClr r="0" g="0" b="0"/>
       </a:lnRef>
       <a:fillRef idx="1">
@@ -9257,7 +9840,7 @@
     <dgm:sp3d/>
     <dgm:txPr/>
     <dgm:style>
-      <a:lnRef idx="2">
+      <a:lnRef idx="1">
         <a:scrgbClr r="0" g="0" b="0"/>
       </a:lnRef>
       <a:fillRef idx="1">
@@ -9277,7 +9860,7 @@
     <dgm:sp3d/>
     <dgm:txPr/>
     <dgm:style>
-      <a:lnRef idx="2">
+      <a:lnRef idx="1">
         <a:scrgbClr r="0" g="0" b="0"/>
       </a:lnRef>
       <a:fillRef idx="1">
@@ -9297,7 +9880,7 @@
     <dgm:sp3d/>
     <dgm:txPr/>
     <dgm:style>
-      <a:lnRef idx="2">
+      <a:lnRef idx="1">
         <a:scrgbClr r="0" g="0" b="0"/>
       </a:lnRef>
       <a:fillRef idx="1">
@@ -9317,7 +9900,7 @@
     <dgm:sp3d/>
     <dgm:txPr/>
     <dgm:style>
-      <a:lnRef idx="2">
+      <a:lnRef idx="1">
         <a:scrgbClr r="0" g="0" b="0"/>
       </a:lnRef>
       <a:fillRef idx="1">
@@ -9337,7 +9920,7 @@
     <dgm:sp3d/>
     <dgm:txPr/>
     <dgm:style>
-      <a:lnRef idx="2">
+      <a:lnRef idx="1">
         <a:scrgbClr r="0" g="0" b="0"/>
       </a:lnRef>
       <a:fillRef idx="1">
@@ -9357,7 +9940,7 @@
     <dgm:sp3d/>
     <dgm:txPr/>
     <dgm:style>
-      <a:lnRef idx="2">
+      <a:lnRef idx="1">
         <a:scrgbClr r="0" g="0" b="0"/>
       </a:lnRef>
       <a:fillRef idx="1">
@@ -9377,7 +9960,7 @@
     <dgm:sp3d/>
     <dgm:txPr/>
     <dgm:style>
-      <a:lnRef idx="2">
+      <a:lnRef idx="1">
         <a:scrgbClr r="0" g="0" b="0"/>
       </a:lnRef>
       <a:fillRef idx="1">
@@ -9397,7 +9980,7 @@
     <dgm:sp3d/>
     <dgm:txPr/>
     <dgm:style>
-      <a:lnRef idx="2">
+      <a:lnRef idx="1">
         <a:scrgbClr r="0" g="0" b="0"/>
       </a:lnRef>
       <a:fillRef idx="1">
@@ -9417,7 +10000,7 @@
     <dgm:sp3d/>
     <dgm:txPr/>
     <dgm:style>
-      <a:lnRef idx="2">
+      <a:lnRef idx="1">
         <a:scrgbClr r="0" g="0" b="0"/>
       </a:lnRef>
       <a:fillRef idx="1">
@@ -9437,7 +10020,7 @@
     <dgm:sp3d/>
     <dgm:txPr/>
     <dgm:style>
-      <a:lnRef idx="2">
+      <a:lnRef idx="1">
         <a:scrgbClr r="0" g="0" b="0"/>
       </a:lnRef>
       <a:fillRef idx="1">
@@ -9463,7 +10046,7 @@
       <a:fillRef idx="1">
         <a:scrgbClr r="0" g="0" b="0"/>
       </a:fillRef>
-      <a:effectRef idx="0">
+      <a:effectRef idx="2">
         <a:scrgbClr r="0" g="0" b="0"/>
       </a:effectRef>
       <a:fontRef idx="minor"/>
@@ -9483,7 +10066,7 @@
       <a:fillRef idx="1">
         <a:scrgbClr r="0" g="0" b="0"/>
       </a:fillRef>
-      <a:effectRef idx="0">
+      <a:effectRef idx="2">
         <a:scrgbClr r="0" g="0" b="0"/>
       </a:effectRef>
       <a:fontRef idx="minor"/>
@@ -9517,13 +10100,13 @@
     <dgm:sp3d/>
     <dgm:txPr/>
     <dgm:style>
-      <a:lnRef idx="2">
+      <a:lnRef idx="0">
         <a:scrgbClr r="0" g="0" b="0"/>
       </a:lnRef>
-      <a:fillRef idx="1">
+      <a:fillRef idx="3">
         <a:scrgbClr r="0" g="0" b="0"/>
       </a:fillRef>
-      <a:effectRef idx="0">
+      <a:effectRef idx="2">
         <a:scrgbClr r="0" g="0" b="0"/>
       </a:effectRef>
       <a:fontRef idx="minor"/>
@@ -12652,6 +13235,1087 @@
     </dgm:style>
   </dgm:styleLbl>
 </dgm:styleDef>
+</file>
+
+<file path=ppt/notesMasters/notesMaster1.xml><?xml version="1.0" encoding="utf-8"?>
+<p:notesMaster xmlns:a="http://schemas.openxmlformats.org/drawingml/2006/main" xmlns:r="http://schemas.openxmlformats.org/officeDocument/2006/relationships" xmlns:p="http://schemas.openxmlformats.org/presentationml/2006/main">
+  <p:cSld>
+    <p:bg>
+      <p:bgRef idx="1001">
+        <a:schemeClr val="bg1"/>
+      </p:bgRef>
+    </p:bg>
+    <p:spTree>
+      <p:nvGrpSpPr>
+        <p:cNvPr id="1" name=""/>
+        <p:cNvGrpSpPr/>
+        <p:nvPr/>
+      </p:nvGrpSpPr>
+      <p:grpSpPr>
+        <a:xfrm>
+          <a:off x="0" y="0"/>
+          <a:ext cx="0" cy="0"/>
+          <a:chOff x="0" y="0"/>
+          <a:chExt cx="0" cy="0"/>
+        </a:xfrm>
+      </p:grpSpPr>
+      <p:sp>
+        <p:nvSpPr>
+          <p:cNvPr id="2" name="Header Placeholder 1"/>
+          <p:cNvSpPr>
+            <a:spLocks noGrp="1"/>
+          </p:cNvSpPr>
+          <p:nvPr>
+            <p:ph type="hdr" sz="quarter"/>
+          </p:nvPr>
+        </p:nvSpPr>
+        <p:spPr>
+          <a:xfrm>
+            <a:off x="0" y="0"/>
+            <a:ext cx="2971800" cy="458788"/>
+          </a:xfrm>
+          <a:prstGeom prst="rect">
+            <a:avLst/>
+          </a:prstGeom>
+        </p:spPr>
+        <p:txBody>
+          <a:bodyPr vert="horz" lIns="91440" tIns="45720" rIns="91440" bIns="45720" rtlCol="0"/>
+          <a:lstStyle>
+            <a:lvl1pPr algn="l">
+              <a:defRPr sz="1200"/>
+            </a:lvl1pPr>
+          </a:lstStyle>
+          <a:p>
+            <a:endParaRPr lang="en-GB"/>
+          </a:p>
+        </p:txBody>
+      </p:sp>
+      <p:sp>
+        <p:nvSpPr>
+          <p:cNvPr id="3" name="Date Placeholder 2"/>
+          <p:cNvSpPr>
+            <a:spLocks noGrp="1"/>
+          </p:cNvSpPr>
+          <p:nvPr>
+            <p:ph type="dt" idx="1"/>
+          </p:nvPr>
+        </p:nvSpPr>
+        <p:spPr>
+          <a:xfrm>
+            <a:off x="3884613" y="0"/>
+            <a:ext cx="2971800" cy="458788"/>
+          </a:xfrm>
+          <a:prstGeom prst="rect">
+            <a:avLst/>
+          </a:prstGeom>
+        </p:spPr>
+        <p:txBody>
+          <a:bodyPr vert="horz" lIns="91440" tIns="45720" rIns="91440" bIns="45720" rtlCol="0"/>
+          <a:lstStyle>
+            <a:lvl1pPr algn="r">
+              <a:defRPr sz="1200"/>
+            </a:lvl1pPr>
+          </a:lstStyle>
+          <a:p>
+            <a:fld id="{F1AA5185-6438-47C6-9A48-B50F5812FA1D}" type="datetimeFigureOut">
+              <a:rPr lang="en-GB" smtClean="0"/>
+              <a:t>01/02/2026</a:t>
+            </a:fld>
+            <a:endParaRPr lang="en-GB"/>
+          </a:p>
+        </p:txBody>
+      </p:sp>
+      <p:sp>
+        <p:nvSpPr>
+          <p:cNvPr id="4" name="Slide Image Placeholder 3"/>
+          <p:cNvSpPr>
+            <a:spLocks noGrp="1" noRot="1" noChangeAspect="1"/>
+          </p:cNvSpPr>
+          <p:nvPr>
+            <p:ph type="sldImg" idx="2"/>
+          </p:nvPr>
+        </p:nvSpPr>
+        <p:spPr>
+          <a:xfrm>
+            <a:off x="1371600" y="1143000"/>
+            <a:ext cx="4114800" cy="3086100"/>
+          </a:xfrm>
+          <a:prstGeom prst="rect">
+            <a:avLst/>
+          </a:prstGeom>
+          <a:noFill/>
+          <a:ln w="12700">
+            <a:solidFill>
+              <a:prstClr val="black"/>
+            </a:solidFill>
+          </a:ln>
+        </p:spPr>
+        <p:txBody>
+          <a:bodyPr vert="horz" lIns="91440" tIns="45720" rIns="91440" bIns="45720" rtlCol="0" anchor="ctr"/>
+          <a:lstStyle/>
+          <a:p>
+            <a:endParaRPr lang="en-GB"/>
+          </a:p>
+        </p:txBody>
+      </p:sp>
+      <p:sp>
+        <p:nvSpPr>
+          <p:cNvPr id="5" name="Notes Placeholder 4"/>
+          <p:cNvSpPr>
+            <a:spLocks noGrp="1"/>
+          </p:cNvSpPr>
+          <p:nvPr>
+            <p:ph type="body" sz="quarter" idx="3"/>
+          </p:nvPr>
+        </p:nvSpPr>
+        <p:spPr>
+          <a:xfrm>
+            <a:off x="685800" y="4400550"/>
+            <a:ext cx="5486400" cy="3600450"/>
+          </a:xfrm>
+          <a:prstGeom prst="rect">
+            <a:avLst/>
+          </a:prstGeom>
+        </p:spPr>
+        <p:txBody>
+          <a:bodyPr vert="horz" lIns="91440" tIns="45720" rIns="91440" bIns="45720" rtlCol="0"/>
+          <a:lstStyle/>
+          <a:p>
+            <a:pPr lvl="0"/>
+            <a:r>
+              <a:rPr lang="en-GB"/>
+              <a:t>Click to edit Master text styles</a:t>
+            </a:r>
+          </a:p>
+          <a:p>
+            <a:pPr lvl="1"/>
+            <a:r>
+              <a:rPr lang="en-GB"/>
+              <a:t>Second level</a:t>
+            </a:r>
+          </a:p>
+          <a:p>
+            <a:pPr lvl="2"/>
+            <a:r>
+              <a:rPr lang="en-GB"/>
+              <a:t>Third level</a:t>
+            </a:r>
+          </a:p>
+          <a:p>
+            <a:pPr lvl="3"/>
+            <a:r>
+              <a:rPr lang="en-GB"/>
+              <a:t>Fourth level</a:t>
+            </a:r>
+          </a:p>
+          <a:p>
+            <a:pPr lvl="4"/>
+            <a:r>
+              <a:rPr lang="en-GB"/>
+              <a:t>Fifth level</a:t>
+            </a:r>
+          </a:p>
+        </p:txBody>
+      </p:sp>
+      <p:sp>
+        <p:nvSpPr>
+          <p:cNvPr id="6" name="Footer Placeholder 5"/>
+          <p:cNvSpPr>
+            <a:spLocks noGrp="1"/>
+          </p:cNvSpPr>
+          <p:nvPr>
+            <p:ph type="ftr" sz="quarter" idx="4"/>
+          </p:nvPr>
+        </p:nvSpPr>
+        <p:spPr>
+          <a:xfrm>
+            <a:off x="0" y="8685213"/>
+            <a:ext cx="2971800" cy="458787"/>
+          </a:xfrm>
+          <a:prstGeom prst="rect">
+            <a:avLst/>
+          </a:prstGeom>
+        </p:spPr>
+        <p:txBody>
+          <a:bodyPr vert="horz" lIns="91440" tIns="45720" rIns="91440" bIns="45720" rtlCol="0" anchor="b"/>
+          <a:lstStyle>
+            <a:lvl1pPr algn="l">
+              <a:defRPr sz="1200"/>
+            </a:lvl1pPr>
+          </a:lstStyle>
+          <a:p>
+            <a:endParaRPr lang="en-GB"/>
+          </a:p>
+        </p:txBody>
+      </p:sp>
+      <p:sp>
+        <p:nvSpPr>
+          <p:cNvPr id="7" name="Slide Number Placeholder 6"/>
+          <p:cNvSpPr>
+            <a:spLocks noGrp="1"/>
+          </p:cNvSpPr>
+          <p:nvPr>
+            <p:ph type="sldNum" sz="quarter" idx="5"/>
+          </p:nvPr>
+        </p:nvSpPr>
+        <p:spPr>
+          <a:xfrm>
+            <a:off x="3884613" y="8685213"/>
+            <a:ext cx="2971800" cy="458787"/>
+          </a:xfrm>
+          <a:prstGeom prst="rect">
+            <a:avLst/>
+          </a:prstGeom>
+        </p:spPr>
+        <p:txBody>
+          <a:bodyPr vert="horz" lIns="91440" tIns="45720" rIns="91440" bIns="45720" rtlCol="0" anchor="b"/>
+          <a:lstStyle>
+            <a:lvl1pPr algn="r">
+              <a:defRPr sz="1200"/>
+            </a:lvl1pPr>
+          </a:lstStyle>
+          <a:p>
+            <a:fld id="{A74B5FA1-3D22-4D27-B298-69D18840C262}" type="slidenum">
+              <a:rPr lang="en-GB" smtClean="0"/>
+              <a:t>‹#›</a:t>
+            </a:fld>
+            <a:endParaRPr lang="en-GB"/>
+          </a:p>
+        </p:txBody>
+      </p:sp>
+    </p:spTree>
+    <p:extLst>
+      <p:ext uri="{BB962C8B-B14F-4D97-AF65-F5344CB8AC3E}">
+        <p14:creationId xmlns:p14="http://schemas.microsoft.com/office/powerpoint/2010/main" val="1110778634"/>
+      </p:ext>
+    </p:extLst>
+  </p:cSld>
+  <p:clrMap bg1="lt1" tx1="dk1" bg2="lt2" tx2="dk2" accent1="accent1" accent2="accent2" accent3="accent3" accent4="accent4" accent5="accent5" accent6="accent6" hlink="hlink" folHlink="folHlink"/>
+  <p:notesStyle>
+    <a:lvl1pPr marL="0" algn="l" defTabSz="914400" rtl="0" eaLnBrk="1" latinLnBrk="0" hangingPunct="1">
+      <a:defRPr sz="1200" kern="1200">
+        <a:solidFill>
+          <a:schemeClr val="tx1"/>
+        </a:solidFill>
+        <a:latin typeface="+mn-lt"/>
+        <a:ea typeface="+mn-ea"/>
+        <a:cs typeface="+mn-cs"/>
+      </a:defRPr>
+    </a:lvl1pPr>
+    <a:lvl2pPr marL="457200" algn="l" defTabSz="914400" rtl="0" eaLnBrk="1" latinLnBrk="0" hangingPunct="1">
+      <a:defRPr sz="1200" kern="1200">
+        <a:solidFill>
+          <a:schemeClr val="tx1"/>
+        </a:solidFill>
+        <a:latin typeface="+mn-lt"/>
+        <a:ea typeface="+mn-ea"/>
+        <a:cs typeface="+mn-cs"/>
+      </a:defRPr>
+    </a:lvl2pPr>
+    <a:lvl3pPr marL="914400" algn="l" defTabSz="914400" rtl="0" eaLnBrk="1" latinLnBrk="0" hangingPunct="1">
+      <a:defRPr sz="1200" kern="1200">
+        <a:solidFill>
+          <a:schemeClr val="tx1"/>
+        </a:solidFill>
+        <a:latin typeface="+mn-lt"/>
+        <a:ea typeface="+mn-ea"/>
+        <a:cs typeface="+mn-cs"/>
+      </a:defRPr>
+    </a:lvl3pPr>
+    <a:lvl4pPr marL="1371600" algn="l" defTabSz="914400" rtl="0" eaLnBrk="1" latinLnBrk="0" hangingPunct="1">
+      <a:defRPr sz="1200" kern="1200">
+        <a:solidFill>
+          <a:schemeClr val="tx1"/>
+        </a:solidFill>
+        <a:latin typeface="+mn-lt"/>
+        <a:ea typeface="+mn-ea"/>
+        <a:cs typeface="+mn-cs"/>
+      </a:defRPr>
+    </a:lvl4pPr>
+    <a:lvl5pPr marL="1828800" algn="l" defTabSz="914400" rtl="0" eaLnBrk="1" latinLnBrk="0" hangingPunct="1">
+      <a:defRPr sz="1200" kern="1200">
+        <a:solidFill>
+          <a:schemeClr val="tx1"/>
+        </a:solidFill>
+        <a:latin typeface="+mn-lt"/>
+        <a:ea typeface="+mn-ea"/>
+        <a:cs typeface="+mn-cs"/>
+      </a:defRPr>
+    </a:lvl5pPr>
+    <a:lvl6pPr marL="2286000" algn="l" defTabSz="914400" rtl="0" eaLnBrk="1" latinLnBrk="0" hangingPunct="1">
+      <a:defRPr sz="1200" kern="1200">
+        <a:solidFill>
+          <a:schemeClr val="tx1"/>
+        </a:solidFill>
+        <a:latin typeface="+mn-lt"/>
+        <a:ea typeface="+mn-ea"/>
+        <a:cs typeface="+mn-cs"/>
+      </a:defRPr>
+    </a:lvl6pPr>
+    <a:lvl7pPr marL="2743200" algn="l" defTabSz="914400" rtl="0" eaLnBrk="1" latinLnBrk="0" hangingPunct="1">
+      <a:defRPr sz="1200" kern="1200">
+        <a:solidFill>
+          <a:schemeClr val="tx1"/>
+        </a:solidFill>
+        <a:latin typeface="+mn-lt"/>
+        <a:ea typeface="+mn-ea"/>
+        <a:cs typeface="+mn-cs"/>
+      </a:defRPr>
+    </a:lvl7pPr>
+    <a:lvl8pPr marL="3200400" algn="l" defTabSz="914400" rtl="0" eaLnBrk="1" latinLnBrk="0" hangingPunct="1">
+      <a:defRPr sz="1200" kern="1200">
+        <a:solidFill>
+          <a:schemeClr val="tx1"/>
+        </a:solidFill>
+        <a:latin typeface="+mn-lt"/>
+        <a:ea typeface="+mn-ea"/>
+        <a:cs typeface="+mn-cs"/>
+      </a:defRPr>
+    </a:lvl8pPr>
+    <a:lvl9pPr marL="3657600" algn="l" defTabSz="914400" rtl="0" eaLnBrk="1" latinLnBrk="0" hangingPunct="1">
+      <a:defRPr sz="1200" kern="1200">
+        <a:solidFill>
+          <a:schemeClr val="tx1"/>
+        </a:solidFill>
+        <a:latin typeface="+mn-lt"/>
+        <a:ea typeface="+mn-ea"/>
+        <a:cs typeface="+mn-cs"/>
+      </a:defRPr>
+    </a:lvl9pPr>
+  </p:notesStyle>
+</p:notesMaster>
+</file>
+
+<file path=ppt/notesSlides/notesSlide1.xml><?xml version="1.0" encoding="utf-8"?>
+<p:notes xmlns:a="http://schemas.openxmlformats.org/drawingml/2006/main" xmlns:r="http://schemas.openxmlformats.org/officeDocument/2006/relationships" xmlns:p="http://schemas.openxmlformats.org/presentationml/2006/main">
+  <p:cSld>
+    <p:spTree>
+      <p:nvGrpSpPr>
+        <p:cNvPr id="1" name=""/>
+        <p:cNvGrpSpPr/>
+        <p:nvPr/>
+      </p:nvGrpSpPr>
+      <p:grpSpPr>
+        <a:xfrm>
+          <a:off x="0" y="0"/>
+          <a:ext cx="0" cy="0"/>
+          <a:chOff x="0" y="0"/>
+          <a:chExt cx="0" cy="0"/>
+        </a:xfrm>
+      </p:grpSpPr>
+      <p:sp>
+        <p:nvSpPr>
+          <p:cNvPr id="2" name="Slide Image Placeholder 1"/>
+          <p:cNvSpPr>
+            <a:spLocks noGrp="1" noRot="1" noChangeAspect="1"/>
+          </p:cNvSpPr>
+          <p:nvPr>
+            <p:ph type="sldImg"/>
+          </p:nvPr>
+        </p:nvSpPr>
+        <p:spPr/>
+      </p:sp>
+      <p:sp>
+        <p:nvSpPr>
+          <p:cNvPr id="3" name="Notes Placeholder 2"/>
+          <p:cNvSpPr>
+            <a:spLocks noGrp="1"/>
+          </p:cNvSpPr>
+          <p:nvPr>
+            <p:ph type="body" idx="1"/>
+          </p:nvPr>
+        </p:nvSpPr>
+        <p:spPr/>
+        <p:txBody>
+          <a:bodyPr/>
+          <a:lstStyle/>
+          <a:p>
+            <a:r>
+              <a:rPr lang="en-GB" dirty="0"/>
+              <a:t>Good afternoon, everyone. I'm Rashid, and today I'm presenting my Honours project: an unsupervised exploration tool for disaster imagery using the </a:t>
+            </a:r>
+            <a:r>
+              <a:rPr lang="en-GB" dirty="0" err="1"/>
+              <a:t>CrisisMMD</a:t>
+            </a:r>
+            <a:r>
+              <a:rPr lang="en-GB" dirty="0"/>
+              <a:t> dataset. The main problem I'm tackling is what we call the 'data deluge' in disaster response. When a crisis hits, emergency responders are overwhelmed with images from social media there's simply too much visual information and not enough people to sort through it all. My project aims to help by building an AI system that can automatically understand and organise disaster photos without needing rigid, pre-labelled categories that traditional models depend on.</a:t>
+            </a:r>
+          </a:p>
+        </p:txBody>
+      </p:sp>
+      <p:sp>
+        <p:nvSpPr>
+          <p:cNvPr id="4" name="Slide Number Placeholder 3"/>
+          <p:cNvSpPr>
+            <a:spLocks noGrp="1"/>
+          </p:cNvSpPr>
+          <p:nvPr>
+            <p:ph type="sldNum" sz="quarter" idx="5"/>
+          </p:nvPr>
+        </p:nvSpPr>
+        <p:spPr/>
+        <p:txBody>
+          <a:bodyPr/>
+          <a:lstStyle/>
+          <a:p>
+            <a:fld id="{A74B5FA1-3D22-4D27-B298-69D18840C262}" type="slidenum">
+              <a:rPr lang="en-GB" smtClean="0"/>
+              <a:t>1</a:t>
+            </a:fld>
+            <a:endParaRPr lang="en-GB"/>
+          </a:p>
+        </p:txBody>
+      </p:sp>
+    </p:spTree>
+    <p:extLst>
+      <p:ext uri="{BB962C8B-B14F-4D97-AF65-F5344CB8AC3E}">
+        <p14:creationId xmlns:p14="http://schemas.microsoft.com/office/powerpoint/2010/main" val="3339107816"/>
+      </p:ext>
+    </p:extLst>
+  </p:cSld>
+  <p:clrMapOvr>
+    <a:masterClrMapping/>
+  </p:clrMapOvr>
+</p:notes>
+</file>
+
+<file path=ppt/notesSlides/notesSlide2.xml><?xml version="1.0" encoding="utf-8"?>
+<p:notes xmlns:a="http://schemas.openxmlformats.org/drawingml/2006/main" xmlns:r="http://schemas.openxmlformats.org/officeDocument/2006/relationships" xmlns:p="http://schemas.openxmlformats.org/presentationml/2006/main">
+  <p:cSld>
+    <p:spTree>
+      <p:nvGrpSpPr>
+        <p:cNvPr id="1" name=""/>
+        <p:cNvGrpSpPr/>
+        <p:nvPr/>
+      </p:nvGrpSpPr>
+      <p:grpSpPr>
+        <a:xfrm>
+          <a:off x="0" y="0"/>
+          <a:ext cx="0" cy="0"/>
+          <a:chOff x="0" y="0"/>
+          <a:chExt cx="0" cy="0"/>
+        </a:xfrm>
+      </p:grpSpPr>
+      <p:sp>
+        <p:nvSpPr>
+          <p:cNvPr id="2" name="Slide Image Placeholder 1"/>
+          <p:cNvSpPr>
+            <a:spLocks noGrp="1" noRot="1" noChangeAspect="1"/>
+          </p:cNvSpPr>
+          <p:nvPr>
+            <p:ph type="sldImg"/>
+          </p:nvPr>
+        </p:nvSpPr>
+        <p:spPr/>
+      </p:sp>
+      <p:sp>
+        <p:nvSpPr>
+          <p:cNvPr id="3" name="Notes Placeholder 2"/>
+          <p:cNvSpPr>
+            <a:spLocks noGrp="1"/>
+          </p:cNvSpPr>
+          <p:nvPr>
+            <p:ph type="body" idx="1"/>
+          </p:nvPr>
+        </p:nvSpPr>
+        <p:spPr/>
+        <p:txBody>
+          <a:bodyPr/>
+          <a:lstStyle/>
+          <a:p>
+            <a:r>
+              <a:rPr lang="en-GB" dirty="0"/>
+              <a:t>To give you some background, most current crisis AI systems use supervised learning particularly convolutional neural networks like </a:t>
+            </a:r>
+            <a:r>
+              <a:rPr lang="en-GB" dirty="0" err="1"/>
+              <a:t>ResNet</a:t>
+            </a:r>
+            <a:r>
+              <a:rPr lang="en-GB" dirty="0"/>
+              <a:t>. These models work well, but they have a significant limitation: they need thousands of manually labelled examples to learn what a 'flood' or 'fire' looks like. If a new type of disaster occurs that wasn't in the training data, the model simply can't handle it.</a:t>
+            </a:r>
+          </a:p>
+          <a:p>
+            <a:r>
+              <a:rPr lang="en-GB" dirty="0"/>
+              <a:t>My goal was to move beyond this limitation by building a zero-shot system. Using multimodal learning like the CLIP model my tool can understand the relationship between text and images. This means a responder can search for specific scenarios like 'people waiting for rescue on a roof' and get relevant results immediately, even if the system has never been trained on that exact situation before.</a:t>
+            </a:r>
+          </a:p>
+          <a:p>
+            <a:endParaRPr lang="en-GB" dirty="0"/>
+          </a:p>
+        </p:txBody>
+      </p:sp>
+      <p:sp>
+        <p:nvSpPr>
+          <p:cNvPr id="4" name="Slide Number Placeholder 3"/>
+          <p:cNvSpPr>
+            <a:spLocks noGrp="1"/>
+          </p:cNvSpPr>
+          <p:nvPr>
+            <p:ph type="sldNum" sz="quarter" idx="5"/>
+          </p:nvPr>
+        </p:nvSpPr>
+        <p:spPr/>
+        <p:txBody>
+          <a:bodyPr/>
+          <a:lstStyle/>
+          <a:p>
+            <a:fld id="{A74B5FA1-3D22-4D27-B298-69D18840C262}" type="slidenum">
+              <a:rPr lang="en-GB" smtClean="0"/>
+              <a:t>2</a:t>
+            </a:fld>
+            <a:endParaRPr lang="en-GB"/>
+          </a:p>
+        </p:txBody>
+      </p:sp>
+    </p:spTree>
+    <p:extLst>
+      <p:ext uri="{BB962C8B-B14F-4D97-AF65-F5344CB8AC3E}">
+        <p14:creationId xmlns:p14="http://schemas.microsoft.com/office/powerpoint/2010/main" val="3865615454"/>
+      </p:ext>
+    </p:extLst>
+  </p:cSld>
+  <p:clrMapOvr>
+    <a:masterClrMapping/>
+  </p:clrMapOvr>
+</p:notes>
+</file>
+
+<file path=ppt/notesSlides/notesSlide3.xml><?xml version="1.0" encoding="utf-8"?>
+<p:notes xmlns:a="http://schemas.openxmlformats.org/drawingml/2006/main" xmlns:r="http://schemas.openxmlformats.org/officeDocument/2006/relationships" xmlns:p="http://schemas.openxmlformats.org/presentationml/2006/main">
+  <p:cSld>
+    <p:spTree>
+      <p:nvGrpSpPr>
+        <p:cNvPr id="1" name=""/>
+        <p:cNvGrpSpPr/>
+        <p:nvPr/>
+      </p:nvGrpSpPr>
+      <p:grpSpPr>
+        <a:xfrm>
+          <a:off x="0" y="0"/>
+          <a:ext cx="0" cy="0"/>
+          <a:chOff x="0" y="0"/>
+          <a:chExt cx="0" cy="0"/>
+        </a:xfrm>
+      </p:grpSpPr>
+      <p:sp>
+        <p:nvSpPr>
+          <p:cNvPr id="2" name="Slide Image Placeholder 1"/>
+          <p:cNvSpPr>
+            <a:spLocks noGrp="1" noRot="1" noChangeAspect="1"/>
+          </p:cNvSpPr>
+          <p:nvPr>
+            <p:ph type="sldImg"/>
+          </p:nvPr>
+        </p:nvSpPr>
+        <p:spPr/>
+      </p:sp>
+      <p:sp>
+        <p:nvSpPr>
+          <p:cNvPr id="3" name="Notes Placeholder 2"/>
+          <p:cNvSpPr>
+            <a:spLocks noGrp="1"/>
+          </p:cNvSpPr>
+          <p:nvPr>
+            <p:ph type="body" idx="1"/>
+          </p:nvPr>
+        </p:nvSpPr>
+        <p:spPr/>
+        <p:txBody>
+          <a:bodyPr/>
+          <a:lstStyle/>
+          <a:p>
+            <a:r>
+              <a:rPr lang="en-GB" dirty="0"/>
+              <a:t>Here's the technical architecture I've built. I designed it as an offline-online pipeline to handle the 18,000 image dataset on standard hardware without needing expensive cloud resources.</a:t>
+            </a:r>
+          </a:p>
+          <a:p>
+            <a:endParaRPr lang="en-GB" dirty="0"/>
+          </a:p>
+          <a:p>
+            <a:r>
+              <a:rPr lang="en-GB" dirty="0"/>
+              <a:t>Let me justify the tech stack. For the "brain" of the system, I'm using the CLIP model, specifically the </a:t>
+            </a:r>
+            <a:r>
+              <a:rPr lang="en-GB" dirty="0" err="1"/>
+              <a:t>ViT</a:t>
+            </a:r>
+            <a:r>
+              <a:rPr lang="en-GB" dirty="0"/>
+              <a:t>-B/32 variant. This extracts 512 dimensional semantic vectors from the images, which allows the system to understand content without ever being trained on specific categories. For example, it can distinguish a 'rescue boat' from a 'fishing boat' naturally.</a:t>
+            </a:r>
+          </a:p>
+          <a:p>
+            <a:endParaRPr lang="en-GB" dirty="0"/>
+          </a:p>
+          <a:p>
+            <a:r>
+              <a:rPr lang="en-GB" dirty="0"/>
+              <a:t>For the "map", I use UMAP for dimensionality reduction. High dimensional data is impossible to visualise, so UMAP projects these 512 dimensional vectors into 2D space whilst preserving the global structure. This means we can see how different disaster events cluster together naturally without losing the semantic relationships.</a:t>
+            </a:r>
+          </a:p>
+          <a:p>
+            <a:endParaRPr lang="en-GB" dirty="0"/>
+          </a:p>
+          <a:p>
+            <a:r>
+              <a:rPr lang="en-GB" dirty="0"/>
+              <a:t>The offline phase is where the heavy computation happens. I wrote Python scripts to ingest the raw data, clean it, and pass it through CLIP to generate these vectors. I then use UMAP to compress them down to 2D coordinates for visualisation.</a:t>
+            </a:r>
+          </a:p>
+          <a:p>
+            <a:endParaRPr lang="en-GB" dirty="0"/>
+          </a:p>
+          <a:p>
+            <a:r>
+              <a:rPr lang="en-GB" dirty="0"/>
+              <a:t>The online phase is the frontend interface you'll see in the demo. Because all the complex processing is done beforehand, the Dash application runs incredibly smoothly. It just loads the precomputed coordinates, which means searches happen in under a second without needing a massive GPU running in the background.</a:t>
+            </a:r>
+          </a:p>
+        </p:txBody>
+      </p:sp>
+      <p:sp>
+        <p:nvSpPr>
+          <p:cNvPr id="4" name="Slide Number Placeholder 3"/>
+          <p:cNvSpPr>
+            <a:spLocks noGrp="1"/>
+          </p:cNvSpPr>
+          <p:nvPr>
+            <p:ph type="sldNum" sz="quarter" idx="5"/>
+          </p:nvPr>
+        </p:nvSpPr>
+        <p:spPr/>
+        <p:txBody>
+          <a:bodyPr/>
+          <a:lstStyle/>
+          <a:p>
+            <a:fld id="{A74B5FA1-3D22-4D27-B298-69D18840C262}" type="slidenum">
+              <a:rPr lang="en-GB" smtClean="0"/>
+              <a:t>3</a:t>
+            </a:fld>
+            <a:endParaRPr lang="en-GB"/>
+          </a:p>
+        </p:txBody>
+      </p:sp>
+    </p:spTree>
+    <p:extLst>
+      <p:ext uri="{BB962C8B-B14F-4D97-AF65-F5344CB8AC3E}">
+        <p14:creationId xmlns:p14="http://schemas.microsoft.com/office/powerpoint/2010/main" val="3798300327"/>
+      </p:ext>
+    </p:extLst>
+  </p:cSld>
+  <p:clrMapOvr>
+    <a:masterClrMapping/>
+  </p:clrMapOvr>
+</p:notes>
+</file>
+
+<file path=ppt/notesSlides/notesSlide4.xml><?xml version="1.0" encoding="utf-8"?>
+<p:notes xmlns:a="http://schemas.openxmlformats.org/drawingml/2006/main" xmlns:r="http://schemas.openxmlformats.org/officeDocument/2006/relationships" xmlns:p="http://schemas.openxmlformats.org/presentationml/2006/main">
+  <p:cSld>
+    <p:spTree>
+      <p:nvGrpSpPr>
+        <p:cNvPr id="1" name=""/>
+        <p:cNvGrpSpPr/>
+        <p:nvPr/>
+      </p:nvGrpSpPr>
+      <p:grpSpPr>
+        <a:xfrm>
+          <a:off x="0" y="0"/>
+          <a:ext cx="0" cy="0"/>
+          <a:chOff x="0" y="0"/>
+          <a:chExt cx="0" cy="0"/>
+        </a:xfrm>
+      </p:grpSpPr>
+      <p:sp>
+        <p:nvSpPr>
+          <p:cNvPr id="2" name="Slide Image Placeholder 1"/>
+          <p:cNvSpPr>
+            <a:spLocks noGrp="1" noRot="1" noChangeAspect="1"/>
+          </p:cNvSpPr>
+          <p:nvPr>
+            <p:ph type="sldImg"/>
+          </p:nvPr>
+        </p:nvSpPr>
+        <p:spPr/>
+      </p:sp>
+      <p:sp>
+        <p:nvSpPr>
+          <p:cNvPr id="3" name="Notes Placeholder 2"/>
+          <p:cNvSpPr>
+            <a:spLocks noGrp="1"/>
+          </p:cNvSpPr>
+          <p:nvPr>
+            <p:ph type="body" idx="1"/>
+          </p:nvPr>
+        </p:nvSpPr>
+        <p:spPr/>
+        <p:txBody>
+          <a:bodyPr/>
+          <a:lstStyle/>
+          <a:p>
+            <a:r>
+              <a:rPr lang="en-GB" dirty="0"/>
+              <a:t>I'm pleased to say that the main technical challenges have been addressed. I've successfully built the entire pipeline from scratch.</a:t>
+            </a:r>
+          </a:p>
+          <a:p>
+            <a:r>
+              <a:rPr lang="en-GB" dirty="0"/>
+              <a:t>First, I implemented a robust data ingestion system that handles the messiness of real world social media data, filtering out corrupted files and low quality thumbnails. Second, I've completed the vectorisation phase, including a critical refactor where I switched from sentence transformers to the native Hugging Face library to ensure consistency. Finally, I've built and tested Prototype V4, which confirms that the data quality and metadata are solid enough for the final analysis.</a:t>
+            </a:r>
+          </a:p>
+          <a:p>
+            <a:endParaRPr lang="en-GB" dirty="0"/>
+          </a:p>
+        </p:txBody>
+      </p:sp>
+      <p:sp>
+        <p:nvSpPr>
+          <p:cNvPr id="4" name="Slide Number Placeholder 3"/>
+          <p:cNvSpPr>
+            <a:spLocks noGrp="1"/>
+          </p:cNvSpPr>
+          <p:nvPr>
+            <p:ph type="sldNum" sz="quarter" idx="5"/>
+          </p:nvPr>
+        </p:nvSpPr>
+        <p:spPr/>
+        <p:txBody>
+          <a:bodyPr/>
+          <a:lstStyle/>
+          <a:p>
+            <a:fld id="{A74B5FA1-3D22-4D27-B298-69D18840C262}" type="slidenum">
+              <a:rPr lang="en-GB" smtClean="0"/>
+              <a:t>4</a:t>
+            </a:fld>
+            <a:endParaRPr lang="en-GB"/>
+          </a:p>
+        </p:txBody>
+      </p:sp>
+    </p:spTree>
+    <p:extLst>
+      <p:ext uri="{BB962C8B-B14F-4D97-AF65-F5344CB8AC3E}">
+        <p14:creationId xmlns:p14="http://schemas.microsoft.com/office/powerpoint/2010/main" val="109365927"/>
+      </p:ext>
+    </p:extLst>
+  </p:cSld>
+  <p:clrMapOvr>
+    <a:masterClrMapping/>
+  </p:clrMapOvr>
+</p:notes>
+</file>
+
+<file path=ppt/notesSlides/notesSlide5.xml><?xml version="1.0" encoding="utf-8"?>
+<p:notes xmlns:a="http://schemas.openxmlformats.org/drawingml/2006/main" xmlns:r="http://schemas.openxmlformats.org/officeDocument/2006/relationships" xmlns:p="http://schemas.openxmlformats.org/presentationml/2006/main">
+  <p:cSld>
+    <p:spTree>
+      <p:nvGrpSpPr>
+        <p:cNvPr id="1" name=""/>
+        <p:cNvGrpSpPr/>
+        <p:nvPr/>
+      </p:nvGrpSpPr>
+      <p:grpSpPr>
+        <a:xfrm>
+          <a:off x="0" y="0"/>
+          <a:ext cx="0" cy="0"/>
+          <a:chOff x="0" y="0"/>
+          <a:chExt cx="0" cy="0"/>
+        </a:xfrm>
+      </p:grpSpPr>
+      <p:sp>
+        <p:nvSpPr>
+          <p:cNvPr id="2" name="Slide Image Placeholder 1"/>
+          <p:cNvSpPr>
+            <a:spLocks noGrp="1" noRot="1" noChangeAspect="1"/>
+          </p:cNvSpPr>
+          <p:nvPr>
+            <p:ph type="sldImg"/>
+          </p:nvPr>
+        </p:nvSpPr>
+        <p:spPr/>
+      </p:sp>
+      <p:sp>
+        <p:nvSpPr>
+          <p:cNvPr id="3" name="Notes Placeholder 2"/>
+          <p:cNvSpPr>
+            <a:spLocks noGrp="1"/>
+          </p:cNvSpPr>
+          <p:nvPr>
+            <p:ph type="body" idx="1"/>
+          </p:nvPr>
+        </p:nvSpPr>
+        <p:spPr/>
+        <p:txBody>
+          <a:bodyPr/>
+          <a:lstStyle/>
+          <a:p>
+            <a:r>
+              <a:rPr lang="en-GB" dirty="0"/>
+              <a:t>I've used an Agile methodology throughout. On the left, you can see my Asana board. Rather than just tracking broad goals, I break everything down into specific engineering tasks, things like 'Fix </a:t>
+            </a:r>
+            <a:r>
+              <a:rPr lang="en-GB" dirty="0" err="1"/>
+              <a:t>tokeniser</a:t>
+            </a:r>
+            <a:r>
+              <a:rPr lang="en-GB" dirty="0"/>
+              <a:t> mismatch' or 'Optimise search latency.' This lets me manage technical debt properly and stay organised.</a:t>
+            </a:r>
+          </a:p>
+          <a:p>
+            <a:r>
+              <a:rPr lang="en-GB" dirty="0"/>
+              <a:t>On the right is my timeline. I work in one week sprints, which gives me the flexibility to adapt when needed. For example, when I realised the initial clustering wasn't showing clear patterns, I added a task to build an 'event filter' into the interface rather than sticking rigidly to a plan that wasn't working. This adaptive approach has kept me on track for the final submission deadline.</a:t>
+            </a:r>
+          </a:p>
+          <a:p>
+            <a:endParaRPr lang="en-GB" dirty="0"/>
+          </a:p>
+        </p:txBody>
+      </p:sp>
+      <p:sp>
+        <p:nvSpPr>
+          <p:cNvPr id="4" name="Slide Number Placeholder 3"/>
+          <p:cNvSpPr>
+            <a:spLocks noGrp="1"/>
+          </p:cNvSpPr>
+          <p:nvPr>
+            <p:ph type="sldNum" sz="quarter" idx="5"/>
+          </p:nvPr>
+        </p:nvSpPr>
+        <p:spPr/>
+        <p:txBody>
+          <a:bodyPr/>
+          <a:lstStyle/>
+          <a:p>
+            <a:fld id="{A74B5FA1-3D22-4D27-B298-69D18840C262}" type="slidenum">
+              <a:rPr lang="en-GB" smtClean="0"/>
+              <a:t>5</a:t>
+            </a:fld>
+            <a:endParaRPr lang="en-GB"/>
+          </a:p>
+        </p:txBody>
+      </p:sp>
+    </p:spTree>
+    <p:extLst>
+      <p:ext uri="{BB962C8B-B14F-4D97-AF65-F5344CB8AC3E}">
+        <p14:creationId xmlns:p14="http://schemas.microsoft.com/office/powerpoint/2010/main" val="2345744704"/>
+      </p:ext>
+    </p:extLst>
+  </p:cSld>
+  <p:clrMapOvr>
+    <a:masterClrMapping/>
+  </p:clrMapOvr>
+</p:notes>
+</file>
+
+<file path=ppt/notesSlides/notesSlide6.xml><?xml version="1.0" encoding="utf-8"?>
+<p:notes xmlns:a="http://schemas.openxmlformats.org/drawingml/2006/main" xmlns:r="http://schemas.openxmlformats.org/officeDocument/2006/relationships" xmlns:p="http://schemas.openxmlformats.org/presentationml/2006/main">
+  <p:cSld>
+    <p:spTree>
+      <p:nvGrpSpPr>
+        <p:cNvPr id="1" name=""/>
+        <p:cNvGrpSpPr/>
+        <p:nvPr/>
+      </p:nvGrpSpPr>
+      <p:grpSpPr>
+        <a:xfrm>
+          <a:off x="0" y="0"/>
+          <a:ext cx="0" cy="0"/>
+          <a:chOff x="0" y="0"/>
+          <a:chExt cx="0" cy="0"/>
+        </a:xfrm>
+      </p:grpSpPr>
+      <p:sp>
+        <p:nvSpPr>
+          <p:cNvPr id="2" name="Slide Image Placeholder 1"/>
+          <p:cNvSpPr>
+            <a:spLocks noGrp="1" noRot="1" noChangeAspect="1"/>
+          </p:cNvSpPr>
+          <p:nvPr>
+            <p:ph type="sldImg"/>
+          </p:nvPr>
+        </p:nvSpPr>
+        <p:spPr/>
+      </p:sp>
+      <p:sp>
+        <p:nvSpPr>
+          <p:cNvPr id="3" name="Notes Placeholder 2"/>
+          <p:cNvSpPr>
+            <a:spLocks noGrp="1"/>
+          </p:cNvSpPr>
+          <p:nvPr>
+            <p:ph type="body" idx="1"/>
+          </p:nvPr>
+        </p:nvSpPr>
+        <p:spPr/>
+        <p:txBody>
+          <a:bodyPr/>
+          <a:lstStyle/>
+          <a:p>
+            <a:r>
+              <a:rPr lang="en-GB" dirty="0"/>
+              <a:t>During Phase 2, I ran into two significant challenges. The first was inconsistent metadata. I discovered that about 5% of the </a:t>
+            </a:r>
+            <a:r>
+              <a:rPr lang="en-GB" dirty="0" err="1"/>
+              <a:t>CrisisMMD</a:t>
+            </a:r>
+            <a:r>
+              <a:rPr lang="en-GB" dirty="0"/>
+              <a:t> dataset had missing information or corrupted JSON files. To handle this, I implemented what I call 'defensive ingestion', essentially wrapping my code in error handlers that log problematic files and carry on processing rather than crashing the entire pipeline.</a:t>
+            </a:r>
+          </a:p>
+          <a:p>
+            <a:r>
+              <a:rPr lang="en-GB" dirty="0"/>
+              <a:t>The second challenge was computational load. Processing 18,000 images through a transformer model is resource intensive. I addressed this through batch processing and making my scripts hardware agnostic. They automatically detect if a GPU is available for acceleration but can fall back to CPU if needed.</a:t>
+            </a:r>
+          </a:p>
+          <a:p>
+            <a:endParaRPr lang="en-GB" dirty="0"/>
+          </a:p>
+        </p:txBody>
+      </p:sp>
+      <p:sp>
+        <p:nvSpPr>
+          <p:cNvPr id="4" name="Slide Number Placeholder 3"/>
+          <p:cNvSpPr>
+            <a:spLocks noGrp="1"/>
+          </p:cNvSpPr>
+          <p:nvPr>
+            <p:ph type="sldNum" sz="quarter" idx="5"/>
+          </p:nvPr>
+        </p:nvSpPr>
+        <p:spPr/>
+        <p:txBody>
+          <a:bodyPr/>
+          <a:lstStyle/>
+          <a:p>
+            <a:fld id="{A74B5FA1-3D22-4D27-B298-69D18840C262}" type="slidenum">
+              <a:rPr lang="en-GB" smtClean="0"/>
+              <a:t>6</a:t>
+            </a:fld>
+            <a:endParaRPr lang="en-GB"/>
+          </a:p>
+        </p:txBody>
+      </p:sp>
+    </p:spTree>
+    <p:extLst>
+      <p:ext uri="{BB962C8B-B14F-4D97-AF65-F5344CB8AC3E}">
+        <p14:creationId xmlns:p14="http://schemas.microsoft.com/office/powerpoint/2010/main" val="2902899955"/>
+      </p:ext>
+    </p:extLst>
+  </p:cSld>
+  <p:clrMapOvr>
+    <a:masterClrMapping/>
+  </p:clrMapOvr>
+</p:notes>
+</file>
+
+<file path=ppt/notesSlides/notesSlide7.xml><?xml version="1.0" encoding="utf-8"?>
+<p:notes xmlns:a="http://schemas.openxmlformats.org/drawingml/2006/main" xmlns:r="http://schemas.openxmlformats.org/officeDocument/2006/relationships" xmlns:p="http://schemas.openxmlformats.org/presentationml/2006/main">
+  <p:cSld>
+    <p:spTree>
+      <p:nvGrpSpPr>
+        <p:cNvPr id="1" name=""/>
+        <p:cNvGrpSpPr/>
+        <p:nvPr/>
+      </p:nvGrpSpPr>
+      <p:grpSpPr>
+        <a:xfrm>
+          <a:off x="0" y="0"/>
+          <a:ext cx="0" cy="0"/>
+          <a:chOff x="0" y="0"/>
+          <a:chExt cx="0" cy="0"/>
+        </a:xfrm>
+      </p:grpSpPr>
+      <p:sp>
+        <p:nvSpPr>
+          <p:cNvPr id="2" name="Slide Image Placeholder 1"/>
+          <p:cNvSpPr>
+            <a:spLocks noGrp="1" noRot="1" noChangeAspect="1"/>
+          </p:cNvSpPr>
+          <p:nvPr>
+            <p:ph type="sldImg"/>
+          </p:nvPr>
+        </p:nvSpPr>
+        <p:spPr/>
+      </p:sp>
+      <p:sp>
+        <p:nvSpPr>
+          <p:cNvPr id="3" name="Notes Placeholder 2"/>
+          <p:cNvSpPr>
+            <a:spLocks noGrp="1"/>
+          </p:cNvSpPr>
+          <p:nvPr>
+            <p:ph type="body" idx="1"/>
+          </p:nvPr>
+        </p:nvSpPr>
+        <p:spPr/>
+        <p:txBody>
+          <a:bodyPr/>
+          <a:lstStyle/>
+          <a:p>
+            <a:r>
+              <a:rPr lang="en-GB" dirty="0"/>
+              <a:t>I'm currently midway through Phase </a:t>
+            </a:r>
+            <a:r>
+              <a:rPr lang="en-GB"/>
+              <a:t>3. At </a:t>
+            </a:r>
+            <a:r>
+              <a:rPr lang="en-GB" dirty="0"/>
+              <a:t>the moment, I'm finalising the full vectorisation run for all 17,463 images. Next month, my focus shifts to integration, wiring up the cosine similarity logic into the frontend to enable live semantic search. Finally, in March, I'll conduct the quantitative evaluation, calculating metrics like Silhouette Scores to scientifically measure the quality of the clustering before writing up the final dissertation.</a:t>
+            </a:r>
+          </a:p>
+          <a:p>
+            <a:endParaRPr lang="en-GB" dirty="0"/>
+          </a:p>
+        </p:txBody>
+      </p:sp>
+      <p:sp>
+        <p:nvSpPr>
+          <p:cNvPr id="4" name="Slide Number Placeholder 3"/>
+          <p:cNvSpPr>
+            <a:spLocks noGrp="1"/>
+          </p:cNvSpPr>
+          <p:nvPr>
+            <p:ph type="sldNum" sz="quarter" idx="5"/>
+          </p:nvPr>
+        </p:nvSpPr>
+        <p:spPr/>
+        <p:txBody>
+          <a:bodyPr/>
+          <a:lstStyle/>
+          <a:p>
+            <a:fld id="{A74B5FA1-3D22-4D27-B298-69D18840C262}" type="slidenum">
+              <a:rPr lang="en-GB" smtClean="0"/>
+              <a:t>7</a:t>
+            </a:fld>
+            <a:endParaRPr lang="en-GB"/>
+          </a:p>
+        </p:txBody>
+      </p:sp>
+    </p:spTree>
+    <p:extLst>
+      <p:ext uri="{BB962C8B-B14F-4D97-AF65-F5344CB8AC3E}">
+        <p14:creationId xmlns:p14="http://schemas.microsoft.com/office/powerpoint/2010/main" val="2974155780"/>
+      </p:ext>
+    </p:extLst>
+  </p:cSld>
+  <p:clrMapOvr>
+    <a:masterClrMapping/>
+  </p:clrMapOvr>
+</p:notes>
 </file>
 
 <file path=ppt/slideLayouts/slideLayout1.xml><?xml version="1.0" encoding="utf-8"?>
@@ -12833,7 +14497,7 @@
           <a:p>
             <a:fld id="{5BCAD085-E8A6-8845-BD4E-CB4CCA059FC4}" type="datetimeFigureOut">
               <a:rPr lang="en-US" smtClean="0"/>
-              <a:t>1/28/2026</a:t>
+              <a:t>2/1/2026</a:t>
             </a:fld>
             <a:endParaRPr lang="en-US"/>
           </a:p>
@@ -13001,7 +14665,7 @@
           <a:p>
             <a:fld id="{5BCAD085-E8A6-8845-BD4E-CB4CCA059FC4}" type="datetimeFigureOut">
               <a:rPr lang="en-US" smtClean="0"/>
-              <a:t>1/28/2026</a:t>
+              <a:t>2/1/2026</a:t>
             </a:fld>
             <a:endParaRPr lang="en-US"/>
           </a:p>
@@ -13179,7 +14843,7 @@
           <a:p>
             <a:fld id="{5BCAD085-E8A6-8845-BD4E-CB4CCA059FC4}" type="datetimeFigureOut">
               <a:rPr lang="en-US" smtClean="0"/>
-              <a:t>1/28/2026</a:t>
+              <a:t>2/1/2026</a:t>
             </a:fld>
             <a:endParaRPr lang="en-US"/>
           </a:p>
@@ -13347,7 +15011,7 @@
           <a:p>
             <a:fld id="{5BCAD085-E8A6-8845-BD4E-CB4CCA059FC4}" type="datetimeFigureOut">
               <a:rPr lang="en-US" smtClean="0"/>
-              <a:t>1/28/2026</a:t>
+              <a:t>2/1/2026</a:t>
             </a:fld>
             <a:endParaRPr lang="en-US"/>
           </a:p>
@@ -13592,7 +15256,7 @@
           <a:p>
             <a:fld id="{5BCAD085-E8A6-8845-BD4E-CB4CCA059FC4}" type="datetimeFigureOut">
               <a:rPr lang="en-US" smtClean="0"/>
-              <a:t>1/28/2026</a:t>
+              <a:t>2/1/2026</a:t>
             </a:fld>
             <a:endParaRPr lang="en-US"/>
           </a:p>
@@ -13877,7 +15541,7 @@
           <a:p>
             <a:fld id="{5BCAD085-E8A6-8845-BD4E-CB4CCA059FC4}" type="datetimeFigureOut">
               <a:rPr lang="en-US" smtClean="0"/>
-              <a:t>1/28/2026</a:t>
+              <a:t>2/1/2026</a:t>
             </a:fld>
             <a:endParaRPr lang="en-US"/>
           </a:p>
@@ -14296,7 +15960,7 @@
           <a:p>
             <a:fld id="{5BCAD085-E8A6-8845-BD4E-CB4CCA059FC4}" type="datetimeFigureOut">
               <a:rPr lang="en-US" smtClean="0"/>
-              <a:t>1/28/2026</a:t>
+              <a:t>2/1/2026</a:t>
             </a:fld>
             <a:endParaRPr lang="en-US"/>
           </a:p>
@@ -14413,7 +16077,7 @@
           <a:p>
             <a:fld id="{5BCAD085-E8A6-8845-BD4E-CB4CCA059FC4}" type="datetimeFigureOut">
               <a:rPr lang="en-US" smtClean="0"/>
-              <a:t>1/28/2026</a:t>
+              <a:t>2/1/2026</a:t>
             </a:fld>
             <a:endParaRPr lang="en-US"/>
           </a:p>
@@ -14508,7 +16172,7 @@
           <a:p>
             <a:fld id="{5BCAD085-E8A6-8845-BD4E-CB4CCA059FC4}" type="datetimeFigureOut">
               <a:rPr lang="en-US" smtClean="0"/>
-              <a:t>1/28/2026</a:t>
+              <a:t>2/1/2026</a:t>
             </a:fld>
             <a:endParaRPr lang="en-US"/>
           </a:p>
@@ -14783,7 +16447,7 @@
           <a:p>
             <a:fld id="{5BCAD085-E8A6-8845-BD4E-CB4CCA059FC4}" type="datetimeFigureOut">
               <a:rPr lang="en-US" smtClean="0"/>
-              <a:t>1/28/2026</a:t>
+              <a:t>2/1/2026</a:t>
             </a:fld>
             <a:endParaRPr lang="en-US"/>
           </a:p>
@@ -15035,7 +16699,7 @@
           <a:p>
             <a:fld id="{5BCAD085-E8A6-8845-BD4E-CB4CCA059FC4}" type="datetimeFigureOut">
               <a:rPr lang="en-US" smtClean="0"/>
-              <a:t>1/28/2026</a:t>
+              <a:t>2/1/2026</a:t>
             </a:fld>
             <a:endParaRPr lang="en-US"/>
           </a:p>
@@ -15246,7 +16910,7 @@
           <a:p>
             <a:fld id="{5BCAD085-E8A6-8845-BD4E-CB4CCA059FC4}" type="datetimeFigureOut">
               <a:rPr lang="en-US" smtClean="0"/>
-              <a:t>1/28/2026</a:t>
+              <a:t>2/1/2026</a:t>
             </a:fld>
             <a:endParaRPr lang="en-US"/>
           </a:p>
@@ -19012,13 +20676,14 @@
               </a:defRPr>
             </a:pPr>
             <a:r>
-              <a:rPr lang="en-GB" sz="3500" dirty="0">
-                <a:solidFill>
-                  <a:schemeClr val="tx2"/>
-                </a:solidFill>
-              </a:rPr>
-              <a:t>Visualising Natural Disaster Image Embeddings</a:t>
+              <a:rPr lang="en-GB" sz="3600" b="1" dirty="0"/>
+              <a:t>Unsupervised Multimodal Exploration of Crisis Imagery</a:t>
             </a:r>
+            <a:endParaRPr lang="en-GB" sz="2800" dirty="0">
+              <a:solidFill>
+                <a:schemeClr val="tx2"/>
+              </a:solidFill>
+            </a:endParaRPr>
           </a:p>
         </p:txBody>
       </p:sp>
@@ -19040,7 +20705,7 @@
         </p:spPr>
         <p:txBody>
           <a:bodyPr anchor="ctr">
-            <a:normAutofit/>
+            <a:normAutofit fontScale="92500"/>
           </a:bodyPr>
           <a:lstStyle/>
           <a:p>
@@ -19098,6 +20763,49 @@
                 </a:solidFill>
               </a:rPr>
               <a:t>Rashid Ahmed Pandor</a:t>
+            </a:r>
+          </a:p>
+          <a:p>
+            <a:pPr algn="l">
+              <a:lnSpc>
+                <a:spcPct val="90000"/>
+              </a:lnSpc>
+            </a:pPr>
+            <a:endParaRPr lang="en-GB" sz="2700" dirty="0">
+              <a:solidFill>
+                <a:schemeClr val="tx2"/>
+              </a:solidFill>
+            </a:endParaRPr>
+          </a:p>
+          <a:p>
+            <a:pPr algn="l">
+              <a:lnSpc>
+                <a:spcPct val="90000"/>
+              </a:lnSpc>
+            </a:pPr>
+            <a:r>
+              <a:rPr lang="en-GB" sz="2700" dirty="0">
+                <a:solidFill>
+                  <a:schemeClr val="tx2"/>
+                </a:solidFill>
+              </a:rPr>
+              <a:t>Supervised by </a:t>
+            </a:r>
+            <a:r>
+              <a:rPr lang="en-GB" sz="2700" dirty="0" err="1">
+                <a:solidFill>
+                  <a:schemeClr val="tx2"/>
+                </a:solidFill>
+              </a:rPr>
+              <a:t>XinHui</a:t>
+            </a:r>
+            <a:r>
+              <a:rPr lang="en-GB" sz="2700" dirty="0">
+                <a:solidFill>
+                  <a:schemeClr val="tx2"/>
+                </a:solidFill>
+              </a:rPr>
+              <a:t> Ma</a:t>
             </a:r>
           </a:p>
         </p:txBody>
@@ -19334,6 +21042,70 @@
                                           <p:spTgt spid="3">
                                             <p:txEl>
                                               <p:pRg st="3" end="3"/>
+                                            </p:txEl>
+                                          </p:spTgt>
+                                        </p:tgtEl>
+                                      </p:cBhvr>
+                                    </p:animEffect>
+                                  </p:childTnLst>
+                                </p:cTn>
+                              </p:par>
+                            </p:childTnLst>
+                          </p:cTn>
+                        </p:par>
+                      </p:childTnLst>
+                    </p:cTn>
+                  </p:par>
+                  <p:par>
+                    <p:cTn id="21" fill="hold">
+                      <p:stCondLst>
+                        <p:cond delay="indefinite"/>
+                      </p:stCondLst>
+                      <p:childTnLst>
+                        <p:par>
+                          <p:cTn id="22" fill="hold">
+                            <p:stCondLst>
+                              <p:cond delay="0"/>
+                            </p:stCondLst>
+                            <p:childTnLst>
+                              <p:par>
+                                <p:cTn id="23" presetID="10" presetClass="entr" presetSubtype="0" fill="hold" grpId="0" nodeType="clickEffect">
+                                  <p:stCondLst>
+                                    <p:cond delay="1000"/>
+                                  </p:stCondLst>
+                                  <p:iterate type="wd">
+                                    <p:tmPct val="15000"/>
+                                  </p:iterate>
+                                  <p:childTnLst>
+                                    <p:set>
+                                      <p:cBhvr>
+                                        <p:cTn id="24" dur="1" fill="hold">
+                                          <p:stCondLst>
+                                            <p:cond delay="0"/>
+                                          </p:stCondLst>
+                                        </p:cTn>
+                                        <p:tgtEl>
+                                          <p:spTgt spid="3">
+                                            <p:txEl>
+                                              <p:pRg st="5" end="5"/>
+                                            </p:txEl>
+                                          </p:spTgt>
+                                        </p:tgtEl>
+                                        <p:attrNameLst>
+                                          <p:attrName>style.visibility</p:attrName>
+                                        </p:attrNameLst>
+                                      </p:cBhvr>
+                                      <p:to>
+                                        <p:strVal val="visible"/>
+                                      </p:to>
+                                    </p:set>
+                                    <p:animEffect transition="in" filter="fade">
+                                      <p:cBhvr>
+                                        <p:cTn id="25" dur="1000"/>
+                                        <p:tgtEl>
+                                          <p:spTgt spid="3">
+                                            <p:txEl>
+                                              <p:pRg st="5" end="5"/>
                                             </p:txEl>
                                           </p:spTgt>
                                         </p:tgtEl>
@@ -20008,7 +21780,7 @@
         </p:spPr>
         <p:txBody>
           <a:bodyPr>
-            <a:normAutofit/>
+            <a:normAutofit fontScale="92500" lnSpcReduction="10000"/>
           </a:bodyPr>
           <a:lstStyle/>
           <a:p>
@@ -20032,8 +21804,8 @@
               </a:defRPr>
             </a:pPr>
             <a:r>
-              <a:rPr lang="en-GB" sz="1300" dirty="0"/>
-              <a:t>The Problem: The Data Deluge</a:t>
+              <a:rPr lang="en-GB" sz="1400" dirty="0"/>
+              <a:t>The Problem</a:t>
             </a:r>
           </a:p>
           <a:p>
@@ -20049,8 +21821,8 @@
               </a:defRPr>
             </a:pPr>
             <a:r>
-              <a:rPr lang="en-GB" sz="1300" dirty="0"/>
-              <a:t>When a disaster happens, social media is flooded with millions of images. Even though the data is valuable, it makes an information overload that manual teams cannot process in time.</a:t>
+              <a:rPr lang="en-GB" sz="1400" dirty="0"/>
+              <a:t>In the immediate aftermath of a disaster, social media platforms are flooded with millions of images. While this data offers vital situational awareness, it creates a bottleneck: there is simply too much visual noise for human teams to filter manually.</a:t>
             </a:r>
           </a:p>
           <a:p>
@@ -20066,24 +21838,25 @@
               </a:defRPr>
             </a:pPr>
             <a:r>
-              <a:rPr lang="en-GB" sz="1300" dirty="0"/>
-              <a:t>Current AI solutions (for example CNNs) aren’t suitable because they rely on supervised labels. They fail when they see a new type of disaster they haven't been trained on.</a:t>
+              <a:rPr lang="en-GB" sz="1400" dirty="0"/>
+              <a:t>Furthermore, traditional AI (like Standard CNNs) is too rigid for this environment. It relies on pre-trained labels (example “Fire”, “Flood”) meaning it fails completely when it encounters a new unseen type of crisis. We need a system that can adapt.</a:t>
             </a:r>
           </a:p>
           <a:p>
-            <a:pPr>
+            <a:pPr marL="457200" lvl="1" indent="0">
               <a:lnSpc>
                 <a:spcPct val="90000"/>
               </a:lnSpc>
               <a:spcAft>
                 <a:spcPts val="1400"/>
               </a:spcAft>
-              <a:defRPr sz="2000" b="1">
+              <a:buNone/>
+              <a:defRPr sz="2000">
                 <a:latin typeface="Arial"/>
               </a:defRPr>
             </a:pPr>
             <a:r>
-              <a:rPr lang="en-GB" sz="1300" dirty="0"/>
+              <a:rPr lang="en-GB" sz="1400" b="1" dirty="0"/>
               <a:t>My Solution to use unsupervised Multimodal Learning</a:t>
             </a:r>
           </a:p>
@@ -20100,7 +21873,7 @@
               </a:defRPr>
             </a:pPr>
             <a:r>
-              <a:rPr lang="en-GB" sz="1300" dirty="0"/>
+              <a:rPr lang="en-GB" sz="1400" dirty="0"/>
               <a:t>I am building a tool that uses CLIP which is open-source to understand the semantic meaning of these images without needing labels.</a:t>
             </a:r>
           </a:p>
@@ -20117,7 +21890,7 @@
               </a:defRPr>
             </a:pPr>
             <a:r>
-              <a:rPr lang="en-GB" sz="1300" dirty="0"/>
+              <a:rPr lang="en-GB" sz="1400" dirty="0"/>
               <a:t>By using UMAP for dimensionality reduction, I can visualise the “global structure” of the disaster data which helps responders see patterns instantly.</a:t>
             </a:r>
           </a:p>
@@ -20134,7 +21907,7 @@
               </a:defRPr>
             </a:pPr>
             <a:r>
-              <a:rPr lang="en-GB" sz="1300" dirty="0"/>
+              <a:rPr lang="en-GB" sz="1400" dirty="0"/>
               <a:t>Core Objective</a:t>
             </a:r>
           </a:p>
@@ -20151,8 +21924,8 @@
               </a:defRPr>
             </a:pPr>
             <a:r>
-              <a:rPr lang="en-GB" sz="1300" dirty="0"/>
-              <a:t>I’ll create a Zero-Shot search engine where a user can type “people on a roof” and find relevant images immediately without needing  prior model training.</a:t>
+              <a:rPr lang="en-GB" sz="1400" dirty="0"/>
+              <a:t>I’ll create a Zero-Shot search engine where a user can type “people on a roof” and find relevant images immediately without needing prior model training.</a:t>
             </a:r>
           </a:p>
         </p:txBody>
@@ -20190,12 +21963,43 @@
           <a:chExt cx="0" cy="0"/>
         </a:xfrm>
       </p:grpSpPr>
-      <p:sp useBgFill="1">
-        <p:nvSpPr>
-          <p:cNvPr id="23" name="Rectangle 22">
+      <p:pic>
+        <p:nvPicPr>
+          <p:cNvPr id="31" name="Picture 30">
             <a:extLst>
               <a:ext uri="{FF2B5EF4-FFF2-40B4-BE49-F238E27FC236}">
-                <a16:creationId xmlns:a16="http://schemas.microsoft.com/office/drawing/2014/main" id="{BACC6370-2D7E-4714-9D71-7542949D7D5D}"/>
+                <a16:creationId xmlns:a16="http://schemas.microsoft.com/office/drawing/2014/main" id="{8A6058EC-65E1-75CF-8B5C-8199F97BDE7F}"/>
+              </a:ext>
+            </a:extLst>
+          </p:cNvPr>
+          <p:cNvPicPr>
+            <a:picLocks noChangeAspect="1"/>
+          </p:cNvPicPr>
+          <p:nvPr/>
+        </p:nvPicPr>
+        <p:blipFill>
+          <a:blip r:embed="rId3"/>
+          <a:srcRect r="10999" b="-1"/>
+          <a:stretch>
+            <a:fillRect/>
+          </a:stretch>
+        </p:blipFill>
+        <p:spPr>
+          <a:xfrm>
+            <a:off x="20" y="10"/>
+            <a:ext cx="9143980" cy="6857990"/>
+          </a:xfrm>
+          <a:prstGeom prst="rect">
+            <a:avLst/>
+          </a:prstGeom>
+        </p:spPr>
+      </p:pic>
+      <p:sp>
+        <p:nvSpPr>
+          <p:cNvPr id="35" name="Rectangle 34">
+            <a:extLst>
+              <a:ext uri="{FF2B5EF4-FFF2-40B4-BE49-F238E27FC236}">
+                <a16:creationId xmlns:a16="http://schemas.microsoft.com/office/drawing/2014/main" id="{257363FD-7E77-4145-9483-331A807ADF0E}"/>
               </a:ext>
               <a:ext uri="{C183D7F6-B498-43B3-948B-1728B52AA6E4}">
                 <adec:decorative xmlns:adec="http://schemas.microsoft.com/office/drawing/2017/decorative" val="1"/>
@@ -20216,101 +22020,26 @@
         <p:spPr>
           <a:xfrm>
             <a:off x="0" y="0"/>
-            <a:ext cx="9144000" cy="6858000"/>
+            <a:ext cx="9147601" cy="6858000"/>
           </a:xfrm>
           <a:prstGeom prst="rect">
             <a:avLst/>
           </a:prstGeom>
-          <a:ln w="12700" cap="flat" cmpd="sng" algn="ctr">
-            <a:noFill/>
-            <a:prstDash val="solid"/>
-            <a:miter lim="800000"/>
-          </a:ln>
-          <a:effectLst/>
-          <a:extLst>
-            <a:ext uri="{91240B29-F687-4F45-9708-019B960494DF}">
-              <a14:hiddenLine xmlns:a14="http://schemas.microsoft.com/office/drawing/2010/main" w="12700" cap="flat" cmpd="sng" algn="ctr">
-                <a:solidFill>
-                  <a:schemeClr val="accent1">
-                    <a:shade val="50000"/>
-                  </a:schemeClr>
-                </a:solidFill>
-                <a:prstDash val="solid"/>
-                <a:miter lim="800000"/>
-              </a14:hiddenLine>
-            </a:ext>
-          </a:extLst>
-        </p:spPr>
-        <p:style>
-          <a:lnRef idx="2">
-            <a:schemeClr val="accent1">
-              <a:shade val="50000"/>
-            </a:schemeClr>
-          </a:lnRef>
-          <a:fillRef idx="1">
-            <a:schemeClr val="accent1"/>
-          </a:fillRef>
-          <a:effectRef idx="0">
-            <a:schemeClr val="accent1"/>
-          </a:effectRef>
-          <a:fontRef idx="minor">
-            <a:schemeClr val="lt1"/>
-          </a:fontRef>
-        </p:style>
-        <p:txBody>
-          <a:bodyPr rtlCol="0" anchor="ctr"/>
-          <a:lstStyle/>
-          <a:p>
-            <a:pPr algn="ctr"/>
-            <a:endParaRPr lang="en-US"/>
-          </a:p>
-        </p:txBody>
-      </p:sp>
-      <p:sp>
-        <p:nvSpPr>
-          <p:cNvPr id="25" name="Rectangle 24">
-            <a:extLst>
-              <a:ext uri="{FF2B5EF4-FFF2-40B4-BE49-F238E27FC236}">
-                <a16:creationId xmlns:a16="http://schemas.microsoft.com/office/drawing/2014/main" id="{F68B3F68-107C-434F-AA38-110D5EA91B85}"/>
-              </a:ext>
-              <a:ext uri="{C183D7F6-B498-43B3-948B-1728B52AA6E4}">
-                <adec:decorative xmlns:adec="http://schemas.microsoft.com/office/drawing/2017/decorative" val="1"/>
-              </a:ext>
-            </a:extLst>
-          </p:cNvPr>
-          <p:cNvSpPr>
-            <a:spLocks noGrp="1" noRot="1" noChangeAspect="1" noMove="1" noResize="1" noEditPoints="1" noAdjustHandles="1" noChangeArrowheads="1" noChangeShapeType="1" noTextEdit="1"/>
-          </p:cNvSpPr>
-          <p:nvPr>
-            <p:extLst>
-              <p:ext uri="{386F3935-93C4-4BCD-93E2-E3B085C9AB24}">
-                <p16:designElem xmlns:p16="http://schemas.microsoft.com/office/powerpoint/2015/main" val="1"/>
-              </p:ext>
-            </p:extLst>
-          </p:nvPr>
-        </p:nvSpPr>
-        <p:spPr>
-          <a:xfrm flipH="1">
-            <a:off x="1" y="0"/>
-            <a:ext cx="9143999" cy="1575955"/>
-          </a:xfrm>
-          <a:prstGeom prst="rect">
-            <a:avLst/>
-          </a:prstGeom>
-          <a:gradFill>
+          <a:gradFill flip="none" rotWithShape="1">
             <a:gsLst>
-              <a:gs pos="0">
-                <a:srgbClr val="000000">
-                  <a:alpha val="96000"/>
-                </a:srgbClr>
-              </a:gs>
-              <a:gs pos="100000">
-                <a:schemeClr val="accent1">
-                  <a:lumMod val="75000"/>
+              <a:gs pos="28000">
+                <a:schemeClr val="bg2">
+                  <a:alpha val="84000"/>
                 </a:schemeClr>
               </a:gs>
+              <a:gs pos="74000">
+                <a:schemeClr val="bg1"/>
+              </a:gs>
             </a:gsLst>
-            <a:lin ang="8400000" scaled="0"/>
+            <a:path path="circle">
+              <a:fillToRect l="100000" t="100000"/>
+            </a:path>
+            <a:tileRect r="-100000" b="-100000"/>
           </a:gradFill>
           <a:ln>
             <a:noFill/>
@@ -20336,159 +22065,37 @@
           <a:bodyPr rtlCol="0" anchor="ctr"/>
           <a:lstStyle/>
           <a:p>
-            <a:pPr algn="ctr"/>
-            <a:endParaRPr lang="en-US"/>
-          </a:p>
-        </p:txBody>
-      </p:sp>
-      <p:sp>
-        <p:nvSpPr>
-          <p:cNvPr id="27" name="Rectangle 26">
-            <a:extLst>
-              <a:ext uri="{FF2B5EF4-FFF2-40B4-BE49-F238E27FC236}">
-                <a16:creationId xmlns:a16="http://schemas.microsoft.com/office/drawing/2014/main" id="{AAD0DBB9-1A4B-4391-81D4-CB19F9AB918A}"/>
-              </a:ext>
-              <a:ext uri="{C183D7F6-B498-43B3-948B-1728B52AA6E4}">
-                <adec:decorative xmlns:adec="http://schemas.microsoft.com/office/drawing/2017/decorative" val="1"/>
-              </a:ext>
-            </a:extLst>
-          </p:cNvPr>
-          <p:cNvSpPr>
-            <a:spLocks noGrp="1" noRot="1" noChangeAspect="1" noMove="1" noResize="1" noEditPoints="1" noAdjustHandles="1" noChangeArrowheads="1" noChangeShapeType="1" noTextEdit="1"/>
-          </p:cNvSpPr>
-          <p:nvPr>
-            <p:extLst>
-              <p:ext uri="{386F3935-93C4-4BCD-93E2-E3B085C9AB24}">
-                <p16:designElem xmlns:p16="http://schemas.microsoft.com/office/powerpoint/2015/main" val="1"/>
-              </p:ext>
-            </p:extLst>
-          </p:nvPr>
-        </p:nvSpPr>
-        <p:spPr>
-          <a:xfrm rot="10800000" flipH="1">
-            <a:off x="6096642" y="0"/>
-            <a:ext cx="3047358" cy="1576412"/>
-          </a:xfrm>
-          <a:prstGeom prst="rect">
-            <a:avLst/>
-          </a:prstGeom>
-          <a:gradFill>
-            <a:gsLst>
-              <a:gs pos="19000">
-                <a:schemeClr val="accent1">
-                  <a:lumMod val="50000"/>
-                  <a:alpha val="68000"/>
-                </a:schemeClr>
-              </a:gs>
-              <a:gs pos="100000">
-                <a:schemeClr val="accent1">
-                  <a:alpha val="79000"/>
-                </a:schemeClr>
-              </a:gs>
-            </a:gsLst>
-            <a:lin ang="19200000" scaled="0"/>
-          </a:gradFill>
-          <a:ln>
-            <a:noFill/>
-          </a:ln>
-        </p:spPr>
-        <p:style>
-          <a:lnRef idx="2">
-            <a:schemeClr val="accent1">
-              <a:shade val="50000"/>
-            </a:schemeClr>
-          </a:lnRef>
-          <a:fillRef idx="1">
-            <a:schemeClr val="accent1"/>
-          </a:fillRef>
-          <a:effectRef idx="0">
-            <a:schemeClr val="accent1"/>
-          </a:effectRef>
-          <a:fontRef idx="minor">
-            <a:schemeClr val="lt1"/>
-          </a:fontRef>
-        </p:style>
-        <p:txBody>
-          <a:bodyPr rtlCol="0" anchor="ctr"/>
-          <a:lstStyle/>
-          <a:p>
-            <a:pPr algn="ctr"/>
-            <a:endParaRPr lang="en-US"/>
-          </a:p>
-        </p:txBody>
-      </p:sp>
-      <p:sp>
-        <p:nvSpPr>
-          <p:cNvPr id="29" name="Rectangle 28">
-            <a:extLst>
-              <a:ext uri="{FF2B5EF4-FFF2-40B4-BE49-F238E27FC236}">
-                <a16:creationId xmlns:a16="http://schemas.microsoft.com/office/drawing/2014/main" id="{063BBA22-50EA-4C4D-BE05-F1CE4E63AA56}"/>
-              </a:ext>
-              <a:ext uri="{C183D7F6-B498-43B3-948B-1728B52AA6E4}">
-                <adec:decorative xmlns:adec="http://schemas.microsoft.com/office/drawing/2017/decorative" val="1"/>
-              </a:ext>
-            </a:extLst>
-          </p:cNvPr>
-          <p:cNvSpPr>
-            <a:spLocks noGrp="1" noRot="1" noChangeAspect="1" noMove="1" noResize="1" noEditPoints="1" noAdjustHandles="1" noChangeArrowheads="1" noChangeShapeType="1" noTextEdit="1"/>
-          </p:cNvSpPr>
-          <p:nvPr>
-            <p:extLst>
-              <p:ext uri="{386F3935-93C4-4BCD-93E2-E3B085C9AB24}">
-                <p16:designElem xmlns:p16="http://schemas.microsoft.com/office/powerpoint/2015/main" val="1"/>
-              </p:ext>
-            </p:extLst>
-          </p:nvPr>
-        </p:nvSpPr>
-        <p:spPr>
-          <a:xfrm rot="5400000">
-            <a:off x="3783777" y="-3783778"/>
-            <a:ext cx="1576446" cy="9144002"/>
-          </a:xfrm>
-          <a:prstGeom prst="rect">
-            <a:avLst/>
-          </a:prstGeom>
-          <a:gradFill>
-            <a:gsLst>
-              <a:gs pos="23000">
-                <a:schemeClr val="accent1">
-                  <a:alpha val="0"/>
-                </a:schemeClr>
-              </a:gs>
-              <a:gs pos="99000">
-                <a:srgbClr val="000000">
-                  <a:alpha val="74000"/>
-                </a:srgbClr>
-              </a:gs>
-            </a:gsLst>
-            <a:lin ang="20400000" scaled="0"/>
-          </a:gradFill>
-          <a:ln>
-            <a:noFill/>
-          </a:ln>
-        </p:spPr>
-        <p:style>
-          <a:lnRef idx="2">
-            <a:schemeClr val="accent1">
-              <a:shade val="50000"/>
-            </a:schemeClr>
-          </a:lnRef>
-          <a:fillRef idx="1">
-            <a:schemeClr val="accent1"/>
-          </a:fillRef>
-          <a:effectRef idx="0">
-            <a:schemeClr val="accent1"/>
-          </a:effectRef>
-          <a:fontRef idx="minor">
-            <a:schemeClr val="lt1"/>
-          </a:fontRef>
-        </p:style>
-        <p:txBody>
-          <a:bodyPr rtlCol="0" anchor="ctr"/>
-          <a:lstStyle/>
-          <a:p>
-            <a:pPr algn="ctr"/>
-            <a:endParaRPr lang="en-US" dirty="0"/>
+            <a:pPr marL="0" marR="0" lvl="0" indent="0" algn="ctr" defTabSz="914400" rtl="0" eaLnBrk="1" fontAlgn="auto" latinLnBrk="0" hangingPunct="1">
+              <a:lnSpc>
+                <a:spcPct val="100000"/>
+              </a:lnSpc>
+              <a:spcBef>
+                <a:spcPts val="0"/>
+              </a:spcBef>
+              <a:spcAft>
+                <a:spcPts val="0"/>
+              </a:spcAft>
+              <a:buClrTx/>
+              <a:buSzTx/>
+              <a:buFontTx/>
+              <a:buNone/>
+              <a:tabLst/>
+              <a:defRPr/>
+            </a:pPr>
+            <a:endParaRPr kumimoji="0" lang="en-US" sz="1800" b="0" i="0" u="none" strike="noStrike" kern="1200" cap="none" spc="0" normalizeH="0" baseline="0" noProof="0">
+              <a:ln>
+                <a:noFill/>
+              </a:ln>
+              <a:solidFill>
+                <a:prstClr val="white"/>
+              </a:solidFill>
+              <a:effectLst/>
+              <a:uLnTx/>
+              <a:uFillTx/>
+              <a:latin typeface="Calibri" panose="020F0502020204030204"/>
+              <a:ea typeface="+mn-ea"/>
+              <a:cs typeface="+mn-cs"/>
+            </a:endParaRPr>
           </a:p>
         </p:txBody>
       </p:sp>
@@ -20504,17 +22111,17 @@
         </p:nvSpPr>
         <p:spPr>
           <a:xfrm>
-            <a:off x="1028697" y="348865"/>
-            <a:ext cx="7533018" cy="877729"/>
+            <a:off x="628650" y="365125"/>
+            <a:ext cx="7886700" cy="1325563"/>
           </a:xfrm>
         </p:spPr>
         <p:txBody>
-          <a:bodyPr anchor="ctr">
+          <a:bodyPr vert="horz" lIns="91440" tIns="45720" rIns="91440" bIns="45720" rtlCol="0" anchor="ctr">
             <a:normAutofit/>
           </a:bodyPr>
           <a:lstStyle/>
           <a:p>
-            <a:pPr>
+            <a:pPr algn="l" defTabSz="914400">
               <a:lnSpc>
                 <a:spcPct val="90000"/>
               </a:lnSpc>
@@ -20526,12 +22133,8 @@
               </a:defRPr>
             </a:pPr>
             <a:r>
-              <a:rPr lang="en-GB" sz="2700">
-                <a:solidFill>
-                  <a:srgbClr val="FFFFFF"/>
-                </a:solidFill>
-              </a:rPr>
-              <a:t>2. System Architecture: The Offline-Online Split</a:t>
+              <a:rPr lang="en-US" sz="3600"/>
+              <a:t>2. System Architecture - The Offline-Online method</a:t>
             </a:r>
           </a:p>
         </p:txBody>
@@ -20552,18 +22155,18 @@
             <p:ph idx="1"/>
             <p:extLst>
               <p:ext uri="{D42A27DB-BD31-4B8C-83A1-F6EECF244321}">
-                <p14:modId xmlns:p14="http://schemas.microsoft.com/office/powerpoint/2010/main" val="1824602421"/>
+                <p14:modId xmlns:p14="http://schemas.microsoft.com/office/powerpoint/2010/main" val="2121807028"/>
               </p:ext>
             </p:extLst>
           </p:nvPr>
         </p:nvGraphicFramePr>
         <p:xfrm>
-          <a:off x="483042" y="2112579"/>
-          <a:ext cx="8195871" cy="4192805"/>
+          <a:off x="628650" y="1825625"/>
+          <a:ext cx="7886700" cy="4351338"/>
         </p:xfrm>
         <a:graphic>
           <a:graphicData uri="http://schemas.openxmlformats.org/drawingml/2006/diagram">
-            <dgm:relIds xmlns:dgm="http://schemas.openxmlformats.org/drawingml/2006/diagram" xmlns:r="http://schemas.openxmlformats.org/officeDocument/2006/relationships" r:dm="rId2" r:lo="rId3" r:qs="rId4" r:cs="rId5"/>
+            <dgm:relIds xmlns:dgm="http://schemas.openxmlformats.org/drawingml/2006/diagram" xmlns:r="http://schemas.openxmlformats.org/officeDocument/2006/relationships" r:dm="rId4" r:lo="rId5" r:qs="rId6" r:cs="rId7"/>
           </a:graphicData>
         </a:graphic>
       </p:graphicFrame>
@@ -21064,7 +22667,7 @@
           <p:nvPr/>
         </p:nvPicPr>
         <p:blipFill>
-          <a:blip r:embed="rId2"/>
+          <a:blip r:embed="rId3"/>
           <a:stretch>
             <a:fillRect/>
           </a:stretch>
@@ -21164,7 +22767,7 @@
           <p:nvPr/>
         </p:nvPicPr>
         <p:blipFill>
-          <a:blip r:embed="rId3"/>
+          <a:blip r:embed="rId4"/>
           <a:stretch>
             <a:fillRect/>
           </a:stretch>
@@ -21258,7 +22861,7 @@
         </p:xfrm>
         <a:graphic>
           <a:graphicData uri="http://schemas.openxmlformats.org/drawingml/2006/diagram">
-            <dgm:relIds xmlns:dgm="http://schemas.openxmlformats.org/drawingml/2006/diagram" xmlns:r="http://schemas.openxmlformats.org/officeDocument/2006/relationships" r:dm="rId4" r:lo="rId5" r:qs="rId6" r:cs="rId7"/>
+            <dgm:relIds xmlns:dgm="http://schemas.openxmlformats.org/drawingml/2006/diagram" xmlns:r="http://schemas.openxmlformats.org/officeDocument/2006/relationships" r:dm="rId5" r:lo="rId6" r:qs="rId7" r:cs="rId8"/>
           </a:graphicData>
         </a:graphic>
       </p:graphicFrame>
@@ -21271,6 +22874,494 @@
 </file>
 
 <file path=ppt/slides/slide5.xml><?xml version="1.0" encoding="utf-8"?>
+<p:sld xmlns:a="http://schemas.openxmlformats.org/drawingml/2006/main" xmlns:r="http://schemas.openxmlformats.org/officeDocument/2006/relationships" xmlns:p="http://schemas.openxmlformats.org/presentationml/2006/main">
+  <p:cSld>
+    <p:bg>
+      <p:bgPr>
+        <a:solidFill>
+          <a:schemeClr val="bg1"/>
+        </a:solidFill>
+        <a:effectLst/>
+      </p:bgPr>
+    </p:bg>
+    <p:spTree>
+      <p:nvGrpSpPr>
+        <p:cNvPr id="1" name=""/>
+        <p:cNvGrpSpPr/>
+        <p:nvPr/>
+      </p:nvGrpSpPr>
+      <p:grpSpPr>
+        <a:xfrm>
+          <a:off x="0" y="0"/>
+          <a:ext cx="0" cy="0"/>
+          <a:chOff x="0" y="0"/>
+          <a:chExt cx="0" cy="0"/>
+        </a:xfrm>
+      </p:grpSpPr>
+      <p:sp useBgFill="1">
+        <p:nvSpPr>
+          <p:cNvPr id="23" name="Rectangle 22">
+            <a:extLst>
+              <a:ext uri="{FF2B5EF4-FFF2-40B4-BE49-F238E27FC236}">
+                <a16:creationId xmlns:a16="http://schemas.microsoft.com/office/drawing/2014/main" id="{E36BB3C5-822B-45E1-A81E-5CC3176C61A1}"/>
+              </a:ext>
+              <a:ext uri="{C183D7F6-B498-43B3-948B-1728B52AA6E4}">
+                <adec:decorative xmlns:adec="http://schemas.microsoft.com/office/drawing/2017/decorative" val="1"/>
+              </a:ext>
+            </a:extLst>
+          </p:cNvPr>
+          <p:cNvSpPr>
+            <a:spLocks noGrp="1" noRot="1" noChangeAspect="1" noMove="1" noResize="1" noEditPoints="1" noAdjustHandles="1" noChangeArrowheads="1" noChangeShapeType="1" noTextEdit="1"/>
+          </p:cNvSpPr>
+          <p:nvPr>
+            <p:extLst>
+              <p:ext uri="{386F3935-93C4-4BCD-93E2-E3B085C9AB24}">
+                <p16:designElem xmlns:p16="http://schemas.microsoft.com/office/powerpoint/2015/main" val="1"/>
+              </p:ext>
+            </p:extLst>
+          </p:nvPr>
+        </p:nvSpPr>
+        <p:spPr>
+          <a:xfrm>
+            <a:off x="0" y="0"/>
+            <a:ext cx="9144000" cy="6858000"/>
+          </a:xfrm>
+          <a:prstGeom prst="rect">
+            <a:avLst/>
+          </a:prstGeom>
+          <a:ln>
+            <a:noFill/>
+          </a:ln>
+        </p:spPr>
+        <p:style>
+          <a:lnRef idx="2">
+            <a:schemeClr val="accent1">
+              <a:shade val="50000"/>
+            </a:schemeClr>
+          </a:lnRef>
+          <a:fillRef idx="1">
+            <a:schemeClr val="accent1"/>
+          </a:fillRef>
+          <a:effectRef idx="0">
+            <a:schemeClr val="accent1"/>
+          </a:effectRef>
+          <a:fontRef idx="minor">
+            <a:schemeClr val="lt1"/>
+          </a:fontRef>
+        </p:style>
+        <p:txBody>
+          <a:bodyPr rtlCol="0" anchor="ctr"/>
+          <a:lstStyle/>
+          <a:p>
+            <a:pPr algn="ctr"/>
+            <a:endParaRPr lang="en-US"/>
+          </a:p>
+        </p:txBody>
+      </p:sp>
+      <p:sp useBgFill="1">
+        <p:nvSpPr>
+          <p:cNvPr id="25" name="Rectangle 24">
+            <a:extLst>
+              <a:ext uri="{FF2B5EF4-FFF2-40B4-BE49-F238E27FC236}">
+                <a16:creationId xmlns:a16="http://schemas.microsoft.com/office/drawing/2014/main" id="{FB39ECA9-4CDE-4883-98E8-287E905E9F07}"/>
+              </a:ext>
+              <a:ext uri="{C183D7F6-B498-43B3-948B-1728B52AA6E4}">
+                <adec:decorative xmlns:adec="http://schemas.microsoft.com/office/drawing/2017/decorative" val="1"/>
+              </a:ext>
+            </a:extLst>
+          </p:cNvPr>
+          <p:cNvSpPr>
+            <a:spLocks noGrp="1" noRot="1" noChangeAspect="1" noMove="1" noResize="1" noEditPoints="1" noAdjustHandles="1" noChangeArrowheads="1" noChangeShapeType="1" noTextEdit="1"/>
+          </p:cNvSpPr>
+          <p:nvPr>
+            <p:extLst>
+              <p:ext uri="{386F3935-93C4-4BCD-93E2-E3B085C9AB24}">
+                <p16:designElem xmlns:p16="http://schemas.microsoft.com/office/powerpoint/2015/main" val="1"/>
+              </p:ext>
+            </p:extLst>
+          </p:nvPr>
+        </p:nvSpPr>
+        <p:spPr>
+          <a:xfrm>
+            <a:off x="434447" y="3630934"/>
+            <a:ext cx="4716196" cy="2546028"/>
+          </a:xfrm>
+          <a:prstGeom prst="rect">
+            <a:avLst/>
+          </a:prstGeom>
+          <a:ln w="12700">
+            <a:solidFill>
+              <a:srgbClr val="DEDEDE"/>
+            </a:solidFill>
+          </a:ln>
+          <a:effectLst>
+            <a:outerShdw blurRad="50800" dist="38100" dir="2700000" algn="tl" rotWithShape="0">
+              <a:schemeClr val="bg2">
+                <a:lumMod val="85000"/>
+                <a:alpha val="50000"/>
+              </a:schemeClr>
+            </a:outerShdw>
+          </a:effectLst>
+        </p:spPr>
+        <p:style>
+          <a:lnRef idx="2">
+            <a:schemeClr val="accent1">
+              <a:shade val="50000"/>
+            </a:schemeClr>
+          </a:lnRef>
+          <a:fillRef idx="1">
+            <a:schemeClr val="accent1"/>
+          </a:fillRef>
+          <a:effectRef idx="0">
+            <a:schemeClr val="accent1"/>
+          </a:effectRef>
+          <a:fontRef idx="minor">
+            <a:schemeClr val="lt1"/>
+          </a:fontRef>
+        </p:style>
+        <p:txBody>
+          <a:bodyPr rtlCol="0" anchor="ctr"/>
+          <a:lstStyle/>
+          <a:p>
+            <a:pPr marL="0" marR="0" lvl="0" indent="0" algn="ctr" defTabSz="914400" rtl="0" eaLnBrk="1" fontAlgn="auto" latinLnBrk="0" hangingPunct="1">
+              <a:lnSpc>
+                <a:spcPct val="100000"/>
+              </a:lnSpc>
+              <a:spcBef>
+                <a:spcPts val="0"/>
+              </a:spcBef>
+              <a:spcAft>
+                <a:spcPts val="0"/>
+              </a:spcAft>
+              <a:buClrTx/>
+              <a:buSzTx/>
+              <a:buFontTx/>
+              <a:buNone/>
+              <a:tabLst/>
+              <a:defRPr/>
+            </a:pPr>
+            <a:endParaRPr kumimoji="0" lang="en-US" sz="1800" b="0" i="0" u="none" strike="noStrike" kern="1200" cap="none" spc="0" normalizeH="0" baseline="0" noProof="0">
+              <a:ln>
+                <a:noFill/>
+              </a:ln>
+              <a:solidFill>
+                <a:prstClr val="white"/>
+              </a:solidFill>
+              <a:effectLst/>
+              <a:uLnTx/>
+              <a:uFillTx/>
+              <a:latin typeface="Calibri" panose="020F0502020204030204"/>
+              <a:ea typeface="+mn-ea"/>
+              <a:cs typeface="+mn-cs"/>
+            </a:endParaRPr>
+          </a:p>
+        </p:txBody>
+      </p:sp>
+      <p:sp>
+        <p:nvSpPr>
+          <p:cNvPr id="2" name="Title 1">
+            <a:extLst>
+              <a:ext uri="{FF2B5EF4-FFF2-40B4-BE49-F238E27FC236}">
+                <a16:creationId xmlns:a16="http://schemas.microsoft.com/office/drawing/2014/main" id="{2FD10CB3-0918-F837-ACD1-ECBE42EB3237}"/>
+              </a:ext>
+            </a:extLst>
+          </p:cNvPr>
+          <p:cNvSpPr>
+            <a:spLocks noGrp="1"/>
+          </p:cNvSpPr>
+          <p:nvPr>
+            <p:ph type="title"/>
+          </p:nvPr>
+        </p:nvSpPr>
+        <p:spPr>
+          <a:xfrm>
+            <a:off x="630936" y="3849689"/>
+            <a:ext cx="1583341" cy="2105025"/>
+          </a:xfrm>
+        </p:spPr>
+        <p:txBody>
+          <a:bodyPr>
+            <a:normAutofit/>
+          </a:bodyPr>
+          <a:lstStyle/>
+          <a:p>
+            <a:r>
+              <a:rPr lang="en-GB" sz="1900"/>
+              <a:t>Project Management &amp; Agile Methodology</a:t>
+            </a:r>
+          </a:p>
+        </p:txBody>
+      </p:sp>
+      <p:sp>
+        <p:nvSpPr>
+          <p:cNvPr id="22" name="Rectangle 21">
+            <a:extLst>
+              <a:ext uri="{FF2B5EF4-FFF2-40B4-BE49-F238E27FC236}">
+                <a16:creationId xmlns:a16="http://schemas.microsoft.com/office/drawing/2014/main" id="{A67483D0-BAEB-4927-88AD-76F5DA8468DE}"/>
+              </a:ext>
+              <a:ext uri="{C183D7F6-B498-43B3-948B-1728B52AA6E4}">
+                <adec:decorative xmlns:adec="http://schemas.microsoft.com/office/drawing/2017/decorative" val="1"/>
+              </a:ext>
+            </a:extLst>
+          </p:cNvPr>
+          <p:cNvSpPr>
+            <a:spLocks noGrp="1" noRot="1" noChangeAspect="1" noMove="1" noResize="1" noEditPoints="1" noAdjustHandles="1" noChangeArrowheads="1" noChangeShapeType="1" noTextEdit="1"/>
+          </p:cNvSpPr>
+          <p:nvPr>
+            <p:extLst>
+              <p:ext uri="{386F3935-93C4-4BCD-93E2-E3B085C9AB24}">
+                <p16:designElem xmlns:p16="http://schemas.microsoft.com/office/powerpoint/2015/main" val="1"/>
+              </p:ext>
+            </p:extLst>
+          </p:nvPr>
+        </p:nvSpPr>
+        <p:spPr>
+          <a:xfrm>
+            <a:off x="391870" y="4565724"/>
+            <a:ext cx="96012" cy="653903"/>
+          </a:xfrm>
+          <a:prstGeom prst="rect">
+            <a:avLst/>
+          </a:prstGeom>
+          <a:solidFill>
+            <a:schemeClr val="accent2"/>
+          </a:solidFill>
+          <a:ln>
+            <a:noFill/>
+          </a:ln>
+        </p:spPr>
+        <p:style>
+          <a:lnRef idx="2">
+            <a:schemeClr val="accent1">
+              <a:shade val="50000"/>
+            </a:schemeClr>
+          </a:lnRef>
+          <a:fillRef idx="1">
+            <a:schemeClr val="accent1"/>
+          </a:fillRef>
+          <a:effectRef idx="0">
+            <a:schemeClr val="accent1"/>
+          </a:effectRef>
+          <a:fontRef idx="minor">
+            <a:schemeClr val="lt1"/>
+          </a:fontRef>
+        </p:style>
+        <p:txBody>
+          <a:bodyPr rtlCol="0" anchor="ctr"/>
+          <a:lstStyle/>
+          <a:p>
+            <a:pPr algn="ctr"/>
+            <a:endParaRPr lang="en-US">
+              <a:solidFill>
+                <a:prstClr val="white"/>
+              </a:solidFill>
+              <a:latin typeface="Calibri" panose="020F0502020204030204"/>
+            </a:endParaRPr>
+          </a:p>
+        </p:txBody>
+      </p:sp>
+      <p:sp>
+        <p:nvSpPr>
+          <p:cNvPr id="24" name="Rectangle 23">
+            <a:extLst>
+              <a:ext uri="{FF2B5EF4-FFF2-40B4-BE49-F238E27FC236}">
+                <a16:creationId xmlns:a16="http://schemas.microsoft.com/office/drawing/2014/main" id="{0DBB7B12-4298-4CFB-B539-44A91C930328}"/>
+              </a:ext>
+              <a:ext uri="{C183D7F6-B498-43B3-948B-1728B52AA6E4}">
+                <adec:decorative xmlns:adec="http://schemas.microsoft.com/office/drawing/2017/decorative" val="1"/>
+              </a:ext>
+            </a:extLst>
+          </p:cNvPr>
+          <p:cNvSpPr>
+            <a:spLocks noGrp="1" noRot="1" noChangeAspect="1" noMove="1" noResize="1" noEditPoints="1" noAdjustHandles="1" noChangeArrowheads="1" noChangeShapeType="1" noTextEdit="1"/>
+          </p:cNvSpPr>
+          <p:nvPr>
+            <p:extLst>
+              <p:ext uri="{386F3935-93C4-4BCD-93E2-E3B085C9AB24}">
+                <p16:designElem xmlns:p16="http://schemas.microsoft.com/office/powerpoint/2015/main" val="1"/>
+              </p:ext>
+            </p:extLst>
+          </p:nvPr>
+        </p:nvSpPr>
+        <p:spPr>
+          <a:xfrm rot="5400000">
+            <a:off x="1612880" y="4895342"/>
+            <a:ext cx="1463040" cy="13716"/>
+          </a:xfrm>
+          <a:prstGeom prst="rect">
+            <a:avLst/>
+          </a:prstGeom>
+          <a:solidFill>
+            <a:srgbClr val="D5D5D5"/>
+          </a:solidFill>
+          <a:ln w="3175">
+            <a:noFill/>
+          </a:ln>
+          <a:effectLst/>
+        </p:spPr>
+        <p:style>
+          <a:lnRef idx="2">
+            <a:schemeClr val="accent1">
+              <a:shade val="50000"/>
+            </a:schemeClr>
+          </a:lnRef>
+          <a:fillRef idx="1">
+            <a:schemeClr val="accent1"/>
+          </a:fillRef>
+          <a:effectRef idx="0">
+            <a:schemeClr val="accent1"/>
+          </a:effectRef>
+          <a:fontRef idx="minor">
+            <a:schemeClr val="lt1"/>
+          </a:fontRef>
+        </p:style>
+        <p:txBody>
+          <a:bodyPr rtlCol="0" anchor="ctr"/>
+          <a:lstStyle/>
+          <a:p>
+            <a:pPr marL="0" marR="0" lvl="0" indent="0" algn="ctr" defTabSz="914400" rtl="0" eaLnBrk="1" fontAlgn="auto" latinLnBrk="0" hangingPunct="1">
+              <a:lnSpc>
+                <a:spcPct val="100000"/>
+              </a:lnSpc>
+              <a:spcBef>
+                <a:spcPts val="0"/>
+              </a:spcBef>
+              <a:spcAft>
+                <a:spcPts val="0"/>
+              </a:spcAft>
+              <a:buClrTx/>
+              <a:buSzTx/>
+              <a:buFontTx/>
+              <a:buNone/>
+              <a:tabLst/>
+              <a:defRPr/>
+            </a:pPr>
+            <a:endParaRPr kumimoji="0" lang="en-US" sz="1800" b="0" i="0" u="none" strike="noStrike" kern="1200" cap="none" spc="0" normalizeH="0" baseline="0" noProof="0">
+              <a:ln>
+                <a:noFill/>
+              </a:ln>
+              <a:solidFill>
+                <a:prstClr val="white"/>
+              </a:solidFill>
+              <a:effectLst/>
+              <a:uLnTx/>
+              <a:uFillTx/>
+              <a:latin typeface="Calibri" panose="020F0502020204030204"/>
+              <a:ea typeface="+mn-ea"/>
+              <a:cs typeface="+mn-cs"/>
+            </a:endParaRPr>
+          </a:p>
+        </p:txBody>
+      </p:sp>
+      <p:sp>
+        <p:nvSpPr>
+          <p:cNvPr id="3" name="Content Placeholder 2">
+            <a:extLst>
+              <a:ext uri="{FF2B5EF4-FFF2-40B4-BE49-F238E27FC236}">
+                <a16:creationId xmlns:a16="http://schemas.microsoft.com/office/drawing/2014/main" id="{A43E0FFB-A6EC-304B-C8B4-F8F95D3F779B}"/>
+              </a:ext>
+            </a:extLst>
+          </p:cNvPr>
+          <p:cNvSpPr>
+            <a:spLocks noGrp="1"/>
+          </p:cNvSpPr>
+          <p:nvPr>
+            <p:ph idx="1"/>
+          </p:nvPr>
+        </p:nvSpPr>
+        <p:spPr>
+          <a:xfrm>
+            <a:off x="2520422" y="3849688"/>
+            <a:ext cx="2486857" cy="2105025"/>
+          </a:xfrm>
+        </p:spPr>
+        <p:txBody>
+          <a:bodyPr anchor="ctr">
+            <a:normAutofit/>
+          </a:bodyPr>
+          <a:lstStyle/>
+          <a:p>
+            <a:r>
+              <a:rPr lang="en-GB" sz="1500" dirty="0"/>
+              <a:t>Using Asana for Agile work planning to track workflow and managing the tasks and development alongside academic deliverables.</a:t>
+            </a:r>
+          </a:p>
+        </p:txBody>
+      </p:sp>
+      <p:pic>
+        <p:nvPicPr>
+          <p:cNvPr id="15" name="Picture 14" descr="A screenshot of a computer&#10;&#10;AI-generated content may be incorrect.">
+            <a:extLst>
+              <a:ext uri="{FF2B5EF4-FFF2-40B4-BE49-F238E27FC236}">
+                <a16:creationId xmlns:a16="http://schemas.microsoft.com/office/drawing/2014/main" id="{F6C9DE3F-6F6F-63AA-5E74-5C723D7F9517}"/>
+              </a:ext>
+            </a:extLst>
+          </p:cNvPr>
+          <p:cNvPicPr>
+            <a:picLocks noChangeAspect="1"/>
+          </p:cNvPicPr>
+          <p:nvPr/>
+        </p:nvPicPr>
+        <p:blipFill>
+          <a:blip r:embed="rId3"/>
+          <a:stretch>
+            <a:fillRect/>
+          </a:stretch>
+        </p:blipFill>
+        <p:spPr>
+          <a:xfrm>
+            <a:off x="169147" y="730844"/>
+            <a:ext cx="4981496" cy="2482501"/>
+          </a:xfrm>
+          <a:prstGeom prst="rect">
+            <a:avLst/>
+          </a:prstGeom>
+        </p:spPr>
+      </p:pic>
+      <p:pic>
+        <p:nvPicPr>
+          <p:cNvPr id="17" name="Picture 16" descr="A screenshot of a computer program&#10;&#10;AI-generated content may be incorrect.">
+            <a:extLst>
+              <a:ext uri="{FF2B5EF4-FFF2-40B4-BE49-F238E27FC236}">
+                <a16:creationId xmlns:a16="http://schemas.microsoft.com/office/drawing/2014/main" id="{BAE54A87-40C2-D97A-D539-6223D5AFEC00}"/>
+              </a:ext>
+            </a:extLst>
+          </p:cNvPr>
+          <p:cNvPicPr>
+            <a:picLocks noChangeAspect="1"/>
+          </p:cNvPicPr>
+          <p:nvPr/>
+        </p:nvPicPr>
+        <p:blipFill>
+          <a:blip r:embed="rId4"/>
+          <a:stretch>
+            <a:fillRect/>
+          </a:stretch>
+        </p:blipFill>
+        <p:spPr>
+          <a:xfrm>
+            <a:off x="5347132" y="1106955"/>
+            <a:ext cx="3585177" cy="4644090"/>
+          </a:xfrm>
+          <a:prstGeom prst="rect">
+            <a:avLst/>
+          </a:prstGeom>
+        </p:spPr>
+      </p:pic>
+    </p:spTree>
+    <p:extLst>
+      <p:ext uri="{BB962C8B-B14F-4D97-AF65-F5344CB8AC3E}">
+        <p14:creationId xmlns:p14="http://schemas.microsoft.com/office/powerpoint/2010/main" val="1564750830"/>
+      </p:ext>
+    </p:extLst>
+  </p:cSld>
+  <p:clrMapOvr>
+    <a:masterClrMapping/>
+  </p:clrMapOvr>
+</p:sld>
+</file>
+
+<file path=ppt/slides/slide6.xml><?xml version="1.0" encoding="utf-8"?>
 <p:sld xmlns:a="http://schemas.openxmlformats.org/drawingml/2006/main" xmlns:r="http://schemas.openxmlformats.org/officeDocument/2006/relationships" xmlns:p="http://schemas.openxmlformats.org/presentationml/2006/main">
   <p:cSld>
     <p:bg>
@@ -21666,7 +23757,7 @@
         </p:xfrm>
         <a:graphic>
           <a:graphicData uri="http://schemas.openxmlformats.org/drawingml/2006/diagram">
-            <dgm:relIds xmlns:dgm="http://schemas.openxmlformats.org/drawingml/2006/diagram" xmlns:r="http://schemas.openxmlformats.org/officeDocument/2006/relationships" r:dm="rId2" r:lo="rId3" r:qs="rId4" r:cs="rId5"/>
+            <dgm:relIds xmlns:dgm="http://schemas.openxmlformats.org/drawingml/2006/diagram" xmlns:r="http://schemas.openxmlformats.org/officeDocument/2006/relationships" r:dm="rId3" r:lo="rId4" r:qs="rId5" r:cs="rId6"/>
           </a:graphicData>
         </a:graphic>
       </p:graphicFrame>
@@ -21678,7 +23769,7 @@
 </p:sld>
 </file>
 
-<file path=ppt/slides/slide6.xml><?xml version="1.0" encoding="utf-8"?>
+<file path=ppt/slides/slide7.xml><?xml version="1.0" encoding="utf-8"?>
 <p:sld xmlns:a="http://schemas.openxmlformats.org/drawingml/2006/main" xmlns:r="http://schemas.openxmlformats.org/officeDocument/2006/relationships" xmlns:p="http://schemas.openxmlformats.org/presentationml/2006/main">
   <p:cSld>
     <p:bg>
@@ -22167,7 +24258,7 @@
           <p:nvPr/>
         </p:nvPicPr>
         <p:blipFill>
-          <a:blip r:embed="rId2">
+          <a:blip r:embed="rId3">
             <a:extLst>
               <a:ext uri="{28A0092B-C50C-407E-A947-70E740481C1C}">
                 <a14:useLocalDpi xmlns:a14="http://schemas.microsoft.com/office/drawing/2010/main" val="0"/>
@@ -22273,7 +24364,7 @@
           <p:nvPr/>
         </p:nvPicPr>
         <p:blipFill rotWithShape="1">
-          <a:blip r:embed="rId3"/>
+          <a:blip r:embed="rId4"/>
           <a:srcRect l="2386" t="2945" r="2329" b="3217"/>
           <a:stretch>
             <a:fillRect/>
@@ -22370,7 +24461,7 @@
         </p:xfrm>
         <a:graphic>
           <a:graphicData uri="http://schemas.openxmlformats.org/drawingml/2006/diagram">
-            <dgm:relIds xmlns:dgm="http://schemas.openxmlformats.org/drawingml/2006/diagram" xmlns:r="http://schemas.openxmlformats.org/officeDocument/2006/relationships" r:dm="rId4" r:lo="rId5" r:qs="rId6" r:cs="rId7"/>
+            <dgm:relIds xmlns:dgm="http://schemas.openxmlformats.org/drawingml/2006/diagram" xmlns:r="http://schemas.openxmlformats.org/officeDocument/2006/relationships" r:dm="rId5" r:lo="rId6" r:qs="rId7" r:cs="rId8"/>
           </a:graphicData>
         </a:graphic>
       </p:graphicFrame>
@@ -22700,4 +24791,319 @@
   </a:objectDefaults>
   <a:extraClrSchemeLst/>
 </a:theme>
+</file>
+
+<file path=ppt/theme/theme2.xml><?xml version="1.0" encoding="utf-8"?>
+<a:theme xmlns:a="http://schemas.openxmlformats.org/drawingml/2006/main" name="Office Theme">
+  <a:themeElements>
+    <a:clrScheme name="Office">
+      <a:dk1>
+        <a:sysClr val="windowText" lastClr="000000"/>
+      </a:dk1>
+      <a:lt1>
+        <a:sysClr val="window" lastClr="FFFFFF"/>
+      </a:lt1>
+      <a:dk2>
+        <a:srgbClr val="0E2841"/>
+      </a:dk2>
+      <a:lt2>
+        <a:srgbClr val="E8E8E8"/>
+      </a:lt2>
+      <a:accent1>
+        <a:srgbClr val="156082"/>
+      </a:accent1>
+      <a:accent2>
+        <a:srgbClr val="E97132"/>
+      </a:accent2>
+      <a:accent3>
+        <a:srgbClr val="196B24"/>
+      </a:accent3>
+      <a:accent4>
+        <a:srgbClr val="0F9ED5"/>
+      </a:accent4>
+      <a:accent5>
+        <a:srgbClr val="A02B93"/>
+      </a:accent5>
+      <a:accent6>
+        <a:srgbClr val="4EA72E"/>
+      </a:accent6>
+      <a:hlink>
+        <a:srgbClr val="467886"/>
+      </a:hlink>
+      <a:folHlink>
+        <a:srgbClr val="96607D"/>
+      </a:folHlink>
+    </a:clrScheme>
+    <a:fontScheme name="Office">
+      <a:majorFont>
+        <a:latin typeface="Aptos Display" panose="02110004020202020204"/>
+        <a:ea typeface=""/>
+        <a:cs typeface=""/>
+        <a:font script="Jpan" typeface="游ゴシック Light"/>
+        <a:font script="Hang" typeface="맑은 고딕"/>
+        <a:font script="Hans" typeface="等线 Light"/>
+        <a:font script="Hant" typeface="新細明體"/>
+        <a:font script="Arab" typeface="Times New Roman"/>
+        <a:font script="Hebr" typeface="Times New Roman"/>
+        <a:font script="Thai" typeface="Angsana New"/>
+        <a:font script="Ethi" typeface="Nyala"/>
+        <a:font script="Beng" typeface="Vrinda"/>
+        <a:font script="Gujr" typeface="Shruti"/>
+        <a:font script="Khmr" typeface="MoolBoran"/>
+        <a:font script="Knda" typeface="Tunga"/>
+        <a:font script="Guru" typeface="Raavi"/>
+        <a:font script="Cans" typeface="Euphemia"/>
+        <a:font script="Cher" typeface="Plantagenet Cherokee"/>
+        <a:font script="Yiii" typeface="Microsoft Yi Baiti"/>
+        <a:font script="Tibt" typeface="Microsoft Himalaya"/>
+        <a:font script="Thaa" typeface="MV Boli"/>
+        <a:font script="Deva" typeface="Mangal"/>
+        <a:font script="Telu" typeface="Gautami"/>
+        <a:font script="Taml" typeface="Latha"/>
+        <a:font script="Syrc" typeface="Estrangelo Edessa"/>
+        <a:font script="Orya" typeface="Kalinga"/>
+        <a:font script="Mlym" typeface="Kartika"/>
+        <a:font script="Laoo" typeface="DokChampa"/>
+        <a:font script="Sinh" typeface="Iskoola Pota"/>
+        <a:font script="Mong" typeface="Mongolian Baiti"/>
+        <a:font script="Viet" typeface="Times New Roman"/>
+        <a:font script="Uigh" typeface="Microsoft Uighur"/>
+        <a:font script="Geor" typeface="Sylfaen"/>
+        <a:font script="Armn" typeface="Arial"/>
+        <a:font script="Bugi" typeface="Leelawadee UI"/>
+        <a:font script="Bopo" typeface="Microsoft JhengHei"/>
+        <a:font script="Java" typeface="Javanese Text"/>
+        <a:font script="Lisu" typeface="Segoe UI"/>
+        <a:font script="Mymr" typeface="Myanmar Text"/>
+        <a:font script="Nkoo" typeface="Ebrima"/>
+        <a:font script="Olck" typeface="Nirmala UI"/>
+        <a:font script="Osma" typeface="Ebrima"/>
+        <a:font script="Phag" typeface="Phagspa"/>
+        <a:font script="Syrn" typeface="Estrangelo Edessa"/>
+        <a:font script="Syrj" typeface="Estrangelo Edessa"/>
+        <a:font script="Syre" typeface="Estrangelo Edessa"/>
+        <a:font script="Sora" typeface="Nirmala UI"/>
+        <a:font script="Tale" typeface="Microsoft Tai Le"/>
+        <a:font script="Talu" typeface="Microsoft New Tai Lue"/>
+        <a:font script="Tfng" typeface="Ebrima"/>
+      </a:majorFont>
+      <a:minorFont>
+        <a:latin typeface="Aptos" panose="02110004020202020204"/>
+        <a:ea typeface=""/>
+        <a:cs typeface=""/>
+        <a:font script="Jpan" typeface="游ゴシック"/>
+        <a:font script="Hang" typeface="맑은 고딕"/>
+        <a:font script="Hans" typeface="等线"/>
+        <a:font script="Hant" typeface="新細明體"/>
+        <a:font script="Arab" typeface="Arial"/>
+        <a:font script="Hebr" typeface="Arial"/>
+        <a:font script="Thai" typeface="Cordia New"/>
+        <a:font script="Ethi" typeface="Nyala"/>
+        <a:font script="Beng" typeface="Vrinda"/>
+        <a:font script="Gujr" typeface="Shruti"/>
+        <a:font script="Khmr" typeface="DaunPenh"/>
+        <a:font script="Knda" typeface="Tunga"/>
+        <a:font script="Guru" typeface="Raavi"/>
+        <a:font script="Cans" typeface="Euphemia"/>
+        <a:font script="Cher" typeface="Plantagenet Cherokee"/>
+        <a:font script="Yiii" typeface="Microsoft Yi Baiti"/>
+        <a:font script="Tibt" typeface="Microsoft Himalaya"/>
+        <a:font script="Thaa" typeface="MV Boli"/>
+        <a:font script="Deva" typeface="Mangal"/>
+        <a:font script="Telu" typeface="Gautami"/>
+        <a:font script="Taml" typeface="Latha"/>
+        <a:font script="Syrc" typeface="Estrangelo Edessa"/>
+        <a:font script="Orya" typeface="Kalinga"/>
+        <a:font script="Mlym" typeface="Kartika"/>
+        <a:font script="Laoo" typeface="DokChampa"/>
+        <a:font script="Sinh" typeface="Iskoola Pota"/>
+        <a:font script="Mong" typeface="Mongolian Baiti"/>
+        <a:font script="Viet" typeface="Arial"/>
+        <a:font script="Uigh" typeface="Microsoft Uighur"/>
+        <a:font script="Geor" typeface="Sylfaen"/>
+        <a:font script="Armn" typeface="Arial"/>
+        <a:font script="Bugi" typeface="Leelawadee UI"/>
+        <a:font script="Bopo" typeface="Microsoft JhengHei"/>
+        <a:font script="Java" typeface="Javanese Text"/>
+        <a:font script="Lisu" typeface="Segoe UI"/>
+        <a:font script="Mymr" typeface="Myanmar Text"/>
+        <a:font script="Nkoo" typeface="Ebrima"/>
+        <a:font script="Olck" typeface="Nirmala UI"/>
+        <a:font script="Osma" typeface="Ebrima"/>
+        <a:font script="Phag" typeface="Phagspa"/>
+        <a:font script="Syrn" typeface="Estrangelo Edessa"/>
+        <a:font script="Syrj" typeface="Estrangelo Edessa"/>
+        <a:font script="Syre" typeface="Estrangelo Edessa"/>
+        <a:font script="Sora" typeface="Nirmala UI"/>
+        <a:font script="Tale" typeface="Microsoft Tai Le"/>
+        <a:font script="Talu" typeface="Microsoft New Tai Lue"/>
+        <a:font script="Tfng" typeface="Ebrima"/>
+      </a:minorFont>
+    </a:fontScheme>
+    <a:fmtScheme name="Office">
+      <a:fillStyleLst>
+        <a:solidFill>
+          <a:schemeClr val="phClr"/>
+        </a:solidFill>
+        <a:gradFill rotWithShape="1">
+          <a:gsLst>
+            <a:gs pos="0">
+              <a:schemeClr val="phClr">
+                <a:lumMod val="110000"/>
+                <a:satMod val="105000"/>
+                <a:tint val="67000"/>
+              </a:schemeClr>
+            </a:gs>
+            <a:gs pos="50000">
+              <a:schemeClr val="phClr">
+                <a:lumMod val="105000"/>
+                <a:satMod val="103000"/>
+                <a:tint val="73000"/>
+              </a:schemeClr>
+            </a:gs>
+            <a:gs pos="100000">
+              <a:schemeClr val="phClr">
+                <a:lumMod val="105000"/>
+                <a:satMod val="109000"/>
+                <a:tint val="81000"/>
+              </a:schemeClr>
+            </a:gs>
+          </a:gsLst>
+          <a:lin ang="5400000" scaled="0"/>
+        </a:gradFill>
+        <a:gradFill rotWithShape="1">
+          <a:gsLst>
+            <a:gs pos="0">
+              <a:schemeClr val="phClr">
+                <a:satMod val="103000"/>
+                <a:lumMod val="102000"/>
+                <a:tint val="94000"/>
+              </a:schemeClr>
+            </a:gs>
+            <a:gs pos="50000">
+              <a:schemeClr val="phClr">
+                <a:satMod val="110000"/>
+                <a:lumMod val="100000"/>
+                <a:shade val="100000"/>
+              </a:schemeClr>
+            </a:gs>
+            <a:gs pos="100000">
+              <a:schemeClr val="phClr">
+                <a:lumMod val="99000"/>
+                <a:satMod val="120000"/>
+                <a:shade val="78000"/>
+              </a:schemeClr>
+            </a:gs>
+          </a:gsLst>
+          <a:lin ang="5400000" scaled="0"/>
+        </a:gradFill>
+      </a:fillStyleLst>
+      <a:lnStyleLst>
+        <a:ln w="12700" cap="flat" cmpd="sng" algn="ctr">
+          <a:solidFill>
+            <a:schemeClr val="phClr"/>
+          </a:solidFill>
+          <a:prstDash val="solid"/>
+          <a:miter lim="800000"/>
+        </a:ln>
+        <a:ln w="19050" cap="flat" cmpd="sng" algn="ctr">
+          <a:solidFill>
+            <a:schemeClr val="phClr"/>
+          </a:solidFill>
+          <a:prstDash val="solid"/>
+          <a:miter lim="800000"/>
+        </a:ln>
+        <a:ln w="25400" cap="flat" cmpd="sng" algn="ctr">
+          <a:solidFill>
+            <a:schemeClr val="phClr"/>
+          </a:solidFill>
+          <a:prstDash val="solid"/>
+          <a:miter lim="800000"/>
+        </a:ln>
+      </a:lnStyleLst>
+      <a:effectStyleLst>
+        <a:effectStyle>
+          <a:effectLst/>
+        </a:effectStyle>
+        <a:effectStyle>
+          <a:effectLst/>
+        </a:effectStyle>
+        <a:effectStyle>
+          <a:effectLst>
+            <a:outerShdw blurRad="57150" dist="19050" dir="5400000" algn="ctr" rotWithShape="0">
+              <a:srgbClr val="000000">
+                <a:alpha val="63000"/>
+              </a:srgbClr>
+            </a:outerShdw>
+          </a:effectLst>
+        </a:effectStyle>
+      </a:effectStyleLst>
+      <a:bgFillStyleLst>
+        <a:solidFill>
+          <a:schemeClr val="phClr"/>
+        </a:solidFill>
+        <a:solidFill>
+          <a:schemeClr val="phClr">
+            <a:tint val="95000"/>
+            <a:satMod val="170000"/>
+          </a:schemeClr>
+        </a:solidFill>
+        <a:gradFill rotWithShape="1">
+          <a:gsLst>
+            <a:gs pos="0">
+              <a:schemeClr val="phClr">
+                <a:tint val="93000"/>
+                <a:satMod val="150000"/>
+                <a:shade val="98000"/>
+                <a:lumMod val="102000"/>
+              </a:schemeClr>
+            </a:gs>
+            <a:gs pos="50000">
+              <a:schemeClr val="phClr">
+                <a:tint val="98000"/>
+                <a:satMod val="130000"/>
+                <a:shade val="90000"/>
+                <a:lumMod val="103000"/>
+              </a:schemeClr>
+            </a:gs>
+            <a:gs pos="100000">
+              <a:schemeClr val="phClr">
+                <a:shade val="63000"/>
+                <a:satMod val="120000"/>
+              </a:schemeClr>
+            </a:gs>
+          </a:gsLst>
+          <a:lin ang="5400000" scaled="0"/>
+        </a:gradFill>
+      </a:bgFillStyleLst>
+    </a:fmtScheme>
+  </a:themeElements>
+  <a:objectDefaults>
+    <a:lnDef>
+      <a:spPr/>
+      <a:bodyPr/>
+      <a:lstStyle/>
+      <a:style>
+        <a:lnRef idx="2">
+          <a:schemeClr val="accent1"/>
+        </a:lnRef>
+        <a:fillRef idx="0">
+          <a:schemeClr val="accent1"/>
+        </a:fillRef>
+        <a:effectRef idx="1">
+          <a:schemeClr val="accent1"/>
+        </a:effectRef>
+        <a:fontRef idx="minor">
+          <a:schemeClr val="tx1"/>
+        </a:fontRef>
+      </a:style>
+    </a:lnDef>
+  </a:objectDefaults>
+  <a:extraClrSchemeLst/>
+  <a:extLst>
+    <a:ext uri="{05A4C25C-085E-4340-85A3-A5531E510DB2}">
+      <thm15:themeFamily xmlns:thm15="http://schemas.microsoft.com/office/thememl/2012/main" name="Office Theme" id="{2E142A2C-CD16-42D6-873A-C26D2A0506FA}" vid="{1BDDFF52-6CD6-40A5-AB3C-68EB2F1E4D0A}"/>
+    </a:ext>
+  </a:extLst>
+</a:theme>
 </file>